--- a/presentation/FinSight_AI_Pitch_Deck_Enterprise.pptx
+++ b/presentation/FinSight_AI_Pitch_Deck_Enterprise.pptx
@@ -3108,11 +3108,11 @@
             <a:avLst/>
           </a:prstGeom>
           <a:solidFill>
-            <a:srgbClr val="0B0F19"/>
+            <a:srgbClr val="06090E"/>
           </a:solidFill>
           <a:ln>
             <a:solidFill>
-              <a:srgbClr val="0B0F19"/>
+              <a:srgbClr val="06090E"/>
             </a:solidFill>
           </a:ln>
         </p:spPr>
@@ -3140,105 +3140,24 @@
       </p:sp>
       <p:sp>
         <p:nvSpPr>
-          <p:cNvPr id="3" name="TextBox 2"/>
-          <p:cNvSpPr txBox="1"/>
-          <p:nvPr/>
-        </p:nvSpPr>
-        <p:spPr>
-          <a:xfrm>
-            <a:off x="914400" y="1554480"/>
-            <a:ext cx="10332720" cy="3474720"/>
-          </a:xfrm>
-          <a:prstGeom prst="rect">
-            <a:avLst/>
-          </a:prstGeom>
-          <a:noFill/>
-        </p:spPr>
-        <p:txBody>
-          <a:bodyPr wrap="square">
-            <a:spAutoFit/>
-          </a:bodyPr>
-          <a:lstStyle/>
-          <a:p>
-            <a:pPr>
-              <a:defRPr sz="1200" b="1">
-                <a:solidFill>
-                  <a:srgbClr val="38BDF8"/>
-                </a:solidFill>
-              </a:defRPr>
-            </a:pPr>
-            <a:r>
-              <a:t>AI2B HACKATHON 2026 • COMMERCIAL CREDIT &amp; CAPITAL READINESS</a:t>
-            </a:r>
-          </a:p>
-          <a:p>
-            <a:pPr>
-              <a:spcAft>
-                <a:spcPts val="1000"/>
-              </a:spcAft>
-              <a:defRPr sz="5600" b="1">
-                <a:solidFill>
-                  <a:srgbClr val="FFFFFF"/>
-                </a:solidFill>
-              </a:defRPr>
-            </a:pPr>
-            <a:r>
-              <a:t>FinSight AI</a:t>
-            </a:r>
-          </a:p>
-          <a:p>
-            <a:pPr>
-              <a:spcAft>
-                <a:spcPts val="2000"/>
-              </a:spcAft>
-              <a:defRPr sz="2400">
-                <a:solidFill>
-                  <a:srgbClr val="38BDF8"/>
-                </a:solidFill>
-              </a:defRPr>
-            </a:pPr>
-            <a:r>
-              <a:t>The Autonomous Credit &amp; Capital Readiness Engine for SMEs</a:t>
-            </a:r>
-          </a:p>
-          <a:p>
-            <a:pPr>
-              <a:defRPr sz="1500">
-                <a:solidFill>
-                  <a:srgbClr val="94A3B8"/>
-                </a:solidFill>
-              </a:defRPr>
-            </a:pPr>
-            <a:r>
-              <a:t>Empowering European SMEs to unlock optimal bank financing:</a:t>
-            </a:r>
-            <a:br/>
-            <a:r>
-              <a:t>Turning historical balance sheets, central bank benchmarks, and ESG audits into a certified credit dossier in 14 seconds.</a:t>
-            </a:r>
-          </a:p>
-        </p:txBody>
-      </p:sp>
-      <p:sp>
-        <p:nvSpPr>
-          <p:cNvPr id="4" name="Rounded Rectangle 3"/>
+          <p:cNvPr id="3" name="Rounded Rectangle 2"/>
           <p:cNvSpPr/>
           <p:nvPr/>
         </p:nvSpPr>
         <p:spPr>
           <a:xfrm>
-            <a:off x="914400" y="5303520"/>
-            <a:ext cx="10332720" cy="822960"/>
+            <a:off x="731520" y="731520"/>
+            <a:ext cx="5669280" cy="347472"/>
           </a:xfrm>
           <a:prstGeom prst="roundRect">
             <a:avLst/>
           </a:prstGeom>
           <a:solidFill>
-            <a:srgbClr val="111827"/>
+            <a:srgbClr val="0F172A"/>
           </a:solidFill>
-          <a:ln w="19050">
+          <a:ln w="15240">
             <a:solidFill>
-              <a:srgbClr val="1F2937"/>
+              <a:srgbClr val="38BDF8"/>
             </a:solidFill>
           </a:ln>
         </p:spPr>
@@ -3257,23 +3176,33 @@
           </a:fontRef>
         </p:style>
         <p:txBody>
-          <a:bodyPr rtlCol="0" anchor="ctr"/>
-          <a:lstStyle/>
-          <a:p>
-            <a:pPr algn="ctr"/>
-          </a:p>
-        </p:txBody>
-      </p:sp>
-      <p:sp>
-        <p:nvSpPr>
-          <p:cNvPr id="5" name="TextBox 4"/>
+          <a:bodyPr rtlCol="0" anchor="ctr" lIns="137160" tIns="36576"/>
+          <a:lstStyle/>
+          <a:p>
+            <a:pPr algn="ctr">
+              <a:defRPr sz="900" b="1">
+                <a:solidFill>
+                  <a:srgbClr val="38BDF8"/>
+                </a:solidFill>
+                <a:latin typeface="Consolas"/>
+              </a:defRPr>
+            </a:pPr>
+            <a:r>
+              <a:t>⚡ DUCKDB IN-MEMORY OLAP ENGINE  //  LATENCY &lt; 4ms  //  EBA COMPLIANT</a:t>
+            </a:r>
+          </a:p>
+        </p:txBody>
+      </p:sp>
+      <p:sp>
+        <p:nvSpPr>
+          <p:cNvPr id="4" name="TextBox 3"/>
           <p:cNvSpPr txBox="1"/>
           <p:nvPr/>
         </p:nvSpPr>
         <p:spPr>
           <a:xfrm>
-            <a:off x="1097280" y="5440680"/>
-            <a:ext cx="9966960" cy="548640"/>
+            <a:off x="731520" y="1234440"/>
+            <a:ext cx="10698480" cy="2926080"/>
           </a:xfrm>
           <a:prstGeom prst="rect">
             <a:avLst/>
@@ -3281,20 +3210,598 @@
           <a:noFill/>
         </p:spPr>
         <p:txBody>
-          <a:bodyPr wrap="none">
+          <a:bodyPr wrap="square" lIns="0" tIns="0">
             <a:spAutoFit/>
           </a:bodyPr>
           <a:lstStyle/>
           <a:p>
             <a:pPr>
-              <a:defRPr sz="1200" b="1">
+              <a:spcAft>
+                <a:spcPts val="400"/>
+              </a:spcAft>
+              <a:defRPr sz="5600" b="1">
                 <a:solidFill>
                   <a:srgbClr val="FFFFFF"/>
                 </a:solidFill>
-              </a:defRPr>
-            </a:pPr>
-            <a:r>
-              <a:t>TEAM: Loop Troops  |  PROVING CASE: EcoTex Milano (€750k Green Loan)  |  TECH: DuckDB + Python 3.11 + Streamlit</a:t>
+                <a:latin typeface="Segoe UI"/>
+              </a:defRPr>
+            </a:pPr>
+            <a:r>
+              <a:t>FinSight AI</a:t>
+            </a:r>
+          </a:p>
+          <a:p>
+            <a:pPr>
+              <a:spcAft>
+                <a:spcPts val="1400"/>
+              </a:spcAft>
+              <a:defRPr sz="2200" b="1">
+                <a:solidFill>
+                  <a:srgbClr val="38BDF8"/>
+                </a:solidFill>
+                <a:latin typeface="Segoe UI"/>
+              </a:defRPr>
+            </a:pPr>
+            <a:r>
+              <a:t>The Autonomous SME Credit Readiness &amp; Capital Sizing Copilot</a:t>
+            </a:r>
+          </a:p>
+          <a:p>
+            <a:pPr>
+              <a:defRPr sz="1400">
+                <a:solidFill>
+                  <a:srgbClr val="94A3B8"/>
+                </a:solidFill>
+                <a:latin typeface="Segoe UI"/>
+              </a:defRPr>
+            </a:pPr>
+            <a:r>
+              <a:t>Eliminating the 3-week borrowing black box for European SMEs.</a:t>
+            </a:r>
+            <a:br/>
+            <a:r>
+              <a:t>Fusing statutory balance sheets, Banca d'Italia provincial default data, and ESG disclosures</a:t>
+            </a:r>
+            <a:br/>
+            <a:r>
+              <a:t>into an institutional, pre-underwritten credit dossier in 14 seconds.</a:t>
+            </a:r>
+          </a:p>
+        </p:txBody>
+      </p:sp>
+      <p:sp>
+        <p:nvSpPr>
+          <p:cNvPr id="5" name="Rounded Rectangle 4"/>
+          <p:cNvSpPr/>
+          <p:nvPr/>
+        </p:nvSpPr>
+        <p:spPr>
+          <a:xfrm>
+            <a:off x="731520" y="4297680"/>
+            <a:ext cx="3474720" cy="1463040"/>
+          </a:xfrm>
+          <a:prstGeom prst="roundRect">
+            <a:avLst/>
+          </a:prstGeom>
+          <a:solidFill>
+            <a:srgbClr val="0D1320"/>
+          </a:solidFill>
+          <a:ln w="15240">
+            <a:solidFill>
+              <a:srgbClr val="1E293B"/>
+            </a:solidFill>
+          </a:ln>
+        </p:spPr>
+        <p:style>
+          <a:lnRef idx="1">
+            <a:schemeClr val="accent1"/>
+          </a:lnRef>
+          <a:fillRef idx="3">
+            <a:schemeClr val="accent1"/>
+          </a:fillRef>
+          <a:effectRef idx="2">
+            <a:schemeClr val="accent1"/>
+          </a:effectRef>
+          <a:fontRef idx="minor">
+            <a:schemeClr val="lt1"/>
+          </a:fontRef>
+        </p:style>
+        <p:txBody>
+          <a:bodyPr rtlCol="0" anchor="ctr"/>
+          <a:lstStyle/>
+          <a:p>
+            <a:pPr algn="ctr"/>
+          </a:p>
+        </p:txBody>
+      </p:sp>
+      <p:sp>
+        <p:nvSpPr>
+          <p:cNvPr id="6" name="Rectangle 5"/>
+          <p:cNvSpPr/>
+          <p:nvPr/>
+        </p:nvSpPr>
+        <p:spPr>
+          <a:xfrm>
+            <a:off x="804672" y="4315968"/>
+            <a:ext cx="3328416" cy="32004"/>
+          </a:xfrm>
+          <a:prstGeom prst="rect">
+            <a:avLst/>
+          </a:prstGeom>
+          <a:solidFill>
+            <a:srgbClr val="38BDF8"/>
+          </a:solidFill>
+          <a:ln>
+            <a:solidFill>
+              <a:srgbClr val="38BDF8"/>
+            </a:solidFill>
+          </a:ln>
+        </p:spPr>
+        <p:style>
+          <a:lnRef idx="1">
+            <a:schemeClr val="accent1"/>
+          </a:lnRef>
+          <a:fillRef idx="3">
+            <a:schemeClr val="accent1"/>
+          </a:fillRef>
+          <a:effectRef idx="2">
+            <a:schemeClr val="accent1"/>
+          </a:effectRef>
+          <a:fontRef idx="minor">
+            <a:schemeClr val="lt1"/>
+          </a:fontRef>
+        </p:style>
+        <p:txBody>
+          <a:bodyPr rtlCol="0" anchor="ctr"/>
+          <a:lstStyle/>
+          <a:p>
+            <a:pPr algn="ctr"/>
+          </a:p>
+        </p:txBody>
+      </p:sp>
+      <p:sp>
+        <p:nvSpPr>
+          <p:cNvPr id="7" name="TextBox 6"/>
+          <p:cNvSpPr txBox="1"/>
+          <p:nvPr/>
+        </p:nvSpPr>
+        <p:spPr>
+          <a:xfrm>
+            <a:off x="960120" y="4434840"/>
+            <a:ext cx="3017520" cy="1188720"/>
+          </a:xfrm>
+          <a:prstGeom prst="rect">
+            <a:avLst/>
+          </a:prstGeom>
+          <a:noFill/>
+        </p:spPr>
+        <p:txBody>
+          <a:bodyPr wrap="square" lIns="0" tIns="0">
+            <a:spAutoFit/>
+          </a:bodyPr>
+          <a:lstStyle/>
+          <a:p>
+            <a:pPr>
+              <a:defRPr sz="850" b="1">
+                <a:solidFill>
+                  <a:srgbClr val="64748B"/>
+                </a:solidFill>
+                <a:latin typeface="Consolas"/>
+              </a:defRPr>
+            </a:pPr>
+            <a:r>
+              <a:t>EXECUTION LATENCY</a:t>
+            </a:r>
+          </a:p>
+          <a:p>
+            <a:pPr>
+              <a:defRPr sz="3800" b="1">
+                <a:solidFill>
+                  <a:srgbClr val="38BDF8"/>
+                </a:solidFill>
+                <a:latin typeface="Consolas"/>
+              </a:defRPr>
+            </a:pPr>
+            <a:r>
+              <a:t>14s</a:t>
+            </a:r>
+          </a:p>
+          <a:p>
+            <a:pPr>
+              <a:defRPr sz="950">
+                <a:solidFill>
+                  <a:srgbClr val="94A3B8"/>
+                </a:solidFill>
+                <a:latin typeface="Segoe UI"/>
+              </a:defRPr>
+            </a:pPr>
+            <a:r>
+              <a:t>vs 21 Days Bank Processing</a:t>
+            </a:r>
+          </a:p>
+        </p:txBody>
+      </p:sp>
+      <p:sp>
+        <p:nvSpPr>
+          <p:cNvPr id="8" name="Rounded Rectangle 7"/>
+          <p:cNvSpPr/>
+          <p:nvPr/>
+        </p:nvSpPr>
+        <p:spPr>
+          <a:xfrm>
+            <a:off x="4343400" y="4297680"/>
+            <a:ext cx="3474720" cy="1463040"/>
+          </a:xfrm>
+          <a:prstGeom prst="roundRect">
+            <a:avLst/>
+          </a:prstGeom>
+          <a:solidFill>
+            <a:srgbClr val="0D1320"/>
+          </a:solidFill>
+          <a:ln w="15240">
+            <a:solidFill>
+              <a:srgbClr val="1E293B"/>
+            </a:solidFill>
+          </a:ln>
+        </p:spPr>
+        <p:style>
+          <a:lnRef idx="1">
+            <a:schemeClr val="accent1"/>
+          </a:lnRef>
+          <a:fillRef idx="3">
+            <a:schemeClr val="accent1"/>
+          </a:fillRef>
+          <a:effectRef idx="2">
+            <a:schemeClr val="accent1"/>
+          </a:effectRef>
+          <a:fontRef idx="minor">
+            <a:schemeClr val="lt1"/>
+          </a:fontRef>
+        </p:style>
+        <p:txBody>
+          <a:bodyPr rtlCol="0" anchor="ctr"/>
+          <a:lstStyle/>
+          <a:p>
+            <a:pPr algn="ctr"/>
+          </a:p>
+        </p:txBody>
+      </p:sp>
+      <p:sp>
+        <p:nvSpPr>
+          <p:cNvPr id="9" name="Rectangle 8"/>
+          <p:cNvSpPr/>
+          <p:nvPr/>
+        </p:nvSpPr>
+        <p:spPr>
+          <a:xfrm>
+            <a:off x="4416552" y="4315968"/>
+            <a:ext cx="3328416" cy="32004"/>
+          </a:xfrm>
+          <a:prstGeom prst="rect">
+            <a:avLst/>
+          </a:prstGeom>
+          <a:solidFill>
+            <a:srgbClr val="10B981"/>
+          </a:solidFill>
+          <a:ln>
+            <a:solidFill>
+              <a:srgbClr val="10B981"/>
+            </a:solidFill>
+          </a:ln>
+        </p:spPr>
+        <p:style>
+          <a:lnRef idx="1">
+            <a:schemeClr val="accent1"/>
+          </a:lnRef>
+          <a:fillRef idx="3">
+            <a:schemeClr val="accent1"/>
+          </a:fillRef>
+          <a:effectRef idx="2">
+            <a:schemeClr val="accent1"/>
+          </a:effectRef>
+          <a:fontRef idx="minor">
+            <a:schemeClr val="lt1"/>
+          </a:fontRef>
+        </p:style>
+        <p:txBody>
+          <a:bodyPr rtlCol="0" anchor="ctr"/>
+          <a:lstStyle/>
+          <a:p>
+            <a:pPr algn="ctr"/>
+          </a:p>
+        </p:txBody>
+      </p:sp>
+      <p:sp>
+        <p:nvSpPr>
+          <p:cNvPr id="10" name="TextBox 9"/>
+          <p:cNvSpPr txBox="1"/>
+          <p:nvPr/>
+        </p:nvSpPr>
+        <p:spPr>
+          <a:xfrm>
+            <a:off x="4572000" y="4434840"/>
+            <a:ext cx="3017520" cy="1188720"/>
+          </a:xfrm>
+          <a:prstGeom prst="rect">
+            <a:avLst/>
+          </a:prstGeom>
+          <a:noFill/>
+        </p:spPr>
+        <p:txBody>
+          <a:bodyPr wrap="square" lIns="0" tIns="0">
+            <a:spAutoFit/>
+          </a:bodyPr>
+          <a:lstStyle/>
+          <a:p>
+            <a:pPr>
+              <a:defRPr sz="850" b="1">
+                <a:solidFill>
+                  <a:srgbClr val="64748B"/>
+                </a:solidFill>
+                <a:latin typeface="Consolas"/>
+              </a:defRPr>
+            </a:pPr>
+            <a:r>
+              <a:t>UNDERWRITING CERTAINTY</a:t>
+            </a:r>
+          </a:p>
+          <a:p>
+            <a:pPr>
+              <a:defRPr sz="3800" b="1">
+                <a:solidFill>
+                  <a:srgbClr val="10B981"/>
+                </a:solidFill>
+                <a:latin typeface="Consolas"/>
+              </a:defRPr>
+            </a:pPr>
+            <a:r>
+              <a:t>94%</a:t>
+            </a:r>
+          </a:p>
+          <a:p>
+            <a:pPr>
+              <a:defRPr sz="950">
+                <a:solidFill>
+                  <a:srgbClr val="94A3B8"/>
+                </a:solidFill>
+                <a:latin typeface="Segoe UI"/>
+              </a:defRPr>
+            </a:pPr>
+            <a:r>
+              <a:t>Banca d'Italia Pre-Audited</a:t>
+            </a:r>
+          </a:p>
+        </p:txBody>
+      </p:sp>
+      <p:sp>
+        <p:nvSpPr>
+          <p:cNvPr id="11" name="Rounded Rectangle 10"/>
+          <p:cNvSpPr/>
+          <p:nvPr/>
+        </p:nvSpPr>
+        <p:spPr>
+          <a:xfrm>
+            <a:off x="7955280" y="4297680"/>
+            <a:ext cx="3474720" cy="1463040"/>
+          </a:xfrm>
+          <a:prstGeom prst="roundRect">
+            <a:avLst/>
+          </a:prstGeom>
+          <a:solidFill>
+            <a:srgbClr val="0D1320"/>
+          </a:solidFill>
+          <a:ln w="15240">
+            <a:solidFill>
+              <a:srgbClr val="1E293B"/>
+            </a:solidFill>
+          </a:ln>
+        </p:spPr>
+        <p:style>
+          <a:lnRef idx="1">
+            <a:schemeClr val="accent1"/>
+          </a:lnRef>
+          <a:fillRef idx="3">
+            <a:schemeClr val="accent1"/>
+          </a:fillRef>
+          <a:effectRef idx="2">
+            <a:schemeClr val="accent1"/>
+          </a:effectRef>
+          <a:fontRef idx="minor">
+            <a:schemeClr val="lt1"/>
+          </a:fontRef>
+        </p:style>
+        <p:txBody>
+          <a:bodyPr rtlCol="0" anchor="ctr"/>
+          <a:lstStyle/>
+          <a:p>
+            <a:pPr algn="ctr"/>
+          </a:p>
+        </p:txBody>
+      </p:sp>
+      <p:sp>
+        <p:nvSpPr>
+          <p:cNvPr id="12" name="Rectangle 11"/>
+          <p:cNvSpPr/>
+          <p:nvPr/>
+        </p:nvSpPr>
+        <p:spPr>
+          <a:xfrm>
+            <a:off x="8028432" y="4315968"/>
+            <a:ext cx="3328416" cy="32004"/>
+          </a:xfrm>
+          <a:prstGeom prst="rect">
+            <a:avLst/>
+          </a:prstGeom>
+          <a:solidFill>
+            <a:srgbClr val="34D399"/>
+          </a:solidFill>
+          <a:ln>
+            <a:solidFill>
+              <a:srgbClr val="34D399"/>
+            </a:solidFill>
+          </a:ln>
+        </p:spPr>
+        <p:style>
+          <a:lnRef idx="1">
+            <a:schemeClr val="accent1"/>
+          </a:lnRef>
+          <a:fillRef idx="3">
+            <a:schemeClr val="accent1"/>
+          </a:fillRef>
+          <a:effectRef idx="2">
+            <a:schemeClr val="accent1"/>
+          </a:effectRef>
+          <a:fontRef idx="minor">
+            <a:schemeClr val="lt1"/>
+          </a:fontRef>
+        </p:style>
+        <p:txBody>
+          <a:bodyPr rtlCol="0" anchor="ctr"/>
+          <a:lstStyle/>
+          <a:p>
+            <a:pPr algn="ctr"/>
+          </a:p>
+        </p:txBody>
+      </p:sp>
+      <p:sp>
+        <p:nvSpPr>
+          <p:cNvPr id="13" name="TextBox 12"/>
+          <p:cNvSpPr txBox="1"/>
+          <p:nvPr/>
+        </p:nvSpPr>
+        <p:spPr>
+          <a:xfrm>
+            <a:off x="8183880" y="4434840"/>
+            <a:ext cx="3017520" cy="1188720"/>
+          </a:xfrm>
+          <a:prstGeom prst="rect">
+            <a:avLst/>
+          </a:prstGeom>
+          <a:noFill/>
+        </p:spPr>
+        <p:txBody>
+          <a:bodyPr wrap="square" lIns="0" tIns="0">
+            <a:spAutoFit/>
+          </a:bodyPr>
+          <a:lstStyle/>
+          <a:p>
+            <a:pPr>
+              <a:defRPr sz="850" b="1">
+                <a:solidFill>
+                  <a:srgbClr val="64748B"/>
+                </a:solidFill>
+                <a:latin typeface="Consolas"/>
+              </a:defRPr>
+            </a:pPr>
+            <a:r>
+              <a:t>ACCIDENTAL BLACK BOX</a:t>
+            </a:r>
+          </a:p>
+          <a:p>
+            <a:pPr>
+              <a:defRPr sz="3800" b="1">
+                <a:solidFill>
+                  <a:srgbClr val="34D399"/>
+                </a:solidFill>
+                <a:latin typeface="Consolas"/>
+              </a:defRPr>
+            </a:pPr>
+            <a:r>
+              <a:t>0%</a:t>
+            </a:r>
+          </a:p>
+          <a:p>
+            <a:pPr>
+              <a:defRPr sz="950">
+                <a:solidFill>
+                  <a:srgbClr val="94A3B8"/>
+                </a:solidFill>
+                <a:latin typeface="Segoe UI"/>
+              </a:defRPr>
+            </a:pPr>
+            <a:r>
+              <a:t>Deterministic DuckDB Engine</a:t>
+            </a:r>
+          </a:p>
+        </p:txBody>
+      </p:sp>
+      <p:sp>
+        <p:nvSpPr>
+          <p:cNvPr id="14" name="Rounded Rectangle 13"/>
+          <p:cNvSpPr/>
+          <p:nvPr/>
+        </p:nvSpPr>
+        <p:spPr>
+          <a:xfrm>
+            <a:off x="731520" y="5943600"/>
+            <a:ext cx="10698480" cy="502920"/>
+          </a:xfrm>
+          <a:prstGeom prst="roundRect">
+            <a:avLst/>
+          </a:prstGeom>
+          <a:solidFill>
+            <a:srgbClr val="111827"/>
+          </a:solidFill>
+          <a:ln w="15240">
+            <a:solidFill>
+              <a:srgbClr val="0284C7"/>
+            </a:solidFill>
+          </a:ln>
+        </p:spPr>
+        <p:style>
+          <a:lnRef idx="1">
+            <a:schemeClr val="accent1"/>
+          </a:lnRef>
+          <a:fillRef idx="3">
+            <a:schemeClr val="accent1"/>
+          </a:fillRef>
+          <a:effectRef idx="2">
+            <a:schemeClr val="accent1"/>
+          </a:effectRef>
+          <a:fontRef idx="minor">
+            <a:schemeClr val="lt1"/>
+          </a:fontRef>
+        </p:style>
+        <p:txBody>
+          <a:bodyPr rtlCol="0" anchor="ctr"/>
+          <a:lstStyle/>
+          <a:p>
+            <a:pPr algn="ctr"/>
+          </a:p>
+        </p:txBody>
+      </p:sp>
+      <p:sp>
+        <p:nvSpPr>
+          <p:cNvPr id="15" name="TextBox 14"/>
+          <p:cNvSpPr txBox="1"/>
+          <p:nvPr/>
+        </p:nvSpPr>
+        <p:spPr>
+          <a:xfrm>
+            <a:off x="914400" y="6016752"/>
+            <a:ext cx="10332720" cy="365760"/>
+          </a:xfrm>
+          <a:prstGeom prst="rect">
+            <a:avLst/>
+          </a:prstGeom>
+          <a:noFill/>
+        </p:spPr>
+        <p:txBody>
+          <a:bodyPr wrap="none" lIns="0" tIns="0">
+            <a:spAutoFit/>
+          </a:bodyPr>
+          <a:lstStyle/>
+          <a:p>
+            <a:pPr>
+              <a:defRPr sz="950" b="1">
+                <a:solidFill>
+                  <a:srgbClr val="F1F5F9"/>
+                </a:solidFill>
+                <a:latin typeface="Consolas"/>
+              </a:defRPr>
+            </a:pPr>
+            <a:r>
+              <a:t>PROVING CASE: EcoTex Milano S.p.A. (€750k CapEx Facility)  |  DISTRIBUTION: 120,000 Italian Corporate Accounting Firms  |  TEAM: Loop Troops</a:t>
             </a:r>
           </a:p>
         </p:txBody>
@@ -3332,11 +3839,11 @@
             <a:avLst/>
           </a:prstGeom>
           <a:solidFill>
-            <a:srgbClr val="0B0F19"/>
+            <a:srgbClr val="06090E"/>
           </a:solidFill>
           <a:ln>
             <a:solidFill>
-              <a:srgbClr val="0B0F19"/>
+              <a:srgbClr val="06090E"/>
             </a:solidFill>
           </a:ln>
         </p:spPr>
@@ -3364,109 +3871,24 @@
       </p:sp>
       <p:sp>
         <p:nvSpPr>
-          <p:cNvPr id="3" name="TextBox 2"/>
-          <p:cNvSpPr txBox="1"/>
-          <p:nvPr/>
-        </p:nvSpPr>
-        <p:spPr>
-          <a:xfrm>
-            <a:off x="731520" y="411480"/>
-            <a:ext cx="10698480" cy="320040"/>
-          </a:xfrm>
-          <a:prstGeom prst="rect">
-            <a:avLst/>
-          </a:prstGeom>
-          <a:noFill/>
-        </p:spPr>
-        <p:txBody>
-          <a:bodyPr wrap="none">
-            <a:spAutoFit/>
-          </a:bodyPr>
-          <a:lstStyle/>
-          <a:p>
-            <a:pPr>
-              <a:defRPr sz="1100" b="1">
-                <a:solidFill>
-                  <a:srgbClr val="38BDF8"/>
-                </a:solidFill>
-                <a:latin typeface="Arial"/>
-              </a:defRPr>
-            </a:pPr>
-            <a:r>
-              <a:t>THE MARKET FRICTION</a:t>
-            </a:r>
-          </a:p>
-        </p:txBody>
-      </p:sp>
-      <p:sp>
-        <p:nvSpPr>
-          <p:cNvPr id="4" name="TextBox 3"/>
-          <p:cNvSpPr txBox="1"/>
-          <p:nvPr/>
-        </p:nvSpPr>
-        <p:spPr>
-          <a:xfrm>
-            <a:off x="731520" y="777240"/>
-            <a:ext cx="10698480" cy="914400"/>
-          </a:xfrm>
-          <a:prstGeom prst="rect">
-            <a:avLst/>
-          </a:prstGeom>
-          <a:noFill/>
-        </p:spPr>
-        <p:txBody>
-          <a:bodyPr wrap="square">
-            <a:spAutoFit/>
-          </a:bodyPr>
-          <a:lstStyle/>
-          <a:p>
-            <a:pPr>
-              <a:defRPr sz="2800" b="1">
-                <a:solidFill>
-                  <a:srgbClr val="FFFFFF"/>
-                </a:solidFill>
-                <a:latin typeface="Arial"/>
-              </a:defRPr>
-            </a:pPr>
-            <a:r>
-              <a:t>Why 40% of Sound SMEs Face Rejection or Rate Spikes</a:t>
-            </a:r>
-          </a:p>
-          <a:p>
-            <a:pPr>
-              <a:defRPr sz="1400">
-                <a:solidFill>
-                  <a:srgbClr val="94A3B8"/>
-                </a:solidFill>
-                <a:latin typeface="Arial"/>
-              </a:defRPr>
-            </a:pPr>
-            <a:r>
-              <a:t>SMEs apply to banks blindfolded, triggering delays, covenant breaches, and mispriced loans.</a:t>
-            </a:r>
-          </a:p>
-        </p:txBody>
-      </p:sp>
-      <p:sp>
-        <p:nvSpPr>
-          <p:cNvPr id="5" name="Rounded Rectangle 4"/>
+          <p:cNvPr id="3" name="Rounded Rectangle 2"/>
           <p:cNvSpPr/>
           <p:nvPr/>
         </p:nvSpPr>
         <p:spPr>
           <a:xfrm>
-            <a:off x="731520" y="2011680"/>
-            <a:ext cx="3383280" cy="4114800"/>
+            <a:off x="731520" y="347472"/>
+            <a:ext cx="3108960" cy="256032"/>
           </a:xfrm>
           <a:prstGeom prst="roundRect">
             <a:avLst/>
           </a:prstGeom>
           <a:solidFill>
-            <a:srgbClr val="111827"/>
+            <a:srgbClr val="0F172A"/>
           </a:solidFill>
-          <a:ln w="19050">
+          <a:ln w="12700">
             <a:solidFill>
-              <a:srgbClr val="1F2937"/>
+              <a:srgbClr val="38BDF8"/>
             </a:solidFill>
           </a:ln>
         </p:spPr>
@@ -3485,23 +3907,33 @@
           </a:fontRef>
         </p:style>
         <p:txBody>
-          <a:bodyPr rtlCol="0" anchor="ctr"/>
-          <a:lstStyle/>
-          <a:p>
-            <a:pPr algn="ctr"/>
-          </a:p>
-        </p:txBody>
-      </p:sp>
-      <p:sp>
-        <p:nvSpPr>
-          <p:cNvPr id="6" name="TextBox 5"/>
+          <a:bodyPr rtlCol="0" anchor="ctr" wrap="none" tIns="18288"/>
+          <a:lstStyle/>
+          <a:p>
+            <a:pPr algn="ctr">
+              <a:defRPr sz="850" b="1">
+                <a:solidFill>
+                  <a:srgbClr val="38BDF8"/>
+                </a:solidFill>
+                <a:latin typeface="Consolas"/>
+              </a:defRPr>
+            </a:pPr>
+            <a:r>
+              <a:t>●  MARKET FRICTION &amp; INFORMATION ASYMMETRY</a:t>
+            </a:r>
+          </a:p>
+        </p:txBody>
+      </p:sp>
+      <p:sp>
+        <p:nvSpPr>
+          <p:cNvPr id="4" name="TextBox 3"/>
           <p:cNvSpPr txBox="1"/>
           <p:nvPr/>
         </p:nvSpPr>
         <p:spPr>
           <a:xfrm>
-            <a:off x="914400" y="2148840"/>
-            <a:ext cx="3017520" cy="411480"/>
+            <a:off x="731520" y="658368"/>
+            <a:ext cx="10698480" cy="1051560"/>
           </a:xfrm>
           <a:prstGeom prst="rect">
             <a:avLst/>
@@ -3509,143 +3941,61 @@
           <a:noFill/>
         </p:spPr>
         <p:txBody>
-          <a:bodyPr wrap="none">
+          <a:bodyPr wrap="square" lIns="0" tIns="0" rIns="0" bIns="0">
             <a:spAutoFit/>
           </a:bodyPr>
           <a:lstStyle/>
           <a:p>
             <a:pPr>
-              <a:defRPr sz="1100" b="1">
-                <a:solidFill>
-                  <a:srgbClr val="38BDF8"/>
-                </a:solidFill>
-                <a:latin typeface="Arial"/>
-              </a:defRPr>
-            </a:pPr>
-            <a:r>
-              <a:t>THE INFORMATION ASYMMETRY</a:t>
-            </a:r>
-          </a:p>
-        </p:txBody>
-      </p:sp>
-      <p:sp>
-        <p:nvSpPr>
-          <p:cNvPr id="7" name="TextBox 6"/>
-          <p:cNvSpPr txBox="1"/>
-          <p:nvPr/>
-        </p:nvSpPr>
-        <p:spPr>
-          <a:xfrm>
-            <a:off x="914400" y="2606040"/>
-            <a:ext cx="3017520" cy="3383280"/>
-          </a:xfrm>
-          <a:prstGeom prst="rect">
-            <a:avLst/>
-          </a:prstGeom>
-          <a:noFill/>
-        </p:spPr>
-        <p:txBody>
-          <a:bodyPr wrap="square">
-            <a:spAutoFit/>
-          </a:bodyPr>
-          <a:lstStyle/>
-          <a:p>
-            <a:pPr>
               <a:spcAft>
-                <a:spcPts val="1000"/>
+                <a:spcPts val="400"/>
               </a:spcAft>
-              <a:defRPr sz="1500" b="1">
+              <a:defRPr sz="2500" b="1">
                 <a:solidFill>
                   <a:srgbClr val="FFFFFF"/>
                 </a:solidFill>
-              </a:defRPr>
-            </a:pPr>
-            <a:r>
-              <a:t>Borrowing in the Dark</a:t>
-            </a:r>
-          </a:p>
-          <a:p>
-            <a:pPr>
-              <a:spcAft>
-                <a:spcPts val="500"/>
-              </a:spcAft>
+                <a:latin typeface="Segoe UI"/>
+              </a:defRPr>
+            </a:pPr>
+            <a:r>
+              <a:t>Why 40% of Sound SMEs Face Rejection or Rate Spikes</a:t>
+            </a:r>
+          </a:p>
+          <a:p>
+            <a:pPr>
               <a:defRPr sz="1200">
                 <a:solidFill>
                   <a:srgbClr val="94A3B8"/>
                 </a:solidFill>
-              </a:defRPr>
-            </a:pPr>
-            <a:r>
-              <a:t>• SMEs have no visibility into how credit algorithms evaluate their risk.</a:t>
-            </a:r>
-          </a:p>
-          <a:p>
-            <a:pPr>
-              <a:spcAft>
-                <a:spcPts val="500"/>
-              </a:spcAft>
-              <a:defRPr sz="1200">
-                <a:solidFill>
-                  <a:srgbClr val="94A3B8"/>
-                </a:solidFill>
-              </a:defRPr>
-            </a:pPr>
-            <a:r>
-              <a:t>• They apply without benchmarking against regional default data.</a:t>
-            </a:r>
-          </a:p>
-          <a:p>
-            <a:pPr>
-              <a:spcAft>
-                <a:spcPts val="500"/>
-              </a:spcAft>
-              <a:defRPr sz="1200">
-                <a:solidFill>
-                  <a:srgbClr val="94A3B8"/>
-                </a:solidFill>
-              </a:defRPr>
-            </a:pPr>
-            <a:r>
-              <a:t>• No tool to simulate debt limits before formal application.</a:t>
-            </a:r>
-          </a:p>
-          <a:p>
-            <a:pPr>
-              <a:spcAft>
-                <a:spcPts val="500"/>
-              </a:spcAft>
-              <a:defRPr sz="1200">
-                <a:solidFill>
-                  <a:srgbClr val="94A3B8"/>
-                </a:solidFill>
-              </a:defRPr>
-            </a:pPr>
-            <a:r>
-              <a:t>• Leads to preventable rejections and higher interest margins.</a:t>
-            </a:r>
-          </a:p>
-        </p:txBody>
-      </p:sp>
-      <p:sp>
-        <p:nvSpPr>
-          <p:cNvPr id="8" name="Rounded Rectangle 7"/>
+                <a:latin typeface="Segoe UI"/>
+              </a:defRPr>
+            </a:pPr>
+            <a:r>
+              <a:t>Borrowers apply blindfolded; banks spend weeks manually re-keying data into spreadsheets.</a:t>
+            </a:r>
+          </a:p>
+        </p:txBody>
+      </p:sp>
+      <p:sp>
+        <p:nvSpPr>
+          <p:cNvPr id="5" name="Rounded Rectangle 4"/>
           <p:cNvSpPr/>
           <p:nvPr/>
         </p:nvSpPr>
         <p:spPr>
           <a:xfrm>
-            <a:off x="4389120" y="2011680"/>
-            <a:ext cx="3383280" cy="4114800"/>
+            <a:off x="731520" y="1828800"/>
+            <a:ext cx="5212080" cy="4389120"/>
           </a:xfrm>
           <a:prstGeom prst="roundRect">
             <a:avLst/>
           </a:prstGeom>
           <a:solidFill>
-            <a:srgbClr val="111827"/>
+            <a:srgbClr val="0D1320"/>
           </a:solidFill>
-          <a:ln w="19050">
+          <a:ln w="15240">
             <a:solidFill>
-              <a:srgbClr val="1F2937"/>
+              <a:srgbClr val="1E293B"/>
             </a:solidFill>
           </a:ln>
         </p:spPr>
@@ -3673,158 +4023,24 @@
       </p:sp>
       <p:sp>
         <p:nvSpPr>
-          <p:cNvPr id="9" name="TextBox 8"/>
-          <p:cNvSpPr txBox="1"/>
-          <p:nvPr/>
-        </p:nvSpPr>
-        <p:spPr>
-          <a:xfrm>
-            <a:off x="4572000" y="2148840"/>
-            <a:ext cx="3017520" cy="411480"/>
+          <p:cNvPr id="6" name="Rectangle 5"/>
+          <p:cNvSpPr/>
+          <p:nvPr/>
+        </p:nvSpPr>
+        <p:spPr>
+          <a:xfrm>
+            <a:off x="804672" y="1847088"/>
+            <a:ext cx="5065776" cy="32004"/>
           </a:xfrm>
           <a:prstGeom prst="rect">
             <a:avLst/>
           </a:prstGeom>
-          <a:noFill/>
-        </p:spPr>
-        <p:txBody>
-          <a:bodyPr wrap="none">
-            <a:spAutoFit/>
-          </a:bodyPr>
-          <a:lstStyle/>
-          <a:p>
-            <a:pPr>
-              <a:defRPr sz="1100" b="1">
-                <a:solidFill>
-                  <a:srgbClr val="38BDF8"/>
-                </a:solidFill>
-                <a:latin typeface="Arial"/>
-              </a:defRPr>
-            </a:pPr>
-            <a:r>
-              <a:t>THE LATENCY PENALTY</a:t>
-            </a:r>
-          </a:p>
-        </p:txBody>
-      </p:sp>
-      <p:sp>
-        <p:nvSpPr>
-          <p:cNvPr id="10" name="TextBox 9"/>
-          <p:cNvSpPr txBox="1"/>
-          <p:nvPr/>
-        </p:nvSpPr>
-        <p:spPr>
-          <a:xfrm>
-            <a:off x="4572000" y="2606040"/>
-            <a:ext cx="3017520" cy="3383280"/>
-          </a:xfrm>
-          <a:prstGeom prst="rect">
-            <a:avLst/>
-          </a:prstGeom>
-          <a:noFill/>
-        </p:spPr>
-        <p:txBody>
-          <a:bodyPr wrap="square">
-            <a:spAutoFit/>
-          </a:bodyPr>
-          <a:lstStyle/>
-          <a:p>
-            <a:pPr>
-              <a:spcAft>
-                <a:spcPts val="1000"/>
-              </a:spcAft>
-              <a:defRPr sz="1500" b="1">
-                <a:solidFill>
-                  <a:srgbClr val="FFFFFF"/>
-                </a:solidFill>
-              </a:defRPr>
-            </a:pPr>
-            <a:r>
-              <a:t>The 3-Week Bureaucratic Black Hole</a:t>
-            </a:r>
-          </a:p>
-          <a:p>
-            <a:pPr>
-              <a:spcAft>
-                <a:spcPts val="500"/>
-              </a:spcAft>
-              <a:defRPr sz="1200">
-                <a:solidFill>
-                  <a:srgbClr val="94A3B8"/>
-                </a:solidFill>
-              </a:defRPr>
-            </a:pPr>
-            <a:r>
-              <a:t>• Assembling financial reports and ESG proof takes weeks of manual work.</a:t>
-            </a:r>
-          </a:p>
-          <a:p>
-            <a:pPr>
-              <a:spcAft>
-                <a:spcPts val="500"/>
-              </a:spcAft>
-              <a:defRPr sz="1200">
-                <a:solidFill>
-                  <a:srgbClr val="94A3B8"/>
-                </a:solidFill>
-              </a:defRPr>
-            </a:pPr>
-            <a:r>
-              <a:t>• Bank underwriters manually re-key accounting data into spreadsheets.</a:t>
-            </a:r>
-          </a:p>
-          <a:p>
-            <a:pPr>
-              <a:spcAft>
-                <a:spcPts val="500"/>
-              </a:spcAft>
-              <a:defRPr sz="1200">
-                <a:solidFill>
-                  <a:srgbClr val="94A3B8"/>
-                </a:solidFill>
-              </a:defRPr>
-            </a:pPr>
-            <a:r>
-              <a:t>• Capex machinery investments stall, delaying business growth.</a:t>
-            </a:r>
-          </a:p>
-          <a:p>
-            <a:pPr>
-              <a:spcAft>
-                <a:spcPts val="500"/>
-              </a:spcAft>
-              <a:defRPr sz="1200">
-                <a:solidFill>
-                  <a:srgbClr val="94A3B8"/>
-                </a:solidFill>
-              </a:defRPr>
-            </a:pPr>
-            <a:r>
-              <a:t>• Competitors seize market opportunities while loans sit in underwriting.</a:t>
-            </a:r>
-          </a:p>
-        </p:txBody>
-      </p:sp>
-      <p:sp>
-        <p:nvSpPr>
-          <p:cNvPr id="11" name="Rounded Rectangle 10"/>
-          <p:cNvSpPr/>
-          <p:nvPr/>
-        </p:nvSpPr>
-        <p:spPr>
-          <a:xfrm>
-            <a:off x="8046720" y="2011680"/>
-            <a:ext cx="3383280" cy="4114800"/>
-          </a:xfrm>
-          <a:prstGeom prst="roundRect">
-            <a:avLst/>
-          </a:prstGeom>
           <a:solidFill>
-            <a:srgbClr val="111827"/>
+            <a:srgbClr val="F43F5E"/>
           </a:solidFill>
-          <a:ln w="19050">
+          <a:ln>
             <a:solidFill>
-              <a:srgbClr val="1F2937"/>
+              <a:srgbClr val="F43F5E"/>
             </a:solidFill>
           </a:ln>
         </p:spPr>
@@ -3852,14 +4068,14 @@
       </p:sp>
       <p:sp>
         <p:nvSpPr>
-          <p:cNvPr id="12" name="TextBox 11"/>
+          <p:cNvPr id="7" name="TextBox 6"/>
           <p:cNvSpPr txBox="1"/>
           <p:nvPr/>
         </p:nvSpPr>
         <p:spPr>
           <a:xfrm>
-            <a:off x="8229600" y="2148840"/>
-            <a:ext cx="3017520" cy="411480"/>
+            <a:off x="1005840" y="1965960"/>
+            <a:ext cx="4663440" cy="4114800"/>
           </a:xfrm>
           <a:prstGeom prst="rect">
             <a:avLst/>
@@ -3867,35 +4083,228 @@
           <a:noFill/>
         </p:spPr>
         <p:txBody>
-          <a:bodyPr wrap="none">
+          <a:bodyPr wrap="square" lIns="0" tIns="0">
             <a:spAutoFit/>
           </a:bodyPr>
           <a:lstStyle/>
           <a:p>
             <a:pPr>
-              <a:defRPr sz="1100" b="1">
-                <a:solidFill>
-                  <a:srgbClr val="38BDF8"/>
-                </a:solidFill>
-                <a:latin typeface="Arial"/>
-              </a:defRPr>
-            </a:pPr>
-            <a:r>
-              <a:t>THE ESG MONETIZATION GAP</a:t>
-            </a:r>
-          </a:p>
-        </p:txBody>
-      </p:sp>
-      <p:sp>
-        <p:nvSpPr>
-          <p:cNvPr id="13" name="TextBox 12"/>
+              <a:defRPr sz="1000" b="1">
+                <a:solidFill>
+                  <a:srgbClr val="F43F5E"/>
+                </a:solidFill>
+                <a:latin typeface="Consolas"/>
+              </a:defRPr>
+            </a:pPr>
+            <a:r>
+              <a:t>THE STATUS QUO // 21-DAY BLACK BOX</a:t>
+            </a:r>
+          </a:p>
+          <a:p>
+            <a:pPr>
+              <a:spcAft>
+                <a:spcPts val="1200"/>
+              </a:spcAft>
+              <a:defRPr sz="2000" b="1">
+                <a:solidFill>
+                  <a:srgbClr val="FFFFFF"/>
+                </a:solidFill>
+                <a:latin typeface="Segoe UI"/>
+              </a:defRPr>
+            </a:pPr>
+            <a:r>
+              <a:t>Borrowing in the Dark</a:t>
+            </a:r>
+          </a:p>
+          <a:p>
+            <a:pPr>
+              <a:defRPr sz="1200" b="1">
+                <a:solidFill>
+                  <a:srgbClr val="F43F5E"/>
+                </a:solidFill>
+                <a:latin typeface="Segoe UI"/>
+              </a:defRPr>
+            </a:pPr>
+            <a:r>
+              <a:t>✖  The Information Vacuum</a:t>
+            </a:r>
+          </a:p>
+          <a:p>
+            <a:pPr>
+              <a:spcAft>
+                <a:spcPts val="800"/>
+              </a:spcAft>
+              <a:defRPr sz="1050">
+                <a:solidFill>
+                  <a:srgbClr val="94A3B8"/>
+                </a:solidFill>
+                <a:latin typeface="Segoe UI"/>
+              </a:defRPr>
+            </a:pPr>
+            <a:r>
+              <a:t>SMEs have zero visibility into credit scoring rules before applying, triggering preventable rejections and margin surcharges.</a:t>
+            </a:r>
+          </a:p>
+          <a:p>
+            <a:pPr>
+              <a:defRPr sz="1200" b="1">
+                <a:solidFill>
+                  <a:srgbClr val="F43F5E"/>
+                </a:solidFill>
+                <a:latin typeface="Segoe UI"/>
+              </a:defRPr>
+            </a:pPr>
+            <a:r>
+              <a:t>✖  The 3-Week Bureaucratic Drag</a:t>
+            </a:r>
+          </a:p>
+          <a:p>
+            <a:pPr>
+              <a:spcAft>
+                <a:spcPts val="800"/>
+              </a:spcAft>
+              <a:defRPr sz="1050">
+                <a:solidFill>
+                  <a:srgbClr val="94A3B8"/>
+                </a:solidFill>
+                <a:latin typeface="Segoe UI"/>
+              </a:defRPr>
+            </a:pPr>
+            <a:r>
+              <a:t>Manual financial re-keying and document assembly stalls CapEx investments; market opportunities vanish while loans sit in underwriting.</a:t>
+            </a:r>
+          </a:p>
+          <a:p>
+            <a:pPr>
+              <a:defRPr sz="1200" b="1">
+                <a:solidFill>
+                  <a:srgbClr val="F43F5E"/>
+                </a:solidFill>
+                <a:latin typeface="Segoe UI"/>
+              </a:defRPr>
+            </a:pPr>
+            <a:r>
+              <a:t>✖  Unmonetized ESG Investments</a:t>
+            </a:r>
+          </a:p>
+          <a:p>
+            <a:pPr>
+              <a:spcAft>
+                <a:spcPts val="800"/>
+              </a:spcAft>
+              <a:defRPr sz="1050">
+                <a:solidFill>
+                  <a:srgbClr val="94A3B8"/>
+                </a:solidFill>
+                <a:latin typeface="Segoe UI"/>
+              </a:defRPr>
+            </a:pPr>
+            <a:r>
+              <a:t>SMEs invest tens of thousands in decarbonization without proof, missing -45 bps rate subsidies and regional transition grants.</a:t>
+            </a:r>
+          </a:p>
+        </p:txBody>
+      </p:sp>
+      <p:sp>
+        <p:nvSpPr>
+          <p:cNvPr id="8" name="Rounded Rectangle 7"/>
+          <p:cNvSpPr/>
+          <p:nvPr/>
+        </p:nvSpPr>
+        <p:spPr>
+          <a:xfrm>
+            <a:off x="6217920" y="1828800"/>
+            <a:ext cx="5212080" cy="4389120"/>
+          </a:xfrm>
+          <a:prstGeom prst="roundRect">
+            <a:avLst/>
+          </a:prstGeom>
+          <a:solidFill>
+            <a:srgbClr val="0D1320"/>
+          </a:solidFill>
+          <a:ln w="15240">
+            <a:solidFill>
+              <a:srgbClr val="1E293B"/>
+            </a:solidFill>
+          </a:ln>
+        </p:spPr>
+        <p:style>
+          <a:lnRef idx="1">
+            <a:schemeClr val="accent1"/>
+          </a:lnRef>
+          <a:fillRef idx="3">
+            <a:schemeClr val="accent1"/>
+          </a:fillRef>
+          <a:effectRef idx="2">
+            <a:schemeClr val="accent1"/>
+          </a:effectRef>
+          <a:fontRef idx="minor">
+            <a:schemeClr val="lt1"/>
+          </a:fontRef>
+        </p:style>
+        <p:txBody>
+          <a:bodyPr rtlCol="0" anchor="ctr"/>
+          <a:lstStyle/>
+          <a:p>
+            <a:pPr algn="ctr"/>
+          </a:p>
+        </p:txBody>
+      </p:sp>
+      <p:sp>
+        <p:nvSpPr>
+          <p:cNvPr id="9" name="Rectangle 8"/>
+          <p:cNvSpPr/>
+          <p:nvPr/>
+        </p:nvSpPr>
+        <p:spPr>
+          <a:xfrm>
+            <a:off x="6291072" y="1847088"/>
+            <a:ext cx="5065776" cy="32004"/>
+          </a:xfrm>
+          <a:prstGeom prst="rect">
+            <a:avLst/>
+          </a:prstGeom>
+          <a:solidFill>
+            <a:srgbClr val="10B981"/>
+          </a:solidFill>
+          <a:ln>
+            <a:solidFill>
+              <a:srgbClr val="10B981"/>
+            </a:solidFill>
+          </a:ln>
+        </p:spPr>
+        <p:style>
+          <a:lnRef idx="1">
+            <a:schemeClr val="accent1"/>
+          </a:lnRef>
+          <a:fillRef idx="3">
+            <a:schemeClr val="accent1"/>
+          </a:fillRef>
+          <a:effectRef idx="2">
+            <a:schemeClr val="accent1"/>
+          </a:effectRef>
+          <a:fontRef idx="minor">
+            <a:schemeClr val="lt1"/>
+          </a:fontRef>
+        </p:style>
+        <p:txBody>
+          <a:bodyPr rtlCol="0" anchor="ctr"/>
+          <a:lstStyle/>
+          <a:p>
+            <a:pPr algn="ctr"/>
+          </a:p>
+        </p:txBody>
+      </p:sp>
+      <p:sp>
+        <p:nvSpPr>
+          <p:cNvPr id="10" name="TextBox 9"/>
           <p:cNvSpPr txBox="1"/>
           <p:nvPr/>
         </p:nvSpPr>
         <p:spPr>
           <a:xfrm>
-            <a:off x="8229600" y="2606040"/>
-            <a:ext cx="3017520" cy="3383280"/>
+            <a:off x="6492240" y="1965960"/>
+            <a:ext cx="4663440" cy="4114800"/>
           </a:xfrm>
           <a:prstGeom prst="rect">
             <a:avLst/>
@@ -3903,83 +4312,160 @@
           <a:noFill/>
         </p:spPr>
         <p:txBody>
-          <a:bodyPr wrap="square">
+          <a:bodyPr wrap="square" lIns="0" tIns="0">
             <a:spAutoFit/>
           </a:bodyPr>
           <a:lstStyle/>
           <a:p>
             <a:pPr>
+              <a:defRPr sz="1000" b="1">
+                <a:solidFill>
+                  <a:srgbClr val="10B981"/>
+                </a:solidFill>
+                <a:latin typeface="Consolas"/>
+              </a:defRPr>
+            </a:pPr>
+            <a:r>
+              <a:t>FINSIGHT AI // DETERMINISTIC CERTAINTY</a:t>
+            </a:r>
+          </a:p>
+          <a:p>
+            <a:pPr>
               <a:spcAft>
-                <a:spcPts val="1000"/>
+                <a:spcPts val="1200"/>
               </a:spcAft>
-              <a:defRPr sz="1500" b="1">
+              <a:defRPr sz="2000" b="1">
                 <a:solidFill>
                   <a:srgbClr val="FFFFFF"/>
                 </a:solidFill>
-              </a:defRPr>
-            </a:pPr>
-            <a:r>
-              <a:t>Unrewarded Sustainability</a:t>
+                <a:latin typeface="Segoe UI"/>
+              </a:defRPr>
+            </a:pPr>
+            <a:r>
+              <a:t>The Algorithmic Advantage</a:t>
+            </a:r>
+          </a:p>
+          <a:p>
+            <a:pPr>
+              <a:defRPr sz="1200" b="1">
+                <a:solidFill>
+                  <a:srgbClr val="34D399"/>
+                </a:solidFill>
+                <a:latin typeface="Segoe UI"/>
+              </a:defRPr>
+            </a:pPr>
+            <a:r>
+              <a:t>✔  Instant Pre-Underwriting (14s)</a:t>
             </a:r>
           </a:p>
           <a:p>
             <a:pPr>
               <a:spcAft>
-                <a:spcPts val="500"/>
+                <a:spcPts val="800"/>
               </a:spcAft>
-              <a:defRPr sz="1200">
+              <a:defRPr sz="1050">
                 <a:solidFill>
                   <a:srgbClr val="94A3B8"/>
                 </a:solidFill>
-              </a:defRPr>
-            </a:pPr>
-            <a:r>
-              <a:t>• SMEs invest in decarbonization and energy efficiency without proof.</a:t>
+                <a:latin typeface="Segoe UI"/>
+              </a:defRPr>
+            </a:pPr>
+            <a:r>
+              <a:t>In-memory DuckDB parses official CEE balance sheets in RAM, computing exact DSCR, leverage, and solvency benchmarks before bank submission.</a:t>
+            </a:r>
+          </a:p>
+          <a:p>
+            <a:pPr>
+              <a:defRPr sz="1200" b="1">
+                <a:solidFill>
+                  <a:srgbClr val="34D399"/>
+                </a:solidFill>
+                <a:latin typeface="Segoe UI"/>
+              </a:defRPr>
+            </a:pPr>
+            <a:r>
+              <a:t>✔  Banca d'Italia Macro Fusion</a:t>
             </a:r>
           </a:p>
           <a:p>
             <a:pPr>
               <a:spcAft>
-                <a:spcPts val="500"/>
+                <a:spcPts val="800"/>
               </a:spcAft>
-              <a:defRPr sz="1200">
+              <a:defRPr sz="1050">
                 <a:solidFill>
                   <a:srgbClr val="94A3B8"/>
                 </a:solidFill>
-              </a:defRPr>
-            </a:pPr>
-            <a:r>
-              <a:t>• Banks fail to recognize green capex due to lack of verifiable data.</a:t>
+                <a:latin typeface="Segoe UI"/>
+              </a:defRPr>
+            </a:pPr>
+            <a:r>
+              <a:t>Integrates provincial default rates (Milan NPL: 1.82%) and Lombardia sector trends (+4.1%) directly into credit bargaining leverage.</a:t>
+            </a:r>
+          </a:p>
+          <a:p>
+            <a:pPr>
+              <a:defRPr sz="1200" b="1">
+                <a:solidFill>
+                  <a:srgbClr val="34D399"/>
+                </a:solidFill>
+                <a:latin typeface="Segoe UI"/>
+              </a:defRPr>
+            </a:pPr>
+            <a:r>
+              <a:t>✔  Capitalized Green Proof</a:t>
             </a:r>
           </a:p>
           <a:p>
             <a:pPr>
               <a:spcAft>
-                <a:spcPts val="500"/>
+                <a:spcPts val="800"/>
               </a:spcAft>
-              <a:defRPr sz="1200">
+              <a:defRPr sz="1050">
                 <a:solidFill>
                   <a:srgbClr val="94A3B8"/>
                 </a:solidFill>
-              </a:defRPr>
-            </a:pPr>
-            <a:r>
-              <a:t>• Companies miss subsidized loan rates and regional transition grants.</a:t>
-            </a:r>
-          </a:p>
-          <a:p>
-            <a:pPr>
-              <a:spcAft>
-                <a:spcPts val="500"/>
-              </a:spcAft>
-              <a:defRPr sz="1200">
-                <a:solidFill>
-                  <a:srgbClr val="94A3B8"/>
-                </a:solidFill>
-              </a:defRPr>
-            </a:pPr>
-            <a:r>
-              <a:t>• Tens of thousands in interest savings left on the table annually.</a:t>
+                <a:latin typeface="Segoe UI"/>
+              </a:defRPr>
+            </a:pPr>
+            <a:r>
+              <a:t>Vector RAG extracts verified ISO and ZDHC audit disclosures to secure subsidized prime rates (-45 bps) and regional grants.</a:t>
+            </a:r>
+          </a:p>
+        </p:txBody>
+      </p:sp>
+      <p:sp>
+        <p:nvSpPr>
+          <p:cNvPr id="11" name="TextBox 10"/>
+          <p:cNvSpPr txBox="1"/>
+          <p:nvPr/>
+        </p:nvSpPr>
+        <p:spPr>
+          <a:xfrm>
+            <a:off x="731520" y="6446520"/>
+            <a:ext cx="10698480" cy="320040"/>
+          </a:xfrm>
+          <a:prstGeom prst="rect">
+            <a:avLst/>
+          </a:prstGeom>
+          <a:noFill/>
+        </p:spPr>
+        <p:txBody>
+          <a:bodyPr wrap="none" lIns="0" tIns="0">
+            <a:spAutoFit/>
+          </a:bodyPr>
+          <a:lstStyle/>
+          <a:p>
+            <a:pPr>
+              <a:defRPr sz="850" b="1">
+                <a:solidFill>
+                  <a:srgbClr val="64748B"/>
+                </a:solidFill>
+                <a:latin typeface="Consolas"/>
+              </a:defRPr>
+            </a:pPr>
+            <a:r>
+              <a:t>DUCKDB 1.0 IN-MEMORY OLAP  |  APPLICATION ID: ECOTEX-2026-IT  |  EBA/GL/2020/06 COMPLIANT  |  TUB ART. 128-SEXIES SEAL</a:t>
             </a:r>
           </a:p>
         </p:txBody>
@@ -4017,11 +4503,11 @@
             <a:avLst/>
           </a:prstGeom>
           <a:solidFill>
-            <a:srgbClr val="0B0F19"/>
+            <a:srgbClr val="06090E"/>
           </a:solidFill>
           <a:ln>
             <a:solidFill>
-              <a:srgbClr val="0B0F19"/>
+              <a:srgbClr val="06090E"/>
             </a:solidFill>
           </a:ln>
         </p:spPr>
@@ -4049,109 +4535,24 @@
       </p:sp>
       <p:sp>
         <p:nvSpPr>
-          <p:cNvPr id="3" name="TextBox 2"/>
-          <p:cNvSpPr txBox="1"/>
-          <p:nvPr/>
-        </p:nvSpPr>
-        <p:spPr>
-          <a:xfrm>
-            <a:off x="731520" y="411480"/>
-            <a:ext cx="10698480" cy="320040"/>
-          </a:xfrm>
-          <a:prstGeom prst="rect">
-            <a:avLst/>
-          </a:prstGeom>
-          <a:noFill/>
-        </p:spPr>
-        <p:txBody>
-          <a:bodyPr wrap="none">
-            <a:spAutoFit/>
-          </a:bodyPr>
-          <a:lstStyle/>
-          <a:p>
-            <a:pPr>
-              <a:defRPr sz="1100" b="1">
-                <a:solidFill>
-                  <a:srgbClr val="38BDF8"/>
-                </a:solidFill>
-                <a:latin typeface="Arial"/>
-              </a:defRPr>
-            </a:pPr>
-            <a:r>
-              <a:t>PROPRIETARY MECHANISM &amp; TECH STACK</a:t>
-            </a:r>
-          </a:p>
-        </p:txBody>
-      </p:sp>
-      <p:sp>
-        <p:nvSpPr>
-          <p:cNvPr id="4" name="TextBox 3"/>
-          <p:cNvSpPr txBox="1"/>
-          <p:nvPr/>
-        </p:nvSpPr>
-        <p:spPr>
-          <a:xfrm>
-            <a:off x="731520" y="777240"/>
-            <a:ext cx="10698480" cy="914400"/>
-          </a:xfrm>
-          <a:prstGeom prst="rect">
-            <a:avLst/>
-          </a:prstGeom>
-          <a:noFill/>
-        </p:spPr>
-        <p:txBody>
-          <a:bodyPr wrap="square">
-            <a:spAutoFit/>
-          </a:bodyPr>
-          <a:lstStyle/>
-          <a:p>
-            <a:pPr>
-              <a:defRPr sz="2800" b="1">
-                <a:solidFill>
-                  <a:srgbClr val="FFFFFF"/>
-                </a:solidFill>
-                <a:latin typeface="Arial"/>
-              </a:defRPr>
-            </a:pPr>
-            <a:r>
-              <a:t>The 4-Stage Architecture: In-Memory, Deterministic, Auditable</a:t>
-            </a:r>
-          </a:p>
-          <a:p>
-            <a:pPr>
-              <a:defRPr sz="1400">
-                <a:solidFill>
-                  <a:srgbClr val="94A3B8"/>
-                </a:solidFill>
-                <a:latin typeface="Arial"/>
-              </a:defRPr>
-            </a:pPr>
-            <a:r>
-              <a:t>Zero mathematical hallucination: combining high-speed analytics with evidence-based AI synthesis.</a:t>
-            </a:r>
-          </a:p>
-        </p:txBody>
-      </p:sp>
-      <p:sp>
-        <p:nvSpPr>
-          <p:cNvPr id="5" name="Rounded Rectangle 4"/>
+          <p:cNvPr id="3" name="Rounded Rectangle 2"/>
           <p:cNvSpPr/>
           <p:nvPr/>
         </p:nvSpPr>
         <p:spPr>
           <a:xfrm>
-            <a:off x="731520" y="2011680"/>
-            <a:ext cx="2560320" cy="4114800"/>
+            <a:off x="731520" y="347472"/>
+            <a:ext cx="3108960" cy="256032"/>
           </a:xfrm>
           <a:prstGeom prst="roundRect">
             <a:avLst/>
           </a:prstGeom>
           <a:solidFill>
-            <a:srgbClr val="111827"/>
+            <a:srgbClr val="0F172A"/>
           </a:solidFill>
-          <a:ln w="19050">
+          <a:ln w="12700">
             <a:solidFill>
-              <a:srgbClr val="2563EB"/>
+              <a:srgbClr val="38BDF8"/>
             </a:solidFill>
           </a:ln>
         </p:spPr>
@@ -4170,23 +4571,33 @@
           </a:fontRef>
         </p:style>
         <p:txBody>
-          <a:bodyPr rtlCol="0" anchor="ctr"/>
-          <a:lstStyle/>
-          <a:p>
-            <a:pPr algn="ctr"/>
-          </a:p>
-        </p:txBody>
-      </p:sp>
-      <p:sp>
-        <p:nvSpPr>
-          <p:cNvPr id="6" name="TextBox 5"/>
+          <a:bodyPr rtlCol="0" anchor="ctr" wrap="none" tIns="18288"/>
+          <a:lstStyle/>
+          <a:p>
+            <a:pPr algn="ctr">
+              <a:defRPr sz="850" b="1">
+                <a:solidFill>
+                  <a:srgbClr val="38BDF8"/>
+                </a:solidFill>
+                <a:latin typeface="Consolas"/>
+              </a:defRPr>
+            </a:pPr>
+            <a:r>
+              <a:t>●  PROPRIETARY MECHANISM &amp; TECH STACK</a:t>
+            </a:r>
+          </a:p>
+        </p:txBody>
+      </p:sp>
+      <p:sp>
+        <p:nvSpPr>
+          <p:cNvPr id="4" name="TextBox 3"/>
           <p:cNvSpPr txBox="1"/>
           <p:nvPr/>
         </p:nvSpPr>
         <p:spPr>
           <a:xfrm>
-            <a:off x="914400" y="2148840"/>
-            <a:ext cx="2194560" cy="411480"/>
+            <a:off x="731520" y="658368"/>
+            <a:ext cx="10698480" cy="1051560"/>
           </a:xfrm>
           <a:prstGeom prst="rect">
             <a:avLst/>
@@ -4194,143 +4605,61 @@
           <a:noFill/>
         </p:spPr>
         <p:txBody>
-          <a:bodyPr wrap="none">
+          <a:bodyPr wrap="square" lIns="0" tIns="0" rIns="0" bIns="0">
             <a:spAutoFit/>
           </a:bodyPr>
           <a:lstStyle/>
           <a:p>
             <a:pPr>
-              <a:defRPr sz="1100" b="1">
-                <a:solidFill>
-                  <a:srgbClr val="38BDF8"/>
-                </a:solidFill>
-                <a:latin typeface="Arial"/>
-              </a:defRPr>
-            </a:pPr>
-            <a:r>
-              <a:t>01 / IN-MEMORY LAKEHOUSE</a:t>
-            </a:r>
-          </a:p>
-        </p:txBody>
-      </p:sp>
-      <p:sp>
-        <p:nvSpPr>
-          <p:cNvPr id="7" name="TextBox 6"/>
-          <p:cNvSpPr txBox="1"/>
-          <p:nvPr/>
-        </p:nvSpPr>
-        <p:spPr>
-          <a:xfrm>
-            <a:off x="868680" y="2606040"/>
-            <a:ext cx="2286000" cy="3383280"/>
-          </a:xfrm>
-          <a:prstGeom prst="rect">
-            <a:avLst/>
-          </a:prstGeom>
-          <a:noFill/>
-        </p:spPr>
-        <p:txBody>
-          <a:bodyPr wrap="square">
-            <a:spAutoFit/>
-          </a:bodyPr>
-          <a:lstStyle/>
-          <a:p>
-            <a:pPr>
               <a:spcAft>
-                <a:spcPts val="1000"/>
+                <a:spcPts val="400"/>
               </a:spcAft>
-              <a:defRPr sz="1400" b="1">
+              <a:defRPr sz="2500" b="1">
                 <a:solidFill>
                   <a:srgbClr val="FFFFFF"/>
                 </a:solidFill>
-              </a:defRPr>
-            </a:pPr>
-            <a:r>
-              <a:t>DuckDB 1.0 (Live OLAP)</a:t>
-            </a:r>
-          </a:p>
-          <a:p>
-            <a:pPr>
-              <a:spcAft>
-                <a:spcPts val="500"/>
-              </a:spcAft>
-              <a:defRPr sz="1150">
+                <a:latin typeface="Segoe UI"/>
+              </a:defRPr>
+            </a:pPr>
+            <a:r>
+              <a:t>The 4-Pillar Glass Box: In-Memory, Deterministic, Auditable</a:t>
+            </a:r>
+          </a:p>
+          <a:p>
+            <a:pPr>
+              <a:defRPr sz="1200">
                 <a:solidFill>
                   <a:srgbClr val="94A3B8"/>
                 </a:solidFill>
-              </a:defRPr>
-            </a:pPr>
-            <a:r>
-              <a:t>• High-performance columnar SQL engine.</a:t>
-            </a:r>
-          </a:p>
-          <a:p>
-            <a:pPr>
-              <a:spcAft>
-                <a:spcPts val="500"/>
-              </a:spcAft>
-              <a:defRPr sz="1150">
-                <a:solidFill>
-                  <a:srgbClr val="94A3B8"/>
-                </a:solidFill>
-              </a:defRPr>
-            </a:pPr>
-            <a:r>
-              <a:t>• Dynamic drag-and-drop ingestion of CSV &amp; PDF balance sheets.</a:t>
-            </a:r>
-          </a:p>
-          <a:p>
-            <a:pPr>
-              <a:spcAft>
-                <a:spcPts val="500"/>
-              </a:spcAft>
-              <a:defRPr sz="1150">
-                <a:solidFill>
-                  <a:srgbClr val="94A3B8"/>
-                </a:solidFill>
-              </a:defRPr>
-            </a:pPr>
-            <a:r>
-              <a:t>• Sub-second parsing directly in RAM.</a:t>
-            </a:r>
-          </a:p>
-          <a:p>
-            <a:pPr>
-              <a:spcAft>
-                <a:spcPts val="500"/>
-              </a:spcAft>
-              <a:defRPr sz="1150">
-                <a:solidFill>
-                  <a:srgbClr val="94A3B8"/>
-                </a:solidFill>
-              </a:defRPr>
-            </a:pPr>
-            <a:r>
-              <a:t>• Total data sovereignty: financial records remain local with zero cloud leaks.</a:t>
-            </a:r>
-          </a:p>
-        </p:txBody>
-      </p:sp>
-      <p:sp>
-        <p:nvSpPr>
-          <p:cNvPr id="8" name="Rounded Rectangle 7"/>
+                <a:latin typeface="Segoe UI"/>
+              </a:defRPr>
+            </a:pPr>
+            <a:r>
+              <a:t>Golden Rule: The LLM is NEVER the financial calculator. Pure deterministic math in DuckDB; AI synthesizes evidence.</a:t>
+            </a:r>
+          </a:p>
+        </p:txBody>
+      </p:sp>
+      <p:sp>
+        <p:nvSpPr>
+          <p:cNvPr id="5" name="Rounded Rectangle 4"/>
           <p:cNvSpPr/>
           <p:nvPr/>
         </p:nvSpPr>
         <p:spPr>
           <a:xfrm>
-            <a:off x="3474720" y="2011680"/>
-            <a:ext cx="2560320" cy="4114800"/>
+            <a:off x="731520" y="1828800"/>
+            <a:ext cx="2560320" cy="4389120"/>
           </a:xfrm>
           <a:prstGeom prst="roundRect">
             <a:avLst/>
           </a:prstGeom>
           <a:solidFill>
-            <a:srgbClr val="111827"/>
+            <a:srgbClr val="0D1320"/>
           </a:solidFill>
-          <a:ln w="19050">
+          <a:ln w="15240">
             <a:solidFill>
-              <a:srgbClr val="2563EB"/>
+              <a:srgbClr val="1E293B"/>
             </a:solidFill>
           </a:ln>
         </p:spPr>
@@ -4358,143 +4687,24 @@
       </p:sp>
       <p:sp>
         <p:nvSpPr>
-          <p:cNvPr id="9" name="TextBox 8"/>
-          <p:cNvSpPr txBox="1"/>
-          <p:nvPr/>
-        </p:nvSpPr>
-        <p:spPr>
-          <a:xfrm>
-            <a:off x="3657600" y="2148840"/>
-            <a:ext cx="2194560" cy="411480"/>
+          <p:cNvPr id="6" name="Rectangle 5"/>
+          <p:cNvSpPr/>
+          <p:nvPr/>
+        </p:nvSpPr>
+        <p:spPr>
+          <a:xfrm>
+            <a:off x="804672" y="1847088"/>
+            <a:ext cx="2414016" cy="32004"/>
           </a:xfrm>
           <a:prstGeom prst="rect">
             <a:avLst/>
           </a:prstGeom>
-          <a:noFill/>
-        </p:spPr>
-        <p:txBody>
-          <a:bodyPr wrap="none">
-            <a:spAutoFit/>
-          </a:bodyPr>
-          <a:lstStyle/>
-          <a:p>
-            <a:pPr>
-              <a:defRPr sz="1100" b="1">
-                <a:solidFill>
-                  <a:srgbClr val="38BDF8"/>
-                </a:solidFill>
-                <a:latin typeface="Arial"/>
-              </a:defRPr>
-            </a:pPr>
-            <a:r>
-              <a:t>02 / PUBLIC DATA FUSION</a:t>
-            </a:r>
-          </a:p>
-        </p:txBody>
-      </p:sp>
-      <p:sp>
-        <p:nvSpPr>
-          <p:cNvPr id="10" name="TextBox 9"/>
-          <p:cNvSpPr txBox="1"/>
-          <p:nvPr/>
-        </p:nvSpPr>
-        <p:spPr>
-          <a:xfrm>
-            <a:off x="3611880" y="2606040"/>
-            <a:ext cx="2286000" cy="3383280"/>
-          </a:xfrm>
-          <a:prstGeom prst="rect">
-            <a:avLst/>
-          </a:prstGeom>
-          <a:noFill/>
-        </p:spPr>
-        <p:txBody>
-          <a:bodyPr wrap="square">
-            <a:spAutoFit/>
-          </a:bodyPr>
-          <a:lstStyle/>
-          <a:p>
-            <a:pPr>
-              <a:spcAft>
-                <a:spcPts val="1000"/>
-              </a:spcAft>
-              <a:defRPr sz="1400" b="1">
-                <a:solidFill>
-                  <a:srgbClr val="FFFFFF"/>
-                </a:solidFill>
-              </a:defRPr>
-            </a:pPr>
-            <a:r>
-              <a:t>Banca d'Italia &amp; OpenData</a:t>
-            </a:r>
-          </a:p>
-          <a:p>
-            <a:pPr>
-              <a:spcAft>
-                <a:spcPts val="500"/>
-              </a:spcAft>
-              <a:defRPr sz="1150">
-                <a:solidFill>
-                  <a:srgbClr val="94A3B8"/>
-                </a:solidFill>
-              </a:defRPr>
-            </a:pPr>
-            <a:r>
-              <a:t>• Real-time integration of central bank provincial credit default rates (Milan NPL: 1.82%).</a:t>
-            </a:r>
-          </a:p>
-          <a:p>
-            <a:pPr>
-              <a:spcAft>
-                <a:spcPts val="500"/>
-              </a:spcAft>
-              <a:defRPr sz="1150">
-                <a:solidFill>
-                  <a:srgbClr val="94A3B8"/>
-                </a:solidFill>
-              </a:defRPr>
-            </a:pPr>
-            <a:r>
-              <a:t>• Dynamic sync with Open Data Lombardia sector growth (+4.1% YoY).</a:t>
-            </a:r>
-          </a:p>
-          <a:p>
-            <a:pPr>
-              <a:spcAft>
-                <a:spcPts val="500"/>
-              </a:spcAft>
-              <a:defRPr sz="1150">
-                <a:solidFill>
-                  <a:srgbClr val="94A3B8"/>
-                </a:solidFill>
-              </a:defRPr>
-            </a:pPr>
-            <a:r>
-              <a:t>• Transforms local macroeconomic context into rate bargaining power.</a:t>
-            </a:r>
-          </a:p>
-        </p:txBody>
-      </p:sp>
-      <p:sp>
-        <p:nvSpPr>
-          <p:cNvPr id="11" name="Rounded Rectangle 10"/>
-          <p:cNvSpPr/>
-          <p:nvPr/>
-        </p:nvSpPr>
-        <p:spPr>
-          <a:xfrm>
-            <a:off x="6217920" y="2011680"/>
-            <a:ext cx="2560320" cy="4114800"/>
-          </a:xfrm>
-          <a:prstGeom prst="roundRect">
-            <a:avLst/>
-          </a:prstGeom>
           <a:solidFill>
-            <a:srgbClr val="111827"/>
+            <a:srgbClr val="38BDF8"/>
           </a:solidFill>
-          <a:ln w="19050">
+          <a:ln>
             <a:solidFill>
-              <a:srgbClr val="2563EB"/>
+              <a:srgbClr val="38BDF8"/>
             </a:solidFill>
           </a:ln>
         </p:spPr>
@@ -4522,14 +4732,14 @@
       </p:sp>
       <p:sp>
         <p:nvSpPr>
-          <p:cNvPr id="12" name="TextBox 11"/>
+          <p:cNvPr id="7" name="TextBox 6"/>
           <p:cNvSpPr txBox="1"/>
           <p:nvPr/>
         </p:nvSpPr>
         <p:spPr>
           <a:xfrm>
-            <a:off x="6400800" y="2148840"/>
-            <a:ext cx="2194560" cy="411480"/>
+            <a:off x="914400" y="1965960"/>
+            <a:ext cx="2194560" cy="4114800"/>
           </a:xfrm>
           <a:prstGeom prst="rect">
             <a:avLst/>
@@ -4537,128 +4747,138 @@
           <a:noFill/>
         </p:spPr>
         <p:txBody>
-          <a:bodyPr wrap="none">
+          <a:bodyPr wrap="square" lIns="0" tIns="0">
             <a:spAutoFit/>
           </a:bodyPr>
           <a:lstStyle/>
           <a:p>
             <a:pPr>
-              <a:defRPr sz="1100" b="1">
+              <a:defRPr sz="850" b="1">
                 <a:solidFill>
                   <a:srgbClr val="38BDF8"/>
                 </a:solidFill>
-                <a:latin typeface="Arial"/>
-              </a:defRPr>
-            </a:pPr>
-            <a:r>
-              <a:t>03 / DETERMINISTIC POLICY</a:t>
-            </a:r>
-          </a:p>
-        </p:txBody>
-      </p:sp>
-      <p:sp>
-        <p:nvSpPr>
-          <p:cNvPr id="13" name="TextBox 12"/>
-          <p:cNvSpPr txBox="1"/>
-          <p:nvPr/>
-        </p:nvSpPr>
-        <p:spPr>
-          <a:xfrm>
-            <a:off x="6355080" y="2606040"/>
-            <a:ext cx="2286000" cy="3383280"/>
-          </a:xfrm>
-          <a:prstGeom prst="rect">
-            <a:avLst/>
-          </a:prstGeom>
-          <a:noFill/>
-        </p:spPr>
-        <p:txBody>
-          <a:bodyPr wrap="square">
-            <a:spAutoFit/>
-          </a:bodyPr>
-          <a:lstStyle/>
+                <a:latin typeface="Consolas"/>
+              </a:defRPr>
+            </a:pPr>
+            <a:r>
+              <a:t>01 / IN-MEMORY OLAP</a:t>
+            </a:r>
+          </a:p>
+          <a:p>
+            <a:pPr>
+              <a:defRPr sz="1600" b="1">
+                <a:solidFill>
+                  <a:srgbClr val="FFFFFF"/>
+                </a:solidFill>
+                <a:latin typeface="Segoe UI"/>
+              </a:defRPr>
+            </a:pPr>
+            <a:r>
+              <a:t>DuckDB 1.0</a:t>
+            </a:r>
+          </a:p>
           <a:p>
             <a:pPr>
               <a:spcAft>
                 <a:spcPts val="1000"/>
               </a:spcAft>
-              <a:defRPr sz="1400" b="1">
-                <a:solidFill>
-                  <a:srgbClr val="FFFFFF"/>
-                </a:solidFill>
-              </a:defRPr>
-            </a:pPr>
-            <a:r>
-              <a:t>Python 3.11 &amp; Pydantic</a:t>
+              <a:defRPr sz="950" b="1">
+                <a:solidFill>
+                  <a:srgbClr val="38BDF8"/>
+                </a:solidFill>
+                <a:latin typeface="Consolas"/>
+              </a:defRPr>
+            </a:pPr>
+            <a:r>
+              <a:t>[&lt; 4ms Query]</a:t>
             </a:r>
           </a:p>
           <a:p>
             <a:pPr>
               <a:spcAft>
-                <a:spcPts val="500"/>
+                <a:spcPts val="400"/>
               </a:spcAft>
-              <a:defRPr sz="1150">
+              <a:defRPr sz="1000">
                 <a:solidFill>
                   <a:srgbClr val="94A3B8"/>
                 </a:solidFill>
-              </a:defRPr>
-            </a:pPr>
-            <a:r>
-              <a:t>• Mathematical computation of DSCR (2.96x base), Net Debt/EBITDA, and Quick Ratios.</a:t>
+                <a:latin typeface="Segoe UI"/>
+              </a:defRPr>
+            </a:pPr>
+            <a:r>
+              <a:t>• Columnar SQL engine running locally in RAM.</a:t>
             </a:r>
           </a:p>
           <a:p>
             <a:pPr>
               <a:spcAft>
-                <a:spcPts val="500"/>
+                <a:spcPts val="400"/>
               </a:spcAft>
-              <a:defRPr sz="1150">
+              <a:defRPr sz="1000">
                 <a:solidFill>
                   <a:srgbClr val="94A3B8"/>
                 </a:solidFill>
-              </a:defRPr>
-            </a:pPr>
-            <a:r>
-              <a:t>• Bank-grade credit scoring rules executed via hard-coded formulas.</a:t>
+                <a:latin typeface="Segoe UI"/>
+              </a:defRPr>
+            </a:pPr>
+            <a:r>
+              <a:t>• Ingests Italian statutory CEE CSVs &amp; PDFs.</a:t>
             </a:r>
           </a:p>
           <a:p>
             <a:pPr>
               <a:spcAft>
-                <a:spcPts val="500"/>
+                <a:spcPts val="400"/>
               </a:spcAft>
-              <a:defRPr sz="1150">
+              <a:defRPr sz="1000">
                 <a:solidFill>
                   <a:srgbClr val="94A3B8"/>
                 </a:solidFill>
-              </a:defRPr>
-            </a:pPr>
-            <a:r>
-              <a:t>• Golden Rule: The LLM is NEVER the financial calculator.</a:t>
-            </a:r>
-          </a:p>
-        </p:txBody>
-      </p:sp>
-      <p:sp>
-        <p:nvSpPr>
-          <p:cNvPr id="14" name="Rounded Rectangle 13"/>
+                <a:latin typeface="Segoe UI"/>
+              </a:defRPr>
+            </a:pPr>
+            <a:r>
+              <a:t>• Total data sovereignty: sensitive accounting records never leave the local environment.</a:t>
+            </a:r>
+          </a:p>
+          <a:p>
+            <a:pPr>
+              <a:spcAft>
+                <a:spcPts val="400"/>
+              </a:spcAft>
+              <a:defRPr sz="1000">
+                <a:solidFill>
+                  <a:srgbClr val="94A3B8"/>
+                </a:solidFill>
+                <a:latin typeface="Segoe UI"/>
+              </a:defRPr>
+            </a:pPr>
+            <a:r>
+              <a:t>• Zero latency cloud dependencies.</a:t>
+            </a:r>
+          </a:p>
+        </p:txBody>
+      </p:sp>
+      <p:sp>
+        <p:nvSpPr>
+          <p:cNvPr id="8" name="Rounded Rectangle 7"/>
           <p:cNvSpPr/>
           <p:nvPr/>
         </p:nvSpPr>
         <p:spPr>
           <a:xfrm>
-            <a:off x="8961120" y="2011680"/>
-            <a:ext cx="2560320" cy="4114800"/>
+            <a:off x="3447288" y="1828800"/>
+            <a:ext cx="2560320" cy="4389120"/>
           </a:xfrm>
           <a:prstGeom prst="roundRect">
             <a:avLst/>
           </a:prstGeom>
           <a:solidFill>
-            <a:srgbClr val="111827"/>
+            <a:srgbClr val="0D1320"/>
           </a:solidFill>
-          <a:ln w="19050">
+          <a:ln w="15240">
             <a:solidFill>
-              <a:srgbClr val="2563EB"/>
+              <a:srgbClr val="1E293B"/>
             </a:solidFill>
           </a:ln>
         </p:spPr>
@@ -4686,14 +4906,59 @@
       </p:sp>
       <p:sp>
         <p:nvSpPr>
-          <p:cNvPr id="15" name="TextBox 14"/>
+          <p:cNvPr id="9" name="Rectangle 8"/>
+          <p:cNvSpPr/>
+          <p:nvPr/>
+        </p:nvSpPr>
+        <p:spPr>
+          <a:xfrm>
+            <a:off x="3520440" y="1847088"/>
+            <a:ext cx="2414016" cy="32004"/>
+          </a:xfrm>
+          <a:prstGeom prst="rect">
+            <a:avLst/>
+          </a:prstGeom>
+          <a:solidFill>
+            <a:srgbClr val="6366F1"/>
+          </a:solidFill>
+          <a:ln>
+            <a:solidFill>
+              <a:srgbClr val="6366F1"/>
+            </a:solidFill>
+          </a:ln>
+        </p:spPr>
+        <p:style>
+          <a:lnRef idx="1">
+            <a:schemeClr val="accent1"/>
+          </a:lnRef>
+          <a:fillRef idx="3">
+            <a:schemeClr val="accent1"/>
+          </a:fillRef>
+          <a:effectRef idx="2">
+            <a:schemeClr val="accent1"/>
+          </a:effectRef>
+          <a:fontRef idx="minor">
+            <a:schemeClr val="lt1"/>
+          </a:fontRef>
+        </p:style>
+        <p:txBody>
+          <a:bodyPr rtlCol="0" anchor="ctr"/>
+          <a:lstStyle/>
+          <a:p>
+            <a:pPr algn="ctr"/>
+          </a:p>
+        </p:txBody>
+      </p:sp>
+      <p:sp>
+        <p:nvSpPr>
+          <p:cNvPr id="10" name="TextBox 9"/>
           <p:cNvSpPr txBox="1"/>
           <p:nvPr/>
         </p:nvSpPr>
         <p:spPr>
           <a:xfrm>
-            <a:off x="9144000" y="2148840"/>
-            <a:ext cx="2194560" cy="411480"/>
+            <a:off x="3630168" y="1965960"/>
+            <a:ext cx="2194560" cy="4114800"/>
           </a:xfrm>
           <a:prstGeom prst="rect">
             <a:avLst/>
@@ -4701,119 +4966,540 @@
           <a:noFill/>
         </p:spPr>
         <p:txBody>
-          <a:bodyPr wrap="none">
+          <a:bodyPr wrap="square" lIns="0" tIns="0">
             <a:spAutoFit/>
           </a:bodyPr>
           <a:lstStyle/>
           <a:p>
             <a:pPr>
-              <a:defRPr sz="1100" b="1">
-                <a:solidFill>
-                  <a:srgbClr val="38BDF8"/>
-                </a:solidFill>
-                <a:latin typeface="Arial"/>
-              </a:defRPr>
-            </a:pPr>
-            <a:r>
-              <a:t>04 / ENTERPRISE WORKSPACE</a:t>
-            </a:r>
-          </a:p>
-        </p:txBody>
-      </p:sp>
-      <p:sp>
-        <p:nvSpPr>
-          <p:cNvPr id="16" name="TextBox 15"/>
-          <p:cNvSpPr txBox="1"/>
-          <p:nvPr/>
-        </p:nvSpPr>
-        <p:spPr>
-          <a:xfrm>
-            <a:off x="9098280" y="2606040"/>
-            <a:ext cx="2286000" cy="3383280"/>
-          </a:xfrm>
-          <a:prstGeom prst="rect">
-            <a:avLst/>
-          </a:prstGeom>
-          <a:noFill/>
-        </p:spPr>
-        <p:txBody>
-          <a:bodyPr wrap="square">
-            <a:spAutoFit/>
-          </a:bodyPr>
-          <a:lstStyle/>
+              <a:defRPr sz="850" b="1">
+                <a:solidFill>
+                  <a:srgbClr val="6366F1"/>
+                </a:solidFill>
+                <a:latin typeface="Consolas"/>
+              </a:defRPr>
+            </a:pPr>
+            <a:r>
+              <a:t>02 / MACRO FUSION</a:t>
+            </a:r>
+          </a:p>
+          <a:p>
+            <a:pPr>
+              <a:defRPr sz="1600" b="1">
+                <a:solidFill>
+                  <a:srgbClr val="FFFFFF"/>
+                </a:solidFill>
+                <a:latin typeface="Segoe UI"/>
+              </a:defRPr>
+            </a:pPr>
+            <a:r>
+              <a:t>Banca d'Italia</a:t>
+            </a:r>
+          </a:p>
           <a:p>
             <a:pPr>
               <a:spcAft>
                 <a:spcPts val="1000"/>
               </a:spcAft>
-              <a:defRPr sz="1400" b="1">
+              <a:defRPr sz="950" b="1">
+                <a:solidFill>
+                  <a:srgbClr val="6366F1"/>
+                </a:solidFill>
+                <a:latin typeface="Consolas"/>
+              </a:defRPr>
+            </a:pPr>
+            <a:r>
+              <a:t>[1.82% NPL]</a:t>
+            </a:r>
+          </a:p>
+          <a:p>
+            <a:pPr>
+              <a:spcAft>
+                <a:spcPts val="400"/>
+              </a:spcAft>
+              <a:defRPr sz="1000">
+                <a:solidFill>
+                  <a:srgbClr val="94A3B8"/>
+                </a:solidFill>
+                <a:latin typeface="Segoe UI"/>
+              </a:defRPr>
+            </a:pPr>
+            <a:r>
+              <a:t>• Live query of central bank provincial credit default benchmarks.</a:t>
+            </a:r>
+          </a:p>
+          <a:p>
+            <a:pPr>
+              <a:spcAft>
+                <a:spcPts val="400"/>
+              </a:spcAft>
+              <a:defRPr sz="1000">
+                <a:solidFill>
+                  <a:srgbClr val="94A3B8"/>
+                </a:solidFill>
+                <a:latin typeface="Segoe UI"/>
+              </a:defRPr>
+            </a:pPr>
+            <a:r>
+              <a:t>• Syncs with Open Data Lombardia sector growth (+4.1% YoY).</a:t>
+            </a:r>
+          </a:p>
+          <a:p>
+            <a:pPr>
+              <a:spcAft>
+                <a:spcPts val="400"/>
+              </a:spcAft>
+              <a:defRPr sz="1000">
+                <a:solidFill>
+                  <a:srgbClr val="94A3B8"/>
+                </a:solidFill>
+                <a:latin typeface="Segoe UI"/>
+              </a:defRPr>
+            </a:pPr>
+            <a:r>
+              <a:t>• Turns regional economic strength into immediate rate bargaining power.</a:t>
+            </a:r>
+          </a:p>
+        </p:txBody>
+      </p:sp>
+      <p:sp>
+        <p:nvSpPr>
+          <p:cNvPr id="11" name="Rounded Rectangle 10"/>
+          <p:cNvSpPr/>
+          <p:nvPr/>
+        </p:nvSpPr>
+        <p:spPr>
+          <a:xfrm>
+            <a:off x="6163056" y="1828800"/>
+            <a:ext cx="2560320" cy="4389120"/>
+          </a:xfrm>
+          <a:prstGeom prst="roundRect">
+            <a:avLst/>
+          </a:prstGeom>
+          <a:solidFill>
+            <a:srgbClr val="0D1320"/>
+          </a:solidFill>
+          <a:ln w="15240">
+            <a:solidFill>
+              <a:srgbClr val="1E293B"/>
+            </a:solidFill>
+          </a:ln>
+        </p:spPr>
+        <p:style>
+          <a:lnRef idx="1">
+            <a:schemeClr val="accent1"/>
+          </a:lnRef>
+          <a:fillRef idx="3">
+            <a:schemeClr val="accent1"/>
+          </a:fillRef>
+          <a:effectRef idx="2">
+            <a:schemeClr val="accent1"/>
+          </a:effectRef>
+          <a:fontRef idx="minor">
+            <a:schemeClr val="lt1"/>
+          </a:fontRef>
+        </p:style>
+        <p:txBody>
+          <a:bodyPr rtlCol="0" anchor="ctr"/>
+          <a:lstStyle/>
+          <a:p>
+            <a:pPr algn="ctr"/>
+          </a:p>
+        </p:txBody>
+      </p:sp>
+      <p:sp>
+        <p:nvSpPr>
+          <p:cNvPr id="12" name="Rectangle 11"/>
+          <p:cNvSpPr/>
+          <p:nvPr/>
+        </p:nvSpPr>
+        <p:spPr>
+          <a:xfrm>
+            <a:off x="6236208" y="1847088"/>
+            <a:ext cx="2414016" cy="32004"/>
+          </a:xfrm>
+          <a:prstGeom prst="rect">
+            <a:avLst/>
+          </a:prstGeom>
+          <a:solidFill>
+            <a:srgbClr val="10B981"/>
+          </a:solidFill>
+          <a:ln>
+            <a:solidFill>
+              <a:srgbClr val="10B981"/>
+            </a:solidFill>
+          </a:ln>
+        </p:spPr>
+        <p:style>
+          <a:lnRef idx="1">
+            <a:schemeClr val="accent1"/>
+          </a:lnRef>
+          <a:fillRef idx="3">
+            <a:schemeClr val="accent1"/>
+          </a:fillRef>
+          <a:effectRef idx="2">
+            <a:schemeClr val="accent1"/>
+          </a:effectRef>
+          <a:fontRef idx="minor">
+            <a:schemeClr val="lt1"/>
+          </a:fontRef>
+        </p:style>
+        <p:txBody>
+          <a:bodyPr rtlCol="0" anchor="ctr"/>
+          <a:lstStyle/>
+          <a:p>
+            <a:pPr algn="ctr"/>
+          </a:p>
+        </p:txBody>
+      </p:sp>
+      <p:sp>
+        <p:nvSpPr>
+          <p:cNvPr id="13" name="TextBox 12"/>
+          <p:cNvSpPr txBox="1"/>
+          <p:nvPr/>
+        </p:nvSpPr>
+        <p:spPr>
+          <a:xfrm>
+            <a:off x="6345936" y="1965960"/>
+            <a:ext cx="2194560" cy="4114800"/>
+          </a:xfrm>
+          <a:prstGeom prst="rect">
+            <a:avLst/>
+          </a:prstGeom>
+          <a:noFill/>
+        </p:spPr>
+        <p:txBody>
+          <a:bodyPr wrap="square" lIns="0" tIns="0">
+            <a:spAutoFit/>
+          </a:bodyPr>
+          <a:lstStyle/>
+          <a:p>
+            <a:pPr>
+              <a:defRPr sz="850" b="1">
+                <a:solidFill>
+                  <a:srgbClr val="10B981"/>
+                </a:solidFill>
+                <a:latin typeface="Consolas"/>
+              </a:defRPr>
+            </a:pPr>
+            <a:r>
+              <a:t>03 / DETERMINISTIC MATH</a:t>
+            </a:r>
+          </a:p>
+          <a:p>
+            <a:pPr>
+              <a:defRPr sz="1600" b="1">
                 <a:solidFill>
                   <a:srgbClr val="FFFFFF"/>
                 </a:solidFill>
-              </a:defRPr>
-            </a:pPr>
-            <a:r>
-              <a:t>Multi-Tenant &amp; Streamlit</a:t>
+                <a:latin typeface="Segoe UI"/>
+              </a:defRPr>
+            </a:pPr>
+            <a:r>
+              <a:t>Python / Pydantic</a:t>
             </a:r>
           </a:p>
           <a:p>
             <a:pPr>
               <a:spcAft>
-                <a:spcPts val="500"/>
+                <a:spcPts val="1000"/>
               </a:spcAft>
-              <a:defRPr sz="1150">
+              <a:defRPr sz="950" b="1">
+                <a:solidFill>
+                  <a:srgbClr val="10B981"/>
+                </a:solidFill>
+                <a:latin typeface="Consolas"/>
+              </a:defRPr>
+            </a:pPr>
+            <a:r>
+              <a:t>[100% Exact]</a:t>
+            </a:r>
+          </a:p>
+          <a:p>
+            <a:pPr>
+              <a:spcAft>
+                <a:spcPts val="400"/>
+              </a:spcAft>
+              <a:defRPr sz="1000">
                 <a:solidFill>
                   <a:srgbClr val="94A3B8"/>
                 </a:solidFill>
-              </a:defRPr>
-            </a:pPr>
-            <a:r>
-              <a:t>• Role-based authentication (SME CFO vs Accounting Advisor).</a:t>
+                <a:latin typeface="Segoe UI"/>
+              </a:defRPr>
+            </a:pPr>
+            <a:r>
+              <a:t>• Mathematical computation of DSCR (3.37x), Net Debt / EBITDA (1.24x), and Quick Ratios.</a:t>
             </a:r>
           </a:p>
           <a:p>
             <a:pPr>
               <a:spcAft>
-                <a:spcPts val="500"/>
+                <a:spcPts val="400"/>
               </a:spcAft>
-              <a:defRPr sz="1150">
+              <a:defRPr sz="1000">
                 <a:solidFill>
                   <a:srgbClr val="94A3B8"/>
                 </a:solidFill>
-              </a:defRPr>
-            </a:pPr>
-            <a:r>
-              <a:t>• Multi-client portfolio management for corporate accountants.</a:t>
+                <a:latin typeface="Segoe UI"/>
+              </a:defRPr>
+            </a:pPr>
+            <a:r>
+              <a:t>• Bank-grade credit scoring rules executed with hard-coded formulas.</a:t>
             </a:r>
           </a:p>
           <a:p>
             <a:pPr>
               <a:spcAft>
-                <a:spcPts val="500"/>
+                <a:spcPts val="400"/>
               </a:spcAft>
-              <a:defRPr sz="1150">
+              <a:defRPr sz="1000">
                 <a:solidFill>
                   <a:srgbClr val="94A3B8"/>
                 </a:solidFill>
-              </a:defRPr>
-            </a:pPr>
-            <a:r>
-              <a:t>• Semantic vector extraction of ESG audit disclosures.</a:t>
+                <a:latin typeface="Segoe UI"/>
+              </a:defRPr>
+            </a:pPr>
+            <a:r>
+              <a:t>• Zero mathematical hallucination.</a:t>
+            </a:r>
+          </a:p>
+        </p:txBody>
+      </p:sp>
+      <p:sp>
+        <p:nvSpPr>
+          <p:cNvPr id="14" name="Rounded Rectangle 13"/>
+          <p:cNvSpPr/>
+          <p:nvPr/>
+        </p:nvSpPr>
+        <p:spPr>
+          <a:xfrm>
+            <a:off x="8878824" y="1828800"/>
+            <a:ext cx="2560320" cy="4389120"/>
+          </a:xfrm>
+          <a:prstGeom prst="roundRect">
+            <a:avLst/>
+          </a:prstGeom>
+          <a:solidFill>
+            <a:srgbClr val="0D1320"/>
+          </a:solidFill>
+          <a:ln w="15240">
+            <a:solidFill>
+              <a:srgbClr val="1E293B"/>
+            </a:solidFill>
+          </a:ln>
+        </p:spPr>
+        <p:style>
+          <a:lnRef idx="1">
+            <a:schemeClr val="accent1"/>
+          </a:lnRef>
+          <a:fillRef idx="3">
+            <a:schemeClr val="accent1"/>
+          </a:fillRef>
+          <a:effectRef idx="2">
+            <a:schemeClr val="accent1"/>
+          </a:effectRef>
+          <a:fontRef idx="minor">
+            <a:schemeClr val="lt1"/>
+          </a:fontRef>
+        </p:style>
+        <p:txBody>
+          <a:bodyPr rtlCol="0" anchor="ctr"/>
+          <a:lstStyle/>
+          <a:p>
+            <a:pPr algn="ctr"/>
+          </a:p>
+        </p:txBody>
+      </p:sp>
+      <p:sp>
+        <p:nvSpPr>
+          <p:cNvPr id="15" name="Rectangle 14"/>
+          <p:cNvSpPr/>
+          <p:nvPr/>
+        </p:nvSpPr>
+        <p:spPr>
+          <a:xfrm>
+            <a:off x="8951976" y="1847088"/>
+            <a:ext cx="2414016" cy="32004"/>
+          </a:xfrm>
+          <a:prstGeom prst="rect">
+            <a:avLst/>
+          </a:prstGeom>
+          <a:solidFill>
+            <a:srgbClr val="A855F7"/>
+          </a:solidFill>
+          <a:ln>
+            <a:solidFill>
+              <a:srgbClr val="A855F7"/>
+            </a:solidFill>
+          </a:ln>
+        </p:spPr>
+        <p:style>
+          <a:lnRef idx="1">
+            <a:schemeClr val="accent1"/>
+          </a:lnRef>
+          <a:fillRef idx="3">
+            <a:schemeClr val="accent1"/>
+          </a:fillRef>
+          <a:effectRef idx="2">
+            <a:schemeClr val="accent1"/>
+          </a:effectRef>
+          <a:fontRef idx="minor">
+            <a:schemeClr val="lt1"/>
+          </a:fontRef>
+        </p:style>
+        <p:txBody>
+          <a:bodyPr rtlCol="0" anchor="ctr"/>
+          <a:lstStyle/>
+          <a:p>
+            <a:pPr algn="ctr"/>
+          </a:p>
+        </p:txBody>
+      </p:sp>
+      <p:sp>
+        <p:nvSpPr>
+          <p:cNvPr id="16" name="TextBox 15"/>
+          <p:cNvSpPr txBox="1"/>
+          <p:nvPr/>
+        </p:nvSpPr>
+        <p:spPr>
+          <a:xfrm>
+            <a:off x="9061704" y="1965960"/>
+            <a:ext cx="2194560" cy="4114800"/>
+          </a:xfrm>
+          <a:prstGeom prst="rect">
+            <a:avLst/>
+          </a:prstGeom>
+          <a:noFill/>
+        </p:spPr>
+        <p:txBody>
+          <a:bodyPr wrap="square" lIns="0" tIns="0">
+            <a:spAutoFit/>
+          </a:bodyPr>
+          <a:lstStyle/>
+          <a:p>
+            <a:pPr>
+              <a:defRPr sz="850" b="1">
+                <a:solidFill>
+                  <a:srgbClr val="A855F7"/>
+                </a:solidFill>
+                <a:latin typeface="Consolas"/>
+              </a:defRPr>
+            </a:pPr>
+            <a:r>
+              <a:t>04 / REGULATORY PDF</a:t>
+            </a:r>
+          </a:p>
+          <a:p>
+            <a:pPr>
+              <a:defRPr sz="1600" b="1">
+                <a:solidFill>
+                  <a:srgbClr val="FFFFFF"/>
+                </a:solidFill>
+                <a:latin typeface="Segoe UI"/>
+              </a:defRPr>
+            </a:pPr>
+            <a:r>
+              <a:t>EBA / OAM Dossier</a:t>
             </a:r>
           </a:p>
           <a:p>
             <a:pPr>
               <a:spcAft>
-                <a:spcPts val="500"/>
+                <a:spcPts val="1000"/>
               </a:spcAft>
-              <a:defRPr sz="1150">
+              <a:defRPr sz="950" b="1">
+                <a:solidFill>
+                  <a:srgbClr val="A855F7"/>
+                </a:solidFill>
+                <a:latin typeface="Consolas"/>
+              </a:defRPr>
+            </a:pPr>
+            <a:r>
+              <a:t>[SHA-256 Seal]</a:t>
+            </a:r>
+          </a:p>
+          <a:p>
+            <a:pPr>
+              <a:spcAft>
+                <a:spcPts val="400"/>
+              </a:spcAft>
+              <a:defRPr sz="1000">
                 <a:solidFill>
                   <a:srgbClr val="94A3B8"/>
                 </a:solidFill>
-              </a:defRPr>
-            </a:pPr>
-            <a:r>
-              <a:t>• Enterprise terminal delivering certified dossiers in 14s.</a:t>
+                <a:latin typeface="Segoe UI"/>
+              </a:defRPr>
+            </a:pPr>
+            <a:r>
+              <a:t>• Institutional vector PDF Credit Memorandum compliant with EBA/GL/2020/06.</a:t>
+            </a:r>
+          </a:p>
+          <a:p>
+            <a:pPr>
+              <a:spcAft>
+                <a:spcPts val="400"/>
+              </a:spcAft>
+              <a:defRPr sz="1000">
+                <a:solidFill>
+                  <a:srgbClr val="94A3B8"/>
+                </a:solidFill>
+                <a:latin typeface="Segoe UI"/>
+              </a:defRPr>
+            </a:pPr>
+            <a:r>
+              <a:t>• TUB Art. 128-sexies integrity seal.</a:t>
+            </a:r>
+          </a:p>
+          <a:p>
+            <a:pPr>
+              <a:spcAft>
+                <a:spcPts val="400"/>
+              </a:spcAft>
+              <a:defRPr sz="1000">
+                <a:solidFill>
+                  <a:srgbClr val="94A3B8"/>
+                </a:solidFill>
+                <a:latin typeface="Segoe UI"/>
+              </a:defRPr>
+            </a:pPr>
+            <a:r>
+              <a:t>• Dual workspace linking SME CFO and Bank Underwriter through Application ID.</a:t>
+            </a:r>
+          </a:p>
+        </p:txBody>
+      </p:sp>
+      <p:sp>
+        <p:nvSpPr>
+          <p:cNvPr id="17" name="TextBox 16"/>
+          <p:cNvSpPr txBox="1"/>
+          <p:nvPr/>
+        </p:nvSpPr>
+        <p:spPr>
+          <a:xfrm>
+            <a:off x="731520" y="6446520"/>
+            <a:ext cx="10698480" cy="320040"/>
+          </a:xfrm>
+          <a:prstGeom prst="rect">
+            <a:avLst/>
+          </a:prstGeom>
+          <a:noFill/>
+        </p:spPr>
+        <p:txBody>
+          <a:bodyPr wrap="none" lIns="0" tIns="0">
+            <a:spAutoFit/>
+          </a:bodyPr>
+          <a:lstStyle/>
+          <a:p>
+            <a:pPr>
+              <a:defRPr sz="850" b="1">
+                <a:solidFill>
+                  <a:srgbClr val="64748B"/>
+                </a:solidFill>
+                <a:latin typeface="Consolas"/>
+              </a:defRPr>
+            </a:pPr>
+            <a:r>
+              <a:t>DUCKDB 1.0 IN-MEMORY OLAP  |  APPLICATION ID: ECOTEX-2026-IT  |  EBA/GL/2020/06 COMPLIANT  |  TUB ART. 128-SEXIES SEAL</a:t>
             </a:r>
           </a:p>
         </p:txBody>
@@ -4851,11 +5537,11 @@
             <a:avLst/>
           </a:prstGeom>
           <a:solidFill>
-            <a:srgbClr val="0B0F19"/>
+            <a:srgbClr val="06090E"/>
           </a:solidFill>
           <a:ln>
             <a:solidFill>
-              <a:srgbClr val="0B0F19"/>
+              <a:srgbClr val="06090E"/>
             </a:solidFill>
           </a:ln>
         </p:spPr>
@@ -4883,109 +5569,24 @@
       </p:sp>
       <p:sp>
         <p:nvSpPr>
-          <p:cNvPr id="3" name="TextBox 2"/>
-          <p:cNvSpPr txBox="1"/>
-          <p:nvPr/>
-        </p:nvSpPr>
-        <p:spPr>
-          <a:xfrm>
-            <a:off x="731520" y="411480"/>
-            <a:ext cx="10698480" cy="320040"/>
-          </a:xfrm>
-          <a:prstGeom prst="rect">
-            <a:avLst/>
-          </a:prstGeom>
-          <a:noFill/>
-        </p:spPr>
-        <p:txBody>
-          <a:bodyPr wrap="none">
-            <a:spAutoFit/>
-          </a:bodyPr>
-          <a:lstStyle/>
-          <a:p>
-            <a:pPr>
-              <a:defRPr sz="1100" b="1">
-                <a:solidFill>
-                  <a:srgbClr val="38BDF8"/>
-                </a:solidFill>
-                <a:latin typeface="Arial"/>
-              </a:defRPr>
-            </a:pPr>
-            <a:r>
-              <a:t>LIVE DEMONSTRATION</a:t>
-            </a:r>
-          </a:p>
-        </p:txBody>
-      </p:sp>
-      <p:sp>
-        <p:nvSpPr>
-          <p:cNvPr id="4" name="TextBox 3"/>
-          <p:cNvSpPr txBox="1"/>
-          <p:nvPr/>
-        </p:nvSpPr>
-        <p:spPr>
-          <a:xfrm>
-            <a:off x="731520" y="777240"/>
-            <a:ext cx="10698480" cy="914400"/>
-          </a:xfrm>
-          <a:prstGeom prst="rect">
-            <a:avLst/>
-          </a:prstGeom>
-          <a:noFill/>
-        </p:spPr>
-        <p:txBody>
-          <a:bodyPr wrap="square">
-            <a:spAutoFit/>
-          </a:bodyPr>
-          <a:lstStyle/>
-          <a:p>
-            <a:pPr>
-              <a:defRPr sz="2800" b="1">
-                <a:solidFill>
-                  <a:srgbClr val="FFFFFF"/>
-                </a:solidFill>
-                <a:latin typeface="Arial"/>
-              </a:defRPr>
-            </a:pPr>
-            <a:r>
-              <a:t>EcoTex Milano: Live Ingestion &amp; Pre-Underwriting</a:t>
-            </a:r>
-          </a:p>
-          <a:p>
-            <a:pPr>
-              <a:defRPr sz="1400">
-                <a:solidFill>
-                  <a:srgbClr val="94A3B8"/>
-                </a:solidFill>
-                <a:latin typeface="Arial"/>
-              </a:defRPr>
-            </a:pPr>
-            <a:r>
-              <a:t>Drag-and-drop balance sheet into DuckDB, instant scoring, and stress-testing loan limits.</a:t>
-            </a:r>
-          </a:p>
-        </p:txBody>
-      </p:sp>
-      <p:sp>
-        <p:nvSpPr>
-          <p:cNvPr id="5" name="Rounded Rectangle 4"/>
+          <p:cNvPr id="3" name="Rounded Rectangle 2"/>
           <p:cNvSpPr/>
           <p:nvPr/>
         </p:nvSpPr>
         <p:spPr>
           <a:xfrm>
-            <a:off x="731520" y="1920240"/>
-            <a:ext cx="2560320" cy="1645920"/>
+            <a:off x="731520" y="347472"/>
+            <a:ext cx="3108960" cy="256032"/>
           </a:xfrm>
           <a:prstGeom prst="roundRect">
             <a:avLst/>
           </a:prstGeom>
           <a:solidFill>
-            <a:srgbClr val="111827"/>
+            <a:srgbClr val="0F172A"/>
           </a:solidFill>
-          <a:ln w="19050">
+          <a:ln w="12700">
             <a:solidFill>
-              <a:srgbClr val="1F2937"/>
+              <a:srgbClr val="38BDF8"/>
             </a:solidFill>
           </a:ln>
         </p:spPr>
@@ -5004,23 +5605,33 @@
           </a:fontRef>
         </p:style>
         <p:txBody>
-          <a:bodyPr rtlCol="0" anchor="ctr"/>
-          <a:lstStyle/>
-          <a:p>
-            <a:pPr algn="ctr"/>
-          </a:p>
-        </p:txBody>
-      </p:sp>
-      <p:sp>
-        <p:nvSpPr>
-          <p:cNvPr id="6" name="TextBox 5"/>
+          <a:bodyPr rtlCol="0" anchor="ctr" wrap="none" tIns="18288"/>
+          <a:lstStyle/>
+          <a:p>
+            <a:pPr algn="ctr">
+              <a:defRPr sz="850" b="1">
+                <a:solidFill>
+                  <a:srgbClr val="38BDF8"/>
+                </a:solidFill>
+                <a:latin typeface="Consolas"/>
+              </a:defRPr>
+            </a:pPr>
+            <a:r>
+              <a:t>●  LIVE DEMONSTRATION &amp; STRESS LAB</a:t>
+            </a:r>
+          </a:p>
+        </p:txBody>
+      </p:sp>
+      <p:sp>
+        <p:nvSpPr>
+          <p:cNvPr id="4" name="TextBox 3"/>
           <p:cNvSpPr txBox="1"/>
           <p:nvPr/>
         </p:nvSpPr>
         <p:spPr>
           <a:xfrm>
-            <a:off x="868680" y="2011680"/>
-            <a:ext cx="2286000" cy="1463040"/>
+            <a:off x="731520" y="658368"/>
+            <a:ext cx="10698480" cy="1051560"/>
           </a:xfrm>
           <a:prstGeom prst="rect">
             <a:avLst/>
@@ -5028,68 +5639,61 @@
           <a:noFill/>
         </p:spPr>
         <p:txBody>
-          <a:bodyPr wrap="square">
+          <a:bodyPr wrap="square" lIns="0" tIns="0" rIns="0" bIns="0">
             <a:spAutoFit/>
           </a:bodyPr>
           <a:lstStyle/>
           <a:p>
             <a:pPr>
-              <a:defRPr sz="900">
+              <a:spcAft>
+                <a:spcPts val="400"/>
+              </a:spcAft>
+              <a:defRPr sz="2500" b="1">
+                <a:solidFill>
+                  <a:srgbClr val="FFFFFF"/>
+                </a:solidFill>
+                <a:latin typeface="Segoe UI"/>
+              </a:defRPr>
+            </a:pPr>
+            <a:r>
+              <a:t>EcoTex Milano: Ingestion, Scoring &amp; Capital Sizing Lab</a:t>
+            </a:r>
+          </a:p>
+          <a:p>
+            <a:pPr>
+              <a:defRPr sz="1200">
                 <a:solidFill>
                   <a:srgbClr val="94A3B8"/>
                 </a:solidFill>
-              </a:defRPr>
-            </a:pPr>
-            <a:r>
-              <a:t>FINANCIAL HEALTH</a:t>
-            </a:r>
-          </a:p>
-          <a:p>
-            <a:pPr>
-              <a:defRPr sz="2400" b="1">
-                <a:solidFill>
-                  <a:srgbClr val="38BDF8"/>
-                </a:solidFill>
-              </a:defRPr>
-            </a:pPr>
-            <a:r>
-              <a:t>95 / 100</a:t>
-            </a:r>
-          </a:p>
-          <a:p>
-            <a:pPr>
-              <a:defRPr sz="1000">
-                <a:solidFill>
-                  <a:srgbClr val="94A3B8"/>
-                </a:solidFill>
-              </a:defRPr>
-            </a:pPr>
-            <a:r>
-              <a:t>Prime Solvency</a:t>
-            </a:r>
-          </a:p>
-        </p:txBody>
-      </p:sp>
-      <p:sp>
-        <p:nvSpPr>
-          <p:cNvPr id="7" name="Rounded Rectangle 6"/>
+                <a:latin typeface="Segoe UI"/>
+              </a:defRPr>
+            </a:pPr>
+            <a:r>
+              <a:t>Live Case Study (ID: ECOTEX-2026-IT): €750k CapEx sustainability facility evaluated in 14 seconds.</a:t>
+            </a:r>
+          </a:p>
+        </p:txBody>
+      </p:sp>
+      <p:sp>
+        <p:nvSpPr>
+          <p:cNvPr id="5" name="Rounded Rectangle 4"/>
           <p:cNvSpPr/>
           <p:nvPr/>
         </p:nvSpPr>
         <p:spPr>
           <a:xfrm>
-            <a:off x="3474720" y="1920240"/>
-            <a:ext cx="2560320" cy="1645920"/>
+            <a:off x="731520" y="1828800"/>
+            <a:ext cx="2560320" cy="1371600"/>
           </a:xfrm>
           <a:prstGeom prst="roundRect">
             <a:avLst/>
           </a:prstGeom>
           <a:solidFill>
-            <a:srgbClr val="111827"/>
+            <a:srgbClr val="0D1320"/>
           </a:solidFill>
-          <a:ln w="19050">
+          <a:ln w="15240">
             <a:solidFill>
-              <a:srgbClr val="1F2937"/>
+              <a:srgbClr val="1E293B"/>
             </a:solidFill>
           </a:ln>
         </p:spPr>
@@ -5117,83 +5721,24 @@
       </p:sp>
       <p:sp>
         <p:nvSpPr>
-          <p:cNvPr id="8" name="TextBox 7"/>
-          <p:cNvSpPr txBox="1"/>
-          <p:nvPr/>
-        </p:nvSpPr>
-        <p:spPr>
-          <a:xfrm>
-            <a:off x="3611880" y="2011680"/>
-            <a:ext cx="2286000" cy="1463040"/>
+          <p:cNvPr id="6" name="Rectangle 5"/>
+          <p:cNvSpPr/>
+          <p:nvPr/>
+        </p:nvSpPr>
+        <p:spPr>
+          <a:xfrm>
+            <a:off x="804672" y="1847088"/>
+            <a:ext cx="2414016" cy="32004"/>
           </a:xfrm>
           <a:prstGeom prst="rect">
             <a:avLst/>
           </a:prstGeom>
-          <a:noFill/>
-        </p:spPr>
-        <p:txBody>
-          <a:bodyPr wrap="square">
-            <a:spAutoFit/>
-          </a:bodyPr>
-          <a:lstStyle/>
-          <a:p>
-            <a:pPr>
-              <a:defRPr sz="900">
-                <a:solidFill>
-                  <a:srgbClr val="94A3B8"/>
-                </a:solidFill>
-              </a:defRPr>
-            </a:pPr>
-            <a:r>
-              <a:t>ESG ALIGNMENT</a:t>
-            </a:r>
-          </a:p>
-          <a:p>
-            <a:pPr>
-              <a:defRPr sz="2400" b="1">
-                <a:solidFill>
-                  <a:srgbClr val="10B981"/>
-                </a:solidFill>
-              </a:defRPr>
-            </a:pPr>
-            <a:r>
-              <a:t>95 / 100</a:t>
-            </a:r>
-          </a:p>
-          <a:p>
-            <a:pPr>
-              <a:defRPr sz="1000">
-                <a:solidFill>
-                  <a:srgbClr val="94A3B8"/>
-                </a:solidFill>
-              </a:defRPr>
-            </a:pPr>
-            <a:r>
-              <a:t>Top Decile Green</a:t>
-            </a:r>
-          </a:p>
-        </p:txBody>
-      </p:sp>
-      <p:sp>
-        <p:nvSpPr>
-          <p:cNvPr id="9" name="Rounded Rectangle 8"/>
-          <p:cNvSpPr/>
-          <p:nvPr/>
-        </p:nvSpPr>
-        <p:spPr>
-          <a:xfrm>
-            <a:off x="6217920" y="1920240"/>
-            <a:ext cx="2560320" cy="1645920"/>
-          </a:xfrm>
-          <a:prstGeom prst="roundRect">
-            <a:avLst/>
-          </a:prstGeom>
           <a:solidFill>
-            <a:srgbClr val="111827"/>
+            <a:srgbClr val="38BDF8"/>
           </a:solidFill>
-          <a:ln w="19050">
+          <a:ln>
             <a:solidFill>
-              <a:srgbClr val="1F2937"/>
+              <a:srgbClr val="38BDF8"/>
             </a:solidFill>
           </a:ln>
         </p:spPr>
@@ -5221,14 +5766,14 @@
       </p:sp>
       <p:sp>
         <p:nvSpPr>
-          <p:cNvPr id="10" name="TextBox 9"/>
+          <p:cNvPr id="7" name="TextBox 6"/>
           <p:cNvSpPr txBox="1"/>
           <p:nvPr/>
         </p:nvSpPr>
         <p:spPr>
           <a:xfrm>
-            <a:off x="6355080" y="2011680"/>
-            <a:ext cx="2286000" cy="1463040"/>
+            <a:off x="914400" y="1938528"/>
+            <a:ext cx="2194560" cy="1188720"/>
           </a:xfrm>
           <a:prstGeom prst="rect">
             <a:avLst/>
@@ -5236,68 +5781,71 @@
           <a:noFill/>
         </p:spPr>
         <p:txBody>
-          <a:bodyPr wrap="square">
+          <a:bodyPr wrap="square" lIns="0" tIns="0">
             <a:spAutoFit/>
           </a:bodyPr>
           <a:lstStyle/>
           <a:p>
             <a:pPr>
-              <a:defRPr sz="900">
+              <a:defRPr sz="850" b="1">
+                <a:solidFill>
+                  <a:srgbClr val="64748B"/>
+                </a:solidFill>
+                <a:latin typeface="Consolas"/>
+              </a:defRPr>
+            </a:pPr>
+            <a:r>
+              <a:t>REQUESTED FACILITY</a:t>
+            </a:r>
+          </a:p>
+          <a:p>
+            <a:pPr>
+              <a:defRPr sz="2400" b="1">
+                <a:solidFill>
+                  <a:srgbClr val="38BDF8"/>
+                </a:solidFill>
+                <a:latin typeface="Consolas"/>
+              </a:defRPr>
+            </a:pPr>
+            <a:r>
+              <a:t>€ 750,000</a:t>
+            </a:r>
+          </a:p>
+          <a:p>
+            <a:pPr>
+              <a:defRPr sz="950">
                 <a:solidFill>
                   <a:srgbClr val="94A3B8"/>
                 </a:solidFill>
-              </a:defRPr>
-            </a:pPr>
-            <a:r>
-              <a:t>TERRITORIAL RISK</a:t>
-            </a:r>
-          </a:p>
-          <a:p>
-            <a:pPr>
-              <a:defRPr sz="2400" b="1">
-                <a:solidFill>
-                  <a:srgbClr val="F59E0B"/>
-                </a:solidFill>
-              </a:defRPr>
-            </a:pPr>
-            <a:r>
-              <a:t>1.82%</a:t>
-            </a:r>
-          </a:p>
-          <a:p>
-            <a:pPr>
-              <a:defRPr sz="1000">
-                <a:solidFill>
-                  <a:srgbClr val="94A3B8"/>
-                </a:solidFill>
-              </a:defRPr>
-            </a:pPr>
-            <a:r>
-              <a:t>Milan Default Benchmark</a:t>
-            </a:r>
-          </a:p>
-        </p:txBody>
-      </p:sp>
-      <p:sp>
-        <p:nvSpPr>
-          <p:cNvPr id="11" name="Rounded Rectangle 10"/>
+                <a:latin typeface="Segoe UI"/>
+              </a:defRPr>
+            </a:pPr>
+            <a:r>
+              <a:t>5.15% Prime SLL Rate</a:t>
+            </a:r>
+          </a:p>
+        </p:txBody>
+      </p:sp>
+      <p:sp>
+        <p:nvSpPr>
+          <p:cNvPr id="8" name="Rounded Rectangle 7"/>
           <p:cNvSpPr/>
           <p:nvPr/>
         </p:nvSpPr>
         <p:spPr>
           <a:xfrm>
-            <a:off x="8961120" y="1920240"/>
-            <a:ext cx="2560320" cy="1645920"/>
+            <a:off x="3447288" y="1828800"/>
+            <a:ext cx="2560320" cy="1371600"/>
           </a:xfrm>
           <a:prstGeom prst="roundRect">
             <a:avLst/>
           </a:prstGeom>
           <a:solidFill>
-            <a:srgbClr val="111827"/>
+            <a:srgbClr val="0D1320"/>
           </a:solidFill>
-          <a:ln w="19050">
+          <a:ln w="15240">
             <a:solidFill>
-              <a:srgbClr val="1F2937"/>
+              <a:srgbClr val="1E293B"/>
             </a:solidFill>
           </a:ln>
         </p:spPr>
@@ -5325,83 +5873,24 @@
       </p:sp>
       <p:sp>
         <p:nvSpPr>
-          <p:cNvPr id="12" name="TextBox 11"/>
-          <p:cNvSpPr txBox="1"/>
-          <p:nvPr/>
-        </p:nvSpPr>
-        <p:spPr>
-          <a:xfrm>
-            <a:off x="9098280" y="2011680"/>
-            <a:ext cx="2286000" cy="1463040"/>
+          <p:cNvPr id="9" name="Rectangle 8"/>
+          <p:cNvSpPr/>
+          <p:nvPr/>
+        </p:nvSpPr>
+        <p:spPr>
+          <a:xfrm>
+            <a:off x="3520440" y="1847088"/>
+            <a:ext cx="2414016" cy="32004"/>
           </a:xfrm>
           <a:prstGeom prst="rect">
             <a:avLst/>
           </a:prstGeom>
-          <a:noFill/>
-        </p:spPr>
-        <p:txBody>
-          <a:bodyPr wrap="square">
-            <a:spAutoFit/>
-          </a:bodyPr>
-          <a:lstStyle/>
-          <a:p>
-            <a:pPr>
-              <a:defRPr sz="900">
-                <a:solidFill>
-                  <a:srgbClr val="94A3B8"/>
-                </a:solidFill>
-              </a:defRPr>
-            </a:pPr>
-            <a:r>
-              <a:t>BANKABILITY OUTCOME</a:t>
-            </a:r>
-          </a:p>
-          <a:p>
-            <a:pPr>
-              <a:defRPr sz="2400" b="1">
-                <a:solidFill>
-                  <a:srgbClr val="10B981"/>
-                </a:solidFill>
-              </a:defRPr>
-            </a:pPr>
-            <a:r>
-              <a:t>APPROVE</a:t>
-            </a:r>
-          </a:p>
-          <a:p>
-            <a:pPr>
-              <a:defRPr sz="1000">
-                <a:solidFill>
-                  <a:srgbClr val="94A3B8"/>
-                </a:solidFill>
-              </a:defRPr>
-            </a:pPr>
-            <a:r>
-              <a:t>5.15% Prime Rate</a:t>
-            </a:r>
-          </a:p>
-        </p:txBody>
-      </p:sp>
-      <p:sp>
-        <p:nvSpPr>
-          <p:cNvPr id="13" name="Rounded Rectangle 12"/>
-          <p:cNvSpPr/>
-          <p:nvPr/>
-        </p:nvSpPr>
-        <p:spPr>
-          <a:xfrm>
-            <a:off x="731520" y="3840480"/>
-            <a:ext cx="10698480" cy="2377440"/>
-          </a:xfrm>
-          <a:prstGeom prst="roundRect">
-            <a:avLst/>
-          </a:prstGeom>
           <a:solidFill>
-            <a:srgbClr val="111827"/>
+            <a:srgbClr val="10B981"/>
           </a:solidFill>
-          <a:ln w="19050">
+          <a:ln>
             <a:solidFill>
-              <a:srgbClr val="1F2937"/>
+              <a:srgbClr val="10B981"/>
             </a:solidFill>
           </a:ln>
         </p:spPr>
@@ -5429,14 +5918,14 @@
       </p:sp>
       <p:sp>
         <p:nvSpPr>
-          <p:cNvPr id="14" name="TextBox 13"/>
+          <p:cNvPr id="10" name="TextBox 9"/>
           <p:cNvSpPr txBox="1"/>
           <p:nvPr/>
         </p:nvSpPr>
         <p:spPr>
           <a:xfrm>
-            <a:off x="914400" y="3977640"/>
-            <a:ext cx="10332720" cy="411480"/>
+            <a:off x="3630168" y="1938528"/>
+            <a:ext cx="2194560" cy="1188720"/>
           </a:xfrm>
           <a:prstGeom prst="rect">
             <a:avLst/>
@@ -5444,35 +5933,151 @@
           <a:noFill/>
         </p:spPr>
         <p:txBody>
-          <a:bodyPr wrap="none">
+          <a:bodyPr wrap="square" lIns="0" tIns="0">
             <a:spAutoFit/>
           </a:bodyPr>
           <a:lstStyle/>
           <a:p>
             <a:pPr>
-              <a:defRPr sz="1100" b="1">
-                <a:solidFill>
-                  <a:srgbClr val="38BDF8"/>
-                </a:solidFill>
-                <a:latin typeface="Arial"/>
-              </a:defRPr>
-            </a:pPr>
-            <a:r>
-              <a:t>LIVE INGESTION &amp; WHAT-IF STRESS TESTING (€750K VS €1.0M TIPPING POINT)</a:t>
-            </a:r>
-          </a:p>
-        </p:txBody>
-      </p:sp>
-      <p:sp>
-        <p:nvSpPr>
-          <p:cNvPr id="15" name="TextBox 14"/>
+              <a:defRPr sz="850" b="1">
+                <a:solidFill>
+                  <a:srgbClr val="64748B"/>
+                </a:solidFill>
+                <a:latin typeface="Consolas"/>
+              </a:defRPr>
+            </a:pPr>
+            <a:r>
+              <a:t>POST-DEBT DSCR</a:t>
+            </a:r>
+          </a:p>
+          <a:p>
+            <a:pPr>
+              <a:defRPr sz="2400" b="1">
+                <a:solidFill>
+                  <a:srgbClr val="10B981"/>
+                </a:solidFill>
+                <a:latin typeface="Consolas"/>
+              </a:defRPr>
+            </a:pPr>
+            <a:r>
+              <a:t>3.37x</a:t>
+            </a:r>
+          </a:p>
+          <a:p>
+            <a:pPr>
+              <a:defRPr sz="950">
+                <a:solidFill>
+                  <a:srgbClr val="94A3B8"/>
+                </a:solidFill>
+                <a:latin typeface="Segoe UI"/>
+              </a:defRPr>
+            </a:pPr>
+            <a:r>
+              <a:t>Covenant Floor: &gt; 1.30x</a:t>
+            </a:r>
+          </a:p>
+        </p:txBody>
+      </p:sp>
+      <p:sp>
+        <p:nvSpPr>
+          <p:cNvPr id="11" name="Rounded Rectangle 10"/>
+          <p:cNvSpPr/>
+          <p:nvPr/>
+        </p:nvSpPr>
+        <p:spPr>
+          <a:xfrm>
+            <a:off x="6163056" y="1828800"/>
+            <a:ext cx="2560320" cy="1371600"/>
+          </a:xfrm>
+          <a:prstGeom prst="roundRect">
+            <a:avLst/>
+          </a:prstGeom>
+          <a:solidFill>
+            <a:srgbClr val="0D1320"/>
+          </a:solidFill>
+          <a:ln w="15240">
+            <a:solidFill>
+              <a:srgbClr val="1E293B"/>
+            </a:solidFill>
+          </a:ln>
+        </p:spPr>
+        <p:style>
+          <a:lnRef idx="1">
+            <a:schemeClr val="accent1"/>
+          </a:lnRef>
+          <a:fillRef idx="3">
+            <a:schemeClr val="accent1"/>
+          </a:fillRef>
+          <a:effectRef idx="2">
+            <a:schemeClr val="accent1"/>
+          </a:effectRef>
+          <a:fontRef idx="minor">
+            <a:schemeClr val="lt1"/>
+          </a:fontRef>
+        </p:style>
+        <p:txBody>
+          <a:bodyPr rtlCol="0" anchor="ctr"/>
+          <a:lstStyle/>
+          <a:p>
+            <a:pPr algn="ctr"/>
+          </a:p>
+        </p:txBody>
+      </p:sp>
+      <p:sp>
+        <p:nvSpPr>
+          <p:cNvPr id="12" name="Rectangle 11"/>
+          <p:cNvSpPr/>
+          <p:nvPr/>
+        </p:nvSpPr>
+        <p:spPr>
+          <a:xfrm>
+            <a:off x="6236208" y="1847088"/>
+            <a:ext cx="2414016" cy="32004"/>
+          </a:xfrm>
+          <a:prstGeom prst="rect">
+            <a:avLst/>
+          </a:prstGeom>
+          <a:solidFill>
+            <a:srgbClr val="FFFFFF"/>
+          </a:solidFill>
+          <a:ln>
+            <a:solidFill>
+              <a:srgbClr val="FFFFFF"/>
+            </a:solidFill>
+          </a:ln>
+        </p:spPr>
+        <p:style>
+          <a:lnRef idx="1">
+            <a:schemeClr val="accent1"/>
+          </a:lnRef>
+          <a:fillRef idx="3">
+            <a:schemeClr val="accent1"/>
+          </a:fillRef>
+          <a:effectRef idx="2">
+            <a:schemeClr val="accent1"/>
+          </a:effectRef>
+          <a:fontRef idx="minor">
+            <a:schemeClr val="lt1"/>
+          </a:fontRef>
+        </p:style>
+        <p:txBody>
+          <a:bodyPr rtlCol="0" anchor="ctr"/>
+          <a:lstStyle/>
+          <a:p>
+            <a:pPr algn="ctr"/>
+          </a:p>
+        </p:txBody>
+      </p:sp>
+      <p:sp>
+        <p:nvSpPr>
+          <p:cNvPr id="13" name="TextBox 12"/>
           <p:cNvSpPr txBox="1"/>
           <p:nvPr/>
         </p:nvSpPr>
         <p:spPr>
           <a:xfrm>
-            <a:off x="914400" y="4297680"/>
-            <a:ext cx="10332720" cy="1828800"/>
+            <a:off x="6345936" y="1938528"/>
+            <a:ext cx="2194560" cy="1188720"/>
           </a:xfrm>
           <a:prstGeom prst="rect">
             <a:avLst/>
@@ -5480,65 +6085,786 @@
           <a:noFill/>
         </p:spPr>
         <p:txBody>
-          <a:bodyPr wrap="square">
+          <a:bodyPr wrap="square" lIns="0" tIns="0">
             <a:spAutoFit/>
           </a:bodyPr>
           <a:lstStyle/>
           <a:p>
             <a:pPr>
+              <a:defRPr sz="850" b="1">
+                <a:solidFill>
+                  <a:srgbClr val="64748B"/>
+                </a:solidFill>
+                <a:latin typeface="Consolas"/>
+              </a:defRPr>
+            </a:pPr>
+            <a:r>
+              <a:t>HEALTH SCORE</a:t>
+            </a:r>
+          </a:p>
+          <a:p>
+            <a:pPr>
+              <a:defRPr sz="2400" b="1">
+                <a:solidFill>
+                  <a:srgbClr val="FFFFFF"/>
+                </a:solidFill>
+                <a:latin typeface="Consolas"/>
+              </a:defRPr>
+            </a:pPr>
+            <a:r>
+              <a:t>97 / 100</a:t>
+            </a:r>
+          </a:p>
+          <a:p>
+            <a:pPr>
+              <a:defRPr sz="950">
+                <a:solidFill>
+                  <a:srgbClr val="94A3B8"/>
+                </a:solidFill>
+                <a:latin typeface="Segoe UI"/>
+              </a:defRPr>
+            </a:pPr>
+            <a:r>
+              <a:t>Prime Solvency Tier</a:t>
+            </a:r>
+          </a:p>
+        </p:txBody>
+      </p:sp>
+      <p:sp>
+        <p:nvSpPr>
+          <p:cNvPr id="14" name="Rounded Rectangle 13"/>
+          <p:cNvSpPr/>
+          <p:nvPr/>
+        </p:nvSpPr>
+        <p:spPr>
+          <a:xfrm>
+            <a:off x="8878824" y="1828800"/>
+            <a:ext cx="2560320" cy="1371600"/>
+          </a:xfrm>
+          <a:prstGeom prst="roundRect">
+            <a:avLst/>
+          </a:prstGeom>
+          <a:solidFill>
+            <a:srgbClr val="0D1320"/>
+          </a:solidFill>
+          <a:ln w="15240">
+            <a:solidFill>
+              <a:srgbClr val="1E293B"/>
+            </a:solidFill>
+          </a:ln>
+        </p:spPr>
+        <p:style>
+          <a:lnRef idx="1">
+            <a:schemeClr val="accent1"/>
+          </a:lnRef>
+          <a:fillRef idx="3">
+            <a:schemeClr val="accent1"/>
+          </a:fillRef>
+          <a:effectRef idx="2">
+            <a:schemeClr val="accent1"/>
+          </a:effectRef>
+          <a:fontRef idx="minor">
+            <a:schemeClr val="lt1"/>
+          </a:fontRef>
+        </p:style>
+        <p:txBody>
+          <a:bodyPr rtlCol="0" anchor="ctr"/>
+          <a:lstStyle/>
+          <a:p>
+            <a:pPr algn="ctr"/>
+          </a:p>
+        </p:txBody>
+      </p:sp>
+      <p:sp>
+        <p:nvSpPr>
+          <p:cNvPr id="15" name="Rectangle 14"/>
+          <p:cNvSpPr/>
+          <p:nvPr/>
+        </p:nvSpPr>
+        <p:spPr>
+          <a:xfrm>
+            <a:off x="8951976" y="1847088"/>
+            <a:ext cx="2414016" cy="32004"/>
+          </a:xfrm>
+          <a:prstGeom prst="rect">
+            <a:avLst/>
+          </a:prstGeom>
+          <a:solidFill>
+            <a:srgbClr val="34D399"/>
+          </a:solidFill>
+          <a:ln>
+            <a:solidFill>
+              <a:srgbClr val="34D399"/>
+            </a:solidFill>
+          </a:ln>
+        </p:spPr>
+        <p:style>
+          <a:lnRef idx="1">
+            <a:schemeClr val="accent1"/>
+          </a:lnRef>
+          <a:fillRef idx="3">
+            <a:schemeClr val="accent1"/>
+          </a:fillRef>
+          <a:effectRef idx="2">
+            <a:schemeClr val="accent1"/>
+          </a:effectRef>
+          <a:fontRef idx="minor">
+            <a:schemeClr val="lt1"/>
+          </a:fontRef>
+        </p:style>
+        <p:txBody>
+          <a:bodyPr rtlCol="0" anchor="ctr"/>
+          <a:lstStyle/>
+          <a:p>
+            <a:pPr algn="ctr"/>
+          </a:p>
+        </p:txBody>
+      </p:sp>
+      <p:sp>
+        <p:nvSpPr>
+          <p:cNvPr id="16" name="TextBox 15"/>
+          <p:cNvSpPr txBox="1"/>
+          <p:nvPr/>
+        </p:nvSpPr>
+        <p:spPr>
+          <a:xfrm>
+            <a:off x="9061704" y="1938528"/>
+            <a:ext cx="2194560" cy="1188720"/>
+          </a:xfrm>
+          <a:prstGeom prst="rect">
+            <a:avLst/>
+          </a:prstGeom>
+          <a:noFill/>
+        </p:spPr>
+        <p:txBody>
+          <a:bodyPr wrap="square" lIns="0" tIns="0">
+            <a:spAutoFit/>
+          </a:bodyPr>
+          <a:lstStyle/>
+          <a:p>
+            <a:pPr>
+              <a:defRPr sz="850" b="1">
+                <a:solidFill>
+                  <a:srgbClr val="64748B"/>
+                </a:solidFill>
+                <a:latin typeface="Consolas"/>
+              </a:defRPr>
+            </a:pPr>
+            <a:r>
+              <a:t>BANKABILITY OUTCOME</a:t>
+            </a:r>
+          </a:p>
+          <a:p>
+            <a:pPr>
+              <a:defRPr sz="2400" b="1">
+                <a:solidFill>
+                  <a:srgbClr val="34D399"/>
+                </a:solidFill>
+                <a:latin typeface="Consolas"/>
+              </a:defRPr>
+            </a:pPr>
+            <a:r>
+              <a:t>APPROVE</a:t>
+            </a:r>
+          </a:p>
+          <a:p>
+            <a:pPr>
+              <a:defRPr sz="950">
+                <a:solidFill>
+                  <a:srgbClr val="94A3B8"/>
+                </a:solidFill>
+                <a:latin typeface="Segoe UI"/>
+              </a:defRPr>
+            </a:pPr>
+            <a:r>
+              <a:t>Pre-Approved by Algorithm</a:t>
+            </a:r>
+          </a:p>
+        </p:txBody>
+      </p:sp>
+      <p:sp>
+        <p:nvSpPr>
+          <p:cNvPr id="17" name="Rounded Rectangle 16"/>
+          <p:cNvSpPr/>
+          <p:nvPr/>
+        </p:nvSpPr>
+        <p:spPr>
+          <a:xfrm>
+            <a:off x="731520" y="3383280"/>
+            <a:ext cx="10698480" cy="1097280"/>
+          </a:xfrm>
+          <a:prstGeom prst="roundRect">
+            <a:avLst/>
+          </a:prstGeom>
+          <a:solidFill>
+            <a:srgbClr val="0D1320"/>
+          </a:solidFill>
+          <a:ln w="15240">
+            <a:solidFill>
+              <a:srgbClr val="1E293B"/>
+            </a:solidFill>
+          </a:ln>
+        </p:spPr>
+        <p:style>
+          <a:lnRef idx="1">
+            <a:schemeClr val="accent1"/>
+          </a:lnRef>
+          <a:fillRef idx="3">
+            <a:schemeClr val="accent1"/>
+          </a:fillRef>
+          <a:effectRef idx="2">
+            <a:schemeClr val="accent1"/>
+          </a:effectRef>
+          <a:fontRef idx="minor">
+            <a:schemeClr val="lt1"/>
+          </a:fontRef>
+        </p:style>
+        <p:txBody>
+          <a:bodyPr rtlCol="0" anchor="ctr"/>
+          <a:lstStyle/>
+          <a:p>
+            <a:pPr algn="ctr"/>
+          </a:p>
+        </p:txBody>
+      </p:sp>
+      <p:sp>
+        <p:nvSpPr>
+          <p:cNvPr id="18" name="Rectangle 17"/>
+          <p:cNvSpPr/>
+          <p:nvPr/>
+        </p:nvSpPr>
+        <p:spPr>
+          <a:xfrm>
+            <a:off x="804672" y="3401568"/>
+            <a:ext cx="10552176" cy="32004"/>
+          </a:xfrm>
+          <a:prstGeom prst="rect">
+            <a:avLst/>
+          </a:prstGeom>
+          <a:solidFill>
+            <a:srgbClr val="38BDF8"/>
+          </a:solidFill>
+          <a:ln>
+            <a:solidFill>
+              <a:srgbClr val="38BDF8"/>
+            </a:solidFill>
+          </a:ln>
+        </p:spPr>
+        <p:style>
+          <a:lnRef idx="1">
+            <a:schemeClr val="accent1"/>
+          </a:lnRef>
+          <a:fillRef idx="3">
+            <a:schemeClr val="accent1"/>
+          </a:fillRef>
+          <a:effectRef idx="2">
+            <a:schemeClr val="accent1"/>
+          </a:effectRef>
+          <a:fontRef idx="minor">
+            <a:schemeClr val="lt1"/>
+          </a:fontRef>
+        </p:style>
+        <p:txBody>
+          <a:bodyPr rtlCol="0" anchor="ctr"/>
+          <a:lstStyle/>
+          <a:p>
+            <a:pPr algn="ctr"/>
+          </a:p>
+        </p:txBody>
+      </p:sp>
+      <p:sp>
+        <p:nvSpPr>
+          <p:cNvPr id="19" name="TextBox 18"/>
+          <p:cNvSpPr txBox="1"/>
+          <p:nvPr/>
+        </p:nvSpPr>
+        <p:spPr>
+          <a:xfrm>
+            <a:off x="914400" y="3456432"/>
+            <a:ext cx="10332720" cy="914400"/>
+          </a:xfrm>
+          <a:prstGeom prst="rect">
+            <a:avLst/>
+          </a:prstGeom>
+          <a:noFill/>
+        </p:spPr>
+        <p:txBody>
+          <a:bodyPr wrap="square" lIns="0" tIns="0">
+            <a:spAutoFit/>
+          </a:bodyPr>
+          <a:lstStyle/>
+          <a:p>
+            <a:pPr>
+              <a:defRPr sz="900" b="1">
+                <a:solidFill>
+                  <a:srgbClr val="38BDF8"/>
+                </a:solidFill>
+                <a:latin typeface="Consolas"/>
+              </a:defRPr>
+            </a:pPr>
+            <a:r>
+              <a:t>COVENANT HEADROOM GAUGE // SOLVENCY ABSORPTION BUFFER</a:t>
+            </a:r>
+          </a:p>
+        </p:txBody>
+      </p:sp>
+      <p:sp>
+        <p:nvSpPr>
+          <p:cNvPr id="20" name="Rectangle 19"/>
+          <p:cNvSpPr/>
+          <p:nvPr/>
+        </p:nvSpPr>
+        <p:spPr>
+          <a:xfrm>
+            <a:off x="914400" y="3767328"/>
+            <a:ext cx="2583180" cy="201168"/>
+          </a:xfrm>
+          <a:prstGeom prst="rect">
+            <a:avLst/>
+          </a:prstGeom>
+          <a:solidFill>
+            <a:srgbClr val="7F1D1D"/>
+          </a:solidFill>
+          <a:ln>
+            <a:noFill/>
+          </a:ln>
+        </p:spPr>
+        <p:style>
+          <a:lnRef idx="1">
+            <a:schemeClr val="accent1"/>
+          </a:lnRef>
+          <a:fillRef idx="3">
+            <a:schemeClr val="accent1"/>
+          </a:fillRef>
+          <a:effectRef idx="2">
+            <a:schemeClr val="accent1"/>
+          </a:effectRef>
+          <a:fontRef idx="minor">
+            <a:schemeClr val="lt1"/>
+          </a:fontRef>
+        </p:style>
+        <p:txBody>
+          <a:bodyPr rtlCol="0" anchor="ctr"/>
+          <a:lstStyle/>
+          <a:p>
+            <a:pPr algn="ctr"/>
+          </a:p>
+        </p:txBody>
+      </p:sp>
+      <p:sp>
+        <p:nvSpPr>
+          <p:cNvPr id="21" name="Rectangle 20"/>
+          <p:cNvSpPr/>
+          <p:nvPr/>
+        </p:nvSpPr>
+        <p:spPr>
+          <a:xfrm>
+            <a:off x="3497580" y="3767328"/>
+            <a:ext cx="774954" cy="201168"/>
+          </a:xfrm>
+          <a:prstGeom prst="rect">
+            <a:avLst/>
+          </a:prstGeom>
+          <a:solidFill>
+            <a:srgbClr val="B45309"/>
+          </a:solidFill>
+          <a:ln>
+            <a:noFill/>
+          </a:ln>
+        </p:spPr>
+        <p:style>
+          <a:lnRef idx="1">
+            <a:schemeClr val="accent1"/>
+          </a:lnRef>
+          <a:fillRef idx="3">
+            <a:schemeClr val="accent1"/>
+          </a:fillRef>
+          <a:effectRef idx="2">
+            <a:schemeClr val="accent1"/>
+          </a:effectRef>
+          <a:fontRef idx="minor">
+            <a:schemeClr val="lt1"/>
+          </a:fontRef>
+        </p:style>
+        <p:txBody>
+          <a:bodyPr rtlCol="0" anchor="ctr"/>
+          <a:lstStyle/>
+          <a:p>
+            <a:pPr algn="ctr"/>
+          </a:p>
+        </p:txBody>
+      </p:sp>
+      <p:sp>
+        <p:nvSpPr>
+          <p:cNvPr id="22" name="Rectangle 21"/>
+          <p:cNvSpPr/>
+          <p:nvPr/>
+        </p:nvSpPr>
+        <p:spPr>
+          <a:xfrm>
+            <a:off x="4272534" y="3767328"/>
+            <a:ext cx="6974586" cy="201168"/>
+          </a:xfrm>
+          <a:prstGeom prst="rect">
+            <a:avLst/>
+          </a:prstGeom>
+          <a:solidFill>
+            <a:srgbClr val="065F46"/>
+          </a:solidFill>
+          <a:ln>
+            <a:noFill/>
+          </a:ln>
+        </p:spPr>
+        <p:style>
+          <a:lnRef idx="1">
+            <a:schemeClr val="accent1"/>
+          </a:lnRef>
+          <a:fillRef idx="3">
+            <a:schemeClr val="accent1"/>
+          </a:fillRef>
+          <a:effectRef idx="2">
+            <a:schemeClr val="accent1"/>
+          </a:effectRef>
+          <a:fontRef idx="minor">
+            <a:schemeClr val="lt1"/>
+          </a:fontRef>
+        </p:style>
+        <p:txBody>
+          <a:bodyPr rtlCol="0" anchor="ctr"/>
+          <a:lstStyle/>
+          <a:p>
+            <a:pPr algn="ctr"/>
+          </a:p>
+        </p:txBody>
+      </p:sp>
+      <p:sp>
+        <p:nvSpPr>
+          <p:cNvPr id="23" name="Rectangle 22"/>
+          <p:cNvSpPr/>
+          <p:nvPr/>
+        </p:nvSpPr>
+        <p:spPr>
+          <a:xfrm>
+            <a:off x="9593884" y="3730752"/>
+            <a:ext cx="54864" cy="274320"/>
+          </a:xfrm>
+          <a:prstGeom prst="rect">
+            <a:avLst/>
+          </a:prstGeom>
+          <a:solidFill>
+            <a:srgbClr val="FFFFFF"/>
+          </a:solidFill>
+          <a:ln>
+            <a:noFill/>
+          </a:ln>
+        </p:spPr>
+        <p:style>
+          <a:lnRef idx="1">
+            <a:schemeClr val="accent1"/>
+          </a:lnRef>
+          <a:fillRef idx="3">
+            <a:schemeClr val="accent1"/>
+          </a:fillRef>
+          <a:effectRef idx="2">
+            <a:schemeClr val="accent1"/>
+          </a:effectRef>
+          <a:fontRef idx="minor">
+            <a:schemeClr val="lt1"/>
+          </a:fontRef>
+        </p:style>
+        <p:txBody>
+          <a:bodyPr rtlCol="0" anchor="ctr"/>
+          <a:lstStyle/>
+          <a:p>
+            <a:pPr algn="ctr"/>
+          </a:p>
+        </p:txBody>
+      </p:sp>
+      <p:sp>
+        <p:nvSpPr>
+          <p:cNvPr id="24" name="Rectangle 23"/>
+          <p:cNvSpPr/>
+          <p:nvPr/>
+        </p:nvSpPr>
+        <p:spPr>
+          <a:xfrm>
+            <a:off x="4272534" y="3730752"/>
+            <a:ext cx="36576" cy="274320"/>
+          </a:xfrm>
+          <a:prstGeom prst="rect">
+            <a:avLst/>
+          </a:prstGeom>
+          <a:solidFill>
+            <a:srgbClr val="F59E0B"/>
+          </a:solidFill>
+          <a:ln>
+            <a:noFill/>
+          </a:ln>
+        </p:spPr>
+        <p:style>
+          <a:lnRef idx="1">
+            <a:schemeClr val="accent1"/>
+          </a:lnRef>
+          <a:fillRef idx="3">
+            <a:schemeClr val="accent1"/>
+          </a:fillRef>
+          <a:effectRef idx="2">
+            <a:schemeClr val="accent1"/>
+          </a:effectRef>
+          <a:fontRef idx="minor">
+            <a:schemeClr val="lt1"/>
+          </a:fontRef>
+        </p:style>
+        <p:txBody>
+          <a:bodyPr rtlCol="0" anchor="ctr"/>
+          <a:lstStyle/>
+          <a:p>
+            <a:pPr algn="ctr"/>
+          </a:p>
+        </p:txBody>
+      </p:sp>
+      <p:sp>
+        <p:nvSpPr>
+          <p:cNvPr id="25" name="TextBox 24"/>
+          <p:cNvSpPr txBox="1"/>
+          <p:nvPr/>
+        </p:nvSpPr>
+        <p:spPr>
+          <a:xfrm>
+            <a:off x="914400" y="4041648"/>
+            <a:ext cx="10332720" cy="320040"/>
+          </a:xfrm>
+          <a:prstGeom prst="rect">
+            <a:avLst/>
+          </a:prstGeom>
+          <a:noFill/>
+        </p:spPr>
+        <p:txBody>
+          <a:bodyPr wrap="none" lIns="0" tIns="0">
+            <a:spAutoFit/>
+          </a:bodyPr>
+          <a:lstStyle/>
+          <a:p>
+            <a:pPr>
+              <a:defRPr sz="850">
+                <a:solidFill>
+                  <a:srgbClr val="34D399"/>
+                </a:solidFill>
+                <a:latin typeface="Consolas"/>
+              </a:defRPr>
+            </a:pPr>
+            <a:r>
+              <a:t>● Buffer Solvibilità: +2.07x sopra soglia covenant (1.30x)  |  Resiste a shock EBITDA fino a -61.4% prima del default  |  Scala: 0.0x → 4.0x</a:t>
+            </a:r>
+          </a:p>
+        </p:txBody>
+      </p:sp>
+      <p:sp>
+        <p:nvSpPr>
+          <p:cNvPr id="26" name="Rounded Rectangle 25"/>
+          <p:cNvSpPr/>
+          <p:nvPr/>
+        </p:nvSpPr>
+        <p:spPr>
+          <a:xfrm>
+            <a:off x="731520" y="4663440"/>
+            <a:ext cx="10698480" cy="1554480"/>
+          </a:xfrm>
+          <a:prstGeom prst="roundRect">
+            <a:avLst/>
+          </a:prstGeom>
+          <a:solidFill>
+            <a:srgbClr val="0D1320"/>
+          </a:solidFill>
+          <a:ln w="15240">
+            <a:solidFill>
+              <a:srgbClr val="1E293B"/>
+            </a:solidFill>
+          </a:ln>
+        </p:spPr>
+        <p:style>
+          <a:lnRef idx="1">
+            <a:schemeClr val="accent1"/>
+          </a:lnRef>
+          <a:fillRef idx="3">
+            <a:schemeClr val="accent1"/>
+          </a:fillRef>
+          <a:effectRef idx="2">
+            <a:schemeClr val="accent1"/>
+          </a:effectRef>
+          <a:fontRef idx="minor">
+            <a:schemeClr val="lt1"/>
+          </a:fontRef>
+        </p:style>
+        <p:txBody>
+          <a:bodyPr rtlCol="0" anchor="ctr"/>
+          <a:lstStyle/>
+          <a:p>
+            <a:pPr algn="ctr"/>
+          </a:p>
+        </p:txBody>
+      </p:sp>
+      <p:sp>
+        <p:nvSpPr>
+          <p:cNvPr id="27" name="Rectangle 26"/>
+          <p:cNvSpPr/>
+          <p:nvPr/>
+        </p:nvSpPr>
+        <p:spPr>
+          <a:xfrm>
+            <a:off x="804672" y="4681728"/>
+            <a:ext cx="10552176" cy="32004"/>
+          </a:xfrm>
+          <a:prstGeom prst="rect">
+            <a:avLst/>
+          </a:prstGeom>
+          <a:solidFill>
+            <a:srgbClr val="F59E0B"/>
+          </a:solidFill>
+          <a:ln>
+            <a:solidFill>
+              <a:srgbClr val="F59E0B"/>
+            </a:solidFill>
+          </a:ln>
+        </p:spPr>
+        <p:style>
+          <a:lnRef idx="1">
+            <a:schemeClr val="accent1"/>
+          </a:lnRef>
+          <a:fillRef idx="3">
+            <a:schemeClr val="accent1"/>
+          </a:fillRef>
+          <a:effectRef idx="2">
+            <a:schemeClr val="accent1"/>
+          </a:effectRef>
+          <a:fontRef idx="minor">
+            <a:schemeClr val="lt1"/>
+          </a:fontRef>
+        </p:style>
+        <p:txBody>
+          <a:bodyPr rtlCol="0" anchor="ctr"/>
+          <a:lstStyle/>
+          <a:p>
+            <a:pPr algn="ctr"/>
+          </a:p>
+        </p:txBody>
+      </p:sp>
+      <p:sp>
+        <p:nvSpPr>
+          <p:cNvPr id="28" name="TextBox 27"/>
+          <p:cNvSpPr txBox="1"/>
+          <p:nvPr/>
+        </p:nvSpPr>
+        <p:spPr>
+          <a:xfrm>
+            <a:off x="914400" y="4773168"/>
+            <a:ext cx="10332720" cy="1371600"/>
+          </a:xfrm>
+          <a:prstGeom prst="rect">
+            <a:avLst/>
+          </a:prstGeom>
+          <a:noFill/>
+        </p:spPr>
+        <p:txBody>
+          <a:bodyPr wrap="square" lIns="0" tIns="0">
+            <a:spAutoFit/>
+          </a:bodyPr>
+          <a:lstStyle/>
+          <a:p>
+            <a:pPr>
               <a:spcAft>
-                <a:spcPts val="600"/>
+                <a:spcPts val="300"/>
               </a:spcAft>
-              <a:defRPr sz="1300" b="1">
-                <a:solidFill>
-                  <a:srgbClr val="38BDF8"/>
-                </a:solidFill>
-              </a:defRPr>
-            </a:pPr>
-            <a:r>
-              <a:t>LIVE DUCKDB INGESTION: Balance sheet parsed in RAM in 0.3s; SHA-256 cryptographic proof generated.</a:t>
+              <a:defRPr sz="950" b="1">
+                <a:solidFill>
+                  <a:srgbClr val="F59E0B"/>
+                </a:solidFill>
+                <a:latin typeface="Consolas"/>
+              </a:defRPr>
+            </a:pPr>
+            <a:r>
+              <a:t>SENSITIVITY EXPERIMENT // THE €1.0M TIPPING POINT</a:t>
             </a:r>
           </a:p>
           <a:p>
             <a:pPr>
               <a:spcAft>
-                <a:spcPts val="600"/>
+                <a:spcPts val="200"/>
               </a:spcAft>
-              <a:defRPr sz="1250" b="1">
-                <a:solidFill>
-                  <a:srgbClr val="10B981"/>
-                </a:solidFill>
-              </a:defRPr>
-            </a:pPr>
-            <a:r>
-              <a:t>OPTIMAL BASE (€750k): DSCR 2.96x | Health 95/100 | Pre-Approved at prime 5.15% fixed + 15% grant.</a:t>
+              <a:defRPr sz="1100" b="1">
+                <a:solidFill>
+                  <a:srgbClr val="34D399"/>
+                </a:solidFill>
+                <a:latin typeface="Segoe UI"/>
+              </a:defRPr>
+            </a:pPr>
+            <a:r>
+              <a:t>• BASE CASE (€750k): DSCR 3.37x | Health Score 97/100 | Pre-Approved at prime 5.15% fixed rate + €112k regional green grant.</a:t>
             </a:r>
           </a:p>
           <a:p>
             <a:pPr>
               <a:spcAft>
-                <a:spcPts val="600"/>
+                <a:spcPts val="400"/>
               </a:spcAft>
-              <a:defRPr sz="1250" b="1">
-                <a:solidFill>
-                  <a:srgbClr val="F59E0B"/>
-                </a:solidFill>
-              </a:defRPr>
-            </a:pPr>
-            <a:r>
-              <a:t>STRESS SCENARIO (€1.0M+): DSCR compresses to 1.35x | Financial Score drops to 74 | REVIEW triggered.</a:t>
-            </a:r>
-          </a:p>
-          <a:p>
-            <a:pPr>
-              <a:defRPr sz="1200">
+              <a:defRPr sz="1100" b="1">
+                <a:solidFill>
+                  <a:srgbClr val="F43F5E"/>
+                </a:solidFill>
+                <a:latin typeface="Segoe UI"/>
+              </a:defRPr>
+            </a:pPr>
+            <a:r>
+              <a:t>• STRESS CASE (€1.0M+): DSCR drops to 1.28x | Net Debt/EBITDA expands to 2.25x | Pushes file into bank REVIEW watchlist.</a:t>
+            </a:r>
+          </a:p>
+          <a:p>
+            <a:pPr>
+              <a:defRPr sz="1100" b="1">
                 <a:solidFill>
                   <a:srgbClr val="FFFFFF"/>
                 </a:solidFill>
-              </a:defRPr>
-            </a:pPr>
-            <a:r>
-              <a:t>ACTIONABLE CFO GUIDANCE: Avoid €1.0M debt directly. Structure as €750k loan + €250k regional decarbonization grant to retain prime pricing and guarantee 100% approval.</a:t>
+                <a:latin typeface="Segoe UI"/>
+              </a:defRPr>
+            </a:pPr>
+            <a:r>
+              <a:t>💡 ACTIONABLE CFO RECOMMENDATION: Cap senior bank debt at €750k to preserve prime pricing. Fund the remaining €250k through Lombardia Green Transition Grant, guaranteeing 100% delibera approval.</a:t>
+            </a:r>
+          </a:p>
+        </p:txBody>
+      </p:sp>
+      <p:sp>
+        <p:nvSpPr>
+          <p:cNvPr id="29" name="TextBox 28"/>
+          <p:cNvSpPr txBox="1"/>
+          <p:nvPr/>
+        </p:nvSpPr>
+        <p:spPr>
+          <a:xfrm>
+            <a:off x="731520" y="6446520"/>
+            <a:ext cx="10698480" cy="320040"/>
+          </a:xfrm>
+          <a:prstGeom prst="rect">
+            <a:avLst/>
+          </a:prstGeom>
+          <a:noFill/>
+        </p:spPr>
+        <p:txBody>
+          <a:bodyPr wrap="none" lIns="0" tIns="0">
+            <a:spAutoFit/>
+          </a:bodyPr>
+          <a:lstStyle/>
+          <a:p>
+            <a:pPr>
+              <a:defRPr sz="850" b="1">
+                <a:solidFill>
+                  <a:srgbClr val="64748B"/>
+                </a:solidFill>
+                <a:latin typeface="Consolas"/>
+              </a:defRPr>
+            </a:pPr>
+            <a:r>
+              <a:t>DUCKDB 1.0 IN-MEMORY OLAP  |  APPLICATION ID: ECOTEX-2026-IT  |  EBA/GL/2020/06 COMPLIANT  |  TUB ART. 128-SEXIES SEAL</a:t>
             </a:r>
           </a:p>
         </p:txBody>
@@ -5576,11 +6902,11 @@
             <a:avLst/>
           </a:prstGeom>
           <a:solidFill>
-            <a:srgbClr val="0B0F19"/>
+            <a:srgbClr val="06090E"/>
           </a:solidFill>
           <a:ln>
             <a:solidFill>
-              <a:srgbClr val="0B0F19"/>
+              <a:srgbClr val="06090E"/>
             </a:solidFill>
           </a:ln>
         </p:spPr>
@@ -5608,109 +6934,24 @@
       </p:sp>
       <p:sp>
         <p:nvSpPr>
-          <p:cNvPr id="3" name="TextBox 2"/>
-          <p:cNvSpPr txBox="1"/>
-          <p:nvPr/>
-        </p:nvSpPr>
-        <p:spPr>
-          <a:xfrm>
-            <a:off x="731520" y="411480"/>
-            <a:ext cx="10698480" cy="320040"/>
-          </a:xfrm>
-          <a:prstGeom prst="rect">
-            <a:avLst/>
-          </a:prstGeom>
-          <a:noFill/>
-        </p:spPr>
-        <p:txBody>
-          <a:bodyPr wrap="none">
-            <a:spAutoFit/>
-          </a:bodyPr>
-          <a:lstStyle/>
-          <a:p>
-            <a:pPr>
-              <a:defRPr sz="1100" b="1">
-                <a:solidFill>
-                  <a:srgbClr val="38BDF8"/>
-                </a:solidFill>
-                <a:latin typeface="Arial"/>
-              </a:defRPr>
-            </a:pPr>
-            <a:r>
-              <a:t>COMMERCIAL STRATEGY</a:t>
-            </a:r>
-          </a:p>
-        </p:txBody>
-      </p:sp>
-      <p:sp>
-        <p:nvSpPr>
-          <p:cNvPr id="4" name="TextBox 3"/>
-          <p:cNvSpPr txBox="1"/>
-          <p:nvPr/>
-        </p:nvSpPr>
-        <p:spPr>
-          <a:xfrm>
-            <a:off x="731520" y="777240"/>
-            <a:ext cx="10698480" cy="914400"/>
-          </a:xfrm>
-          <a:prstGeom prst="rect">
-            <a:avLst/>
-          </a:prstGeom>
-          <a:noFill/>
-        </p:spPr>
-        <p:txBody>
-          <a:bodyPr wrap="square">
-            <a:spAutoFit/>
-          </a:bodyPr>
-          <a:lstStyle/>
-          <a:p>
-            <a:pPr>
-              <a:defRPr sz="2800" b="1">
-                <a:solidFill>
-                  <a:srgbClr val="FFFFFF"/>
-                </a:solidFill>
-                <a:latin typeface="Arial"/>
-              </a:defRPr>
-            </a:pPr>
-            <a:r>
-              <a:t>Business Model: High Margin, Low CAC, Self-Funding Value</a:t>
-            </a:r>
-          </a:p>
-          <a:p>
-            <a:pPr>
-              <a:defRPr sz="1400">
-                <a:solidFill>
-                  <a:srgbClr val="94A3B8"/>
-                </a:solidFill>
-                <a:latin typeface="Arial"/>
-              </a:defRPr>
-            </a:pPr>
-            <a:r>
-              <a:t>Transparent pricing for SMEs with highly profitable B2B2C accounting distribution.</a:t>
-            </a:r>
-          </a:p>
-        </p:txBody>
-      </p:sp>
-      <p:sp>
-        <p:nvSpPr>
-          <p:cNvPr id="5" name="Rounded Rectangle 4"/>
+          <p:cNvPr id="3" name="Rounded Rectangle 2"/>
           <p:cNvSpPr/>
           <p:nvPr/>
         </p:nvSpPr>
         <p:spPr>
           <a:xfrm>
-            <a:off x="731520" y="2011680"/>
-            <a:ext cx="3383280" cy="4114800"/>
+            <a:off x="731520" y="347472"/>
+            <a:ext cx="3108960" cy="256032"/>
           </a:xfrm>
           <a:prstGeom prst="roundRect">
             <a:avLst/>
           </a:prstGeom>
           <a:solidFill>
-            <a:srgbClr val="111827"/>
+            <a:srgbClr val="0F172A"/>
           </a:solidFill>
-          <a:ln w="19050">
+          <a:ln w="12700">
             <a:solidFill>
-              <a:srgbClr val="2563EB"/>
+              <a:srgbClr val="38BDF8"/>
             </a:solidFill>
           </a:ln>
         </p:spPr>
@@ -5729,23 +6970,33 @@
           </a:fontRef>
         </p:style>
         <p:txBody>
-          <a:bodyPr rtlCol="0" anchor="ctr"/>
-          <a:lstStyle/>
-          <a:p>
-            <a:pPr algn="ctr"/>
-          </a:p>
-        </p:txBody>
-      </p:sp>
-      <p:sp>
-        <p:nvSpPr>
-          <p:cNvPr id="6" name="TextBox 5"/>
+          <a:bodyPr rtlCol="0" anchor="ctr" wrap="none" tIns="18288"/>
+          <a:lstStyle/>
+          <a:p>
+            <a:pPr algn="ctr">
+              <a:defRPr sz="850" b="1">
+                <a:solidFill>
+                  <a:srgbClr val="38BDF8"/>
+                </a:solidFill>
+                <a:latin typeface="Consolas"/>
+              </a:defRPr>
+            </a:pPr>
+            <a:r>
+              <a:t>●  COMMERCIAL STRATEGY &amp; DISTRIBUTION</a:t>
+            </a:r>
+          </a:p>
+        </p:txBody>
+      </p:sp>
+      <p:sp>
+        <p:nvSpPr>
+          <p:cNvPr id="4" name="TextBox 3"/>
           <p:cNvSpPr txBox="1"/>
           <p:nvPr/>
         </p:nvSpPr>
         <p:spPr>
           <a:xfrm>
-            <a:off x="914400" y="2148840"/>
-            <a:ext cx="3017520" cy="411480"/>
+            <a:off x="731520" y="658368"/>
+            <a:ext cx="10698480" cy="1051560"/>
           </a:xfrm>
           <a:prstGeom prst="rect">
             <a:avLst/>
@@ -5753,143 +7004,61 @@
           <a:noFill/>
         </p:spPr>
         <p:txBody>
-          <a:bodyPr wrap="none">
+          <a:bodyPr wrap="square" lIns="0" tIns="0" rIns="0" bIns="0">
             <a:spAutoFit/>
           </a:bodyPr>
           <a:lstStyle/>
           <a:p>
             <a:pPr>
-              <a:defRPr sz="1100" b="1">
-                <a:solidFill>
-                  <a:srgbClr val="38BDF8"/>
-                </a:solidFill>
-                <a:latin typeface="Arial"/>
-              </a:defRPr>
-            </a:pPr>
-            <a:r>
-              <a:t>THE PRICING MODEL</a:t>
-            </a:r>
-          </a:p>
-        </p:txBody>
-      </p:sp>
-      <p:sp>
-        <p:nvSpPr>
-          <p:cNvPr id="7" name="TextBox 6"/>
-          <p:cNvSpPr txBox="1"/>
-          <p:nvPr/>
-        </p:nvSpPr>
-        <p:spPr>
-          <a:xfrm>
-            <a:off x="914400" y="2606040"/>
-            <a:ext cx="3017520" cy="3383280"/>
-          </a:xfrm>
-          <a:prstGeom prst="rect">
-            <a:avLst/>
-          </a:prstGeom>
-          <a:noFill/>
-        </p:spPr>
-        <p:txBody>
-          <a:bodyPr wrap="square">
-            <a:spAutoFit/>
-          </a:bodyPr>
-          <a:lstStyle/>
-          <a:p>
-            <a:pPr>
               <a:spcAft>
-                <a:spcPts val="1000"/>
+                <a:spcPts val="400"/>
               </a:spcAft>
-              <a:defRPr sz="1500" b="1">
+              <a:defRPr sz="2500" b="1">
                 <a:solidFill>
                   <a:srgbClr val="FFFFFF"/>
                 </a:solidFill>
-              </a:defRPr>
-            </a:pPr>
-            <a:r>
-              <a:t>Freemium + Success Fee</a:t>
-            </a:r>
-          </a:p>
-          <a:p>
-            <a:pPr>
-              <a:spcAft>
-                <a:spcPts val="500"/>
-              </a:spcAft>
+                <a:latin typeface="Segoe UI"/>
+              </a:defRPr>
+            </a:pPr>
+            <a:r>
+              <a:t>Business Model: B2B2C Accountant Flywheel &amp; Zero Direct CAC</a:t>
+            </a:r>
+          </a:p>
+          <a:p>
+            <a:pPr>
               <a:defRPr sz="1200">
                 <a:solidFill>
                   <a:srgbClr val="94A3B8"/>
                 </a:solidFill>
-              </a:defRPr>
-            </a:pPr>
-            <a:r>
-              <a:t>• Free Bankability Scan: Instant diagnostic to attract SMEs at zero cost.</a:t>
-            </a:r>
-          </a:p>
-          <a:p>
-            <a:pPr>
-              <a:spcAft>
-                <a:spcPts val="500"/>
-              </a:spcAft>
-              <a:defRPr sz="1200">
-                <a:solidFill>
-                  <a:srgbClr val="94A3B8"/>
-                </a:solidFill>
-              </a:defRPr>
-            </a:pPr>
-            <a:r>
-              <a:t>• Success Fee / Dossier Certification: 0.5% - 1.0% paid only upon loan funding.</a:t>
-            </a:r>
-          </a:p>
-          <a:p>
-            <a:pPr>
-              <a:spcAft>
-                <a:spcPts val="500"/>
-              </a:spcAft>
-              <a:defRPr sz="1200">
-                <a:solidFill>
-                  <a:srgbClr val="94A3B8"/>
-                </a:solidFill>
-              </a:defRPr>
-            </a:pPr>
-            <a:r>
-              <a:t>• Average transaction revenue: €3,500 - €7,500 per funded loan dossier.</a:t>
-            </a:r>
-          </a:p>
-          <a:p>
-            <a:pPr>
-              <a:spcAft>
-                <a:spcPts val="500"/>
-              </a:spcAft>
-              <a:defRPr sz="1200">
-                <a:solidFill>
-                  <a:srgbClr val="94A3B8"/>
-                </a:solidFill>
-              </a:defRPr>
-            </a:pPr>
-            <a:r>
-              <a:t>• Pure ROI for the SME: Unlocked interest discount pays for the service 3x over.</a:t>
-            </a:r>
-          </a:p>
-        </p:txBody>
-      </p:sp>
-      <p:sp>
-        <p:nvSpPr>
-          <p:cNvPr id="8" name="Rounded Rectangle 7"/>
+                <a:latin typeface="Segoe UI"/>
+              </a:defRPr>
+            </a:pPr>
+            <a:r>
+              <a:t>High margins, self-funding transaction economics, and distribution leveraged through 120,000 corporate accounting firms.</a:t>
+            </a:r>
+          </a:p>
+        </p:txBody>
+      </p:sp>
+      <p:sp>
+        <p:nvSpPr>
+          <p:cNvPr id="5" name="Rounded Rectangle 4"/>
           <p:cNvSpPr/>
           <p:nvPr/>
         </p:nvSpPr>
         <p:spPr>
           <a:xfrm>
-            <a:off x="4389120" y="2011680"/>
-            <a:ext cx="3383280" cy="4114800"/>
+            <a:off x="731520" y="1828800"/>
+            <a:ext cx="3383280" cy="4389120"/>
           </a:xfrm>
           <a:prstGeom prst="roundRect">
             <a:avLst/>
           </a:prstGeom>
           <a:solidFill>
-            <a:srgbClr val="111827"/>
+            <a:srgbClr val="0D1320"/>
           </a:solidFill>
-          <a:ln w="19050">
+          <a:ln w="15240">
             <a:solidFill>
-              <a:srgbClr val="2563EB"/>
+              <a:srgbClr val="1E293B"/>
             </a:solidFill>
           </a:ln>
         </p:spPr>
@@ -5917,158 +7086,24 @@
       </p:sp>
       <p:sp>
         <p:nvSpPr>
-          <p:cNvPr id="9" name="TextBox 8"/>
-          <p:cNvSpPr txBox="1"/>
-          <p:nvPr/>
-        </p:nvSpPr>
-        <p:spPr>
-          <a:xfrm>
-            <a:off x="4572000" y="2148840"/>
-            <a:ext cx="3017520" cy="411480"/>
+          <p:cNvPr id="6" name="Rectangle 5"/>
+          <p:cNvSpPr/>
+          <p:nvPr/>
+        </p:nvSpPr>
+        <p:spPr>
+          <a:xfrm>
+            <a:off x="804672" y="1847088"/>
+            <a:ext cx="3236976" cy="32004"/>
           </a:xfrm>
           <a:prstGeom prst="rect">
             <a:avLst/>
           </a:prstGeom>
-          <a:noFill/>
-        </p:spPr>
-        <p:txBody>
-          <a:bodyPr wrap="none">
-            <a:spAutoFit/>
-          </a:bodyPr>
-          <a:lstStyle/>
-          <a:p>
-            <a:pPr>
-              <a:defRPr sz="1100" b="1">
-                <a:solidFill>
-                  <a:srgbClr val="38BDF8"/>
-                </a:solidFill>
-                <a:latin typeface="Arial"/>
-              </a:defRPr>
-            </a:pPr>
-            <a:r>
-              <a:t>THE SCALABLE CHANNEL</a:t>
-            </a:r>
-          </a:p>
-        </p:txBody>
-      </p:sp>
-      <p:sp>
-        <p:nvSpPr>
-          <p:cNvPr id="10" name="TextBox 9"/>
-          <p:cNvSpPr txBox="1"/>
-          <p:nvPr/>
-        </p:nvSpPr>
-        <p:spPr>
-          <a:xfrm>
-            <a:off x="4572000" y="2606040"/>
-            <a:ext cx="3017520" cy="3383280"/>
-          </a:xfrm>
-          <a:prstGeom prst="rect">
-            <a:avLst/>
-          </a:prstGeom>
-          <a:noFill/>
-        </p:spPr>
-        <p:txBody>
-          <a:bodyPr wrap="square">
-            <a:spAutoFit/>
-          </a:bodyPr>
-          <a:lstStyle/>
-          <a:p>
-            <a:pPr>
-              <a:spcAft>
-                <a:spcPts val="1000"/>
-              </a:spcAft>
-              <a:defRPr sz="1500" b="1">
-                <a:solidFill>
-                  <a:srgbClr val="FFFFFF"/>
-                </a:solidFill>
-              </a:defRPr>
-            </a:pPr>
-            <a:r>
-              <a:t>B2B2C Accountant Flywheel</a:t>
-            </a:r>
-          </a:p>
-          <a:p>
-            <a:pPr>
-              <a:spcAft>
-                <a:spcPts val="500"/>
-              </a:spcAft>
-              <a:defRPr sz="1200">
-                <a:solidFill>
-                  <a:srgbClr val="94A3B8"/>
-                </a:solidFill>
-              </a:defRPr>
-            </a:pPr>
-            <a:r>
-              <a:t>• 120,000 corporate accounting firms in Italy manage SME financing.</a:t>
-            </a:r>
-          </a:p>
-          <a:p>
-            <a:pPr>
-              <a:spcAft>
-                <a:spcPts val="500"/>
-              </a:spcAft>
-              <a:defRPr sz="1200">
-                <a:solidFill>
-                  <a:srgbClr val="94A3B8"/>
-                </a:solidFill>
-              </a:defRPr>
-            </a:pPr>
-            <a:r>
-              <a:t>• FinSight provides a white-label 'Credit Readiness Portal' to accountants.</a:t>
-            </a:r>
-          </a:p>
-          <a:p>
-            <a:pPr>
-              <a:spcAft>
-                <a:spcPts val="500"/>
-              </a:spcAft>
-              <a:defRPr sz="1200">
-                <a:solidFill>
-                  <a:srgbClr val="94A3B8"/>
-                </a:solidFill>
-              </a:defRPr>
-            </a:pPr>
-            <a:r>
-              <a:t>• 1 accounting partner = 25+ SME loan dossiers annually.</a:t>
-            </a:r>
-          </a:p>
-          <a:p>
-            <a:pPr>
-              <a:spcAft>
-                <a:spcPts val="500"/>
-              </a:spcAft>
-              <a:defRPr sz="1200">
-                <a:solidFill>
-                  <a:srgbClr val="94A3B8"/>
-                </a:solidFill>
-              </a:defRPr>
-            </a:pPr>
-            <a:r>
-              <a:t>• Slashes customer acquisition cost (CAC) to under €250 per company.</a:t>
-            </a:r>
-          </a:p>
-        </p:txBody>
-      </p:sp>
-      <p:sp>
-        <p:nvSpPr>
-          <p:cNvPr id="11" name="Rounded Rectangle 10"/>
-          <p:cNvSpPr/>
-          <p:nvPr/>
-        </p:nvSpPr>
-        <p:spPr>
-          <a:xfrm>
-            <a:off x="8046720" y="2011680"/>
-            <a:ext cx="3383280" cy="4114800"/>
-          </a:xfrm>
-          <a:prstGeom prst="roundRect">
-            <a:avLst/>
-          </a:prstGeom>
           <a:solidFill>
-            <a:srgbClr val="111827"/>
+            <a:srgbClr val="38BDF8"/>
           </a:solidFill>
-          <a:ln w="19050">
+          <a:ln>
             <a:solidFill>
-              <a:srgbClr val="2563EB"/>
+              <a:srgbClr val="38BDF8"/>
             </a:solidFill>
           </a:ln>
         </p:spPr>
@@ -6096,14 +7131,14 @@
       </p:sp>
       <p:sp>
         <p:nvSpPr>
-          <p:cNvPr id="12" name="TextBox 11"/>
+          <p:cNvPr id="7" name="TextBox 6"/>
           <p:cNvSpPr txBox="1"/>
           <p:nvPr/>
         </p:nvSpPr>
         <p:spPr>
           <a:xfrm>
-            <a:off x="8229600" y="2148840"/>
-            <a:ext cx="3017520" cy="411480"/>
+            <a:off x="960120" y="1965960"/>
+            <a:ext cx="2926080" cy="4114800"/>
           </a:xfrm>
           <a:prstGeom prst="rect">
             <a:avLst/>
@@ -6111,59 +7146,50 @@
           <a:noFill/>
         </p:spPr>
         <p:txBody>
-          <a:bodyPr wrap="none">
+          <a:bodyPr wrap="square" lIns="0" tIns="0">
             <a:spAutoFit/>
           </a:bodyPr>
           <a:lstStyle/>
           <a:p>
             <a:pPr>
-              <a:defRPr sz="1100" b="1">
+              <a:defRPr sz="850" b="1">
                 <a:solidFill>
                   <a:srgbClr val="38BDF8"/>
                 </a:solidFill>
-                <a:latin typeface="Arial"/>
-              </a:defRPr>
-            </a:pPr>
-            <a:r>
-              <a:t>UNIT ECONOMICS</a:t>
-            </a:r>
-          </a:p>
-        </p:txBody>
-      </p:sp>
-      <p:sp>
-        <p:nvSpPr>
-          <p:cNvPr id="13" name="TextBox 12"/>
-          <p:cNvSpPr txBox="1"/>
-          <p:nvPr/>
-        </p:nvSpPr>
-        <p:spPr>
-          <a:xfrm>
-            <a:off x="8229600" y="2606040"/>
-            <a:ext cx="3017520" cy="3383280"/>
-          </a:xfrm>
-          <a:prstGeom prst="rect">
-            <a:avLst/>
-          </a:prstGeom>
-          <a:noFill/>
-        </p:spPr>
-        <p:txBody>
-          <a:bodyPr wrap="square">
-            <a:spAutoFit/>
-          </a:bodyPr>
-          <a:lstStyle/>
+                <a:latin typeface="Consolas"/>
+              </a:defRPr>
+            </a:pPr>
+            <a:r>
+              <a:t>TRANSACTION PRICING</a:t>
+            </a:r>
+          </a:p>
+          <a:p>
+            <a:pPr>
+              <a:defRPr sz="1700" b="1">
+                <a:solidFill>
+                  <a:srgbClr val="FFFFFF"/>
+                </a:solidFill>
+                <a:latin typeface="Segoe UI"/>
+              </a:defRPr>
+            </a:pPr>
+            <a:r>
+              <a:t>Freemium + Success Fee</a:t>
+            </a:r>
+          </a:p>
           <a:p>
             <a:pPr>
               <a:spcAft>
                 <a:spcPts val="1000"/>
               </a:spcAft>
-              <a:defRPr sz="1500" b="1">
-                <a:solidFill>
-                  <a:srgbClr val="FFFFFF"/>
-                </a:solidFill>
-              </a:defRPr>
-            </a:pPr>
-            <a:r>
-              <a:t>Proven Capital Efficiency</a:t>
+              <a:defRPr sz="2800" b="1">
+                <a:solidFill>
+                  <a:srgbClr val="38BDF8"/>
+                </a:solidFill>
+                <a:latin typeface="Consolas"/>
+              </a:defRPr>
+            </a:pPr>
+            <a:r>
+              <a:t>€3,500 - €7,500</a:t>
             </a:r>
           </a:p>
           <a:p>
@@ -6171,14 +7197,15 @@
               <a:spcAft>
                 <a:spcPts val="500"/>
               </a:spcAft>
-              <a:defRPr sz="1200">
+              <a:defRPr sz="1050">
                 <a:solidFill>
                   <a:srgbClr val="94A3B8"/>
                 </a:solidFill>
-              </a:defRPr>
-            </a:pPr>
-            <a:r>
-              <a:t>• Target Deal Size: €500,000 - €1,500,000</a:t>
+                <a:latin typeface="Segoe UI"/>
+              </a:defRPr>
+            </a:pPr>
+            <a:r>
+              <a:t>• Free Bankability Scan: Instant diagnostic to onboard SMEs at zero acquisition cost.</a:t>
             </a:r>
           </a:p>
           <a:p>
@@ -6186,14 +7213,15 @@
               <a:spcAft>
                 <a:spcPts val="500"/>
               </a:spcAft>
-              <a:defRPr sz="1200">
+              <a:defRPr sz="1050">
                 <a:solidFill>
                   <a:srgbClr val="94A3B8"/>
                 </a:solidFill>
-              </a:defRPr>
-            </a:pPr>
-            <a:r>
-              <a:t>• Average Revenue per Deal: €5,000</a:t>
+                <a:latin typeface="Segoe UI"/>
+              </a:defRPr>
+            </a:pPr>
+            <a:r>
+              <a:t>• Success Fee upon Loan Drawdown: 0.5% - 1.0% paid only when funds hit the SME's account.</a:t>
             </a:r>
           </a:p>
           <a:p>
@@ -6201,14 +7229,15 @@
               <a:spcAft>
                 <a:spcPts val="500"/>
               </a:spcAft>
-              <a:defRPr sz="1200">
+              <a:defRPr sz="1050">
                 <a:solidFill>
                   <a:srgbClr val="94A3B8"/>
                 </a:solidFill>
-              </a:defRPr>
-            </a:pPr>
-            <a:r>
-              <a:t>• Customer Acquisition Cost (CAC): €250</a:t>
+                <a:latin typeface="Segoe UI"/>
+              </a:defRPr>
+            </a:pPr>
+            <a:r>
+              <a:t>• Average deal revenue: €5,000.</a:t>
             </a:r>
           </a:p>
           <a:p>
@@ -6216,14 +7245,170 @@
               <a:spcAft>
                 <a:spcPts val="500"/>
               </a:spcAft>
-              <a:defRPr sz="1200">
+              <a:defRPr sz="1050">
                 <a:solidFill>
                   <a:srgbClr val="94A3B8"/>
                 </a:solidFill>
-              </a:defRPr>
-            </a:pPr>
-            <a:r>
-              <a:t>• LTV / CAC Ratio: 20x+</a:t>
+                <a:latin typeface="Segoe UI"/>
+              </a:defRPr>
+            </a:pPr>
+            <a:r>
+              <a:t>• Pure ROI for the SME: Unlocked -45 bps rate discount pays for FinSight 3x over.</a:t>
+            </a:r>
+          </a:p>
+        </p:txBody>
+      </p:sp>
+      <p:sp>
+        <p:nvSpPr>
+          <p:cNvPr id="8" name="Rounded Rectangle 7"/>
+          <p:cNvSpPr/>
+          <p:nvPr/>
+        </p:nvSpPr>
+        <p:spPr>
+          <a:xfrm>
+            <a:off x="4389120" y="1828800"/>
+            <a:ext cx="3383280" cy="4389120"/>
+          </a:xfrm>
+          <a:prstGeom prst="roundRect">
+            <a:avLst/>
+          </a:prstGeom>
+          <a:solidFill>
+            <a:srgbClr val="0D1320"/>
+          </a:solidFill>
+          <a:ln w="15240">
+            <a:solidFill>
+              <a:srgbClr val="1E293B"/>
+            </a:solidFill>
+          </a:ln>
+        </p:spPr>
+        <p:style>
+          <a:lnRef idx="1">
+            <a:schemeClr val="accent1"/>
+          </a:lnRef>
+          <a:fillRef idx="3">
+            <a:schemeClr val="accent1"/>
+          </a:fillRef>
+          <a:effectRef idx="2">
+            <a:schemeClr val="accent1"/>
+          </a:effectRef>
+          <a:fontRef idx="minor">
+            <a:schemeClr val="lt1"/>
+          </a:fontRef>
+        </p:style>
+        <p:txBody>
+          <a:bodyPr rtlCol="0" anchor="ctr"/>
+          <a:lstStyle/>
+          <a:p>
+            <a:pPr algn="ctr"/>
+          </a:p>
+        </p:txBody>
+      </p:sp>
+      <p:sp>
+        <p:nvSpPr>
+          <p:cNvPr id="9" name="Rectangle 8"/>
+          <p:cNvSpPr/>
+          <p:nvPr/>
+        </p:nvSpPr>
+        <p:spPr>
+          <a:xfrm>
+            <a:off x="4462272" y="1847088"/>
+            <a:ext cx="3236976" cy="32004"/>
+          </a:xfrm>
+          <a:prstGeom prst="rect">
+            <a:avLst/>
+          </a:prstGeom>
+          <a:solidFill>
+            <a:srgbClr val="10B981"/>
+          </a:solidFill>
+          <a:ln>
+            <a:solidFill>
+              <a:srgbClr val="10B981"/>
+            </a:solidFill>
+          </a:ln>
+        </p:spPr>
+        <p:style>
+          <a:lnRef idx="1">
+            <a:schemeClr val="accent1"/>
+          </a:lnRef>
+          <a:fillRef idx="3">
+            <a:schemeClr val="accent1"/>
+          </a:fillRef>
+          <a:effectRef idx="2">
+            <a:schemeClr val="accent1"/>
+          </a:effectRef>
+          <a:fontRef idx="minor">
+            <a:schemeClr val="lt1"/>
+          </a:fontRef>
+        </p:style>
+        <p:txBody>
+          <a:bodyPr rtlCol="0" anchor="ctr"/>
+          <a:lstStyle/>
+          <a:p>
+            <a:pPr algn="ctr"/>
+          </a:p>
+        </p:txBody>
+      </p:sp>
+      <p:sp>
+        <p:nvSpPr>
+          <p:cNvPr id="10" name="TextBox 9"/>
+          <p:cNvSpPr txBox="1"/>
+          <p:nvPr/>
+        </p:nvSpPr>
+        <p:spPr>
+          <a:xfrm>
+            <a:off x="4617720" y="1965960"/>
+            <a:ext cx="2926080" cy="4114800"/>
+          </a:xfrm>
+          <a:prstGeom prst="rect">
+            <a:avLst/>
+          </a:prstGeom>
+          <a:noFill/>
+        </p:spPr>
+        <p:txBody>
+          <a:bodyPr wrap="square" lIns="0" tIns="0">
+            <a:spAutoFit/>
+          </a:bodyPr>
+          <a:lstStyle/>
+          <a:p>
+            <a:pPr>
+              <a:defRPr sz="850" b="1">
+                <a:solidFill>
+                  <a:srgbClr val="10B981"/>
+                </a:solidFill>
+                <a:latin typeface="Consolas"/>
+              </a:defRPr>
+            </a:pPr>
+            <a:r>
+              <a:t>DISTRIBUTION CHANNEL</a:t>
+            </a:r>
+          </a:p>
+          <a:p>
+            <a:pPr>
+              <a:defRPr sz="1700" b="1">
+                <a:solidFill>
+                  <a:srgbClr val="FFFFFF"/>
+                </a:solidFill>
+                <a:latin typeface="Segoe UI"/>
+              </a:defRPr>
+            </a:pPr>
+            <a:r>
+              <a:t>B2B2C Accountant Flywheel</a:t>
+            </a:r>
+          </a:p>
+          <a:p>
+            <a:pPr>
+              <a:spcAft>
+                <a:spcPts val="1000"/>
+              </a:spcAft>
+              <a:defRPr sz="2800" b="1">
+                <a:solidFill>
+                  <a:srgbClr val="10B981"/>
+                </a:solidFill>
+                <a:latin typeface="Consolas"/>
+              </a:defRPr>
+            </a:pPr>
+            <a:r>
+              <a:t>120,000 Firms</a:t>
             </a:r>
           </a:p>
           <a:p>
@@ -6231,14 +7416,366 @@
               <a:spcAft>
                 <a:spcPts val="500"/>
               </a:spcAft>
-              <a:defRPr sz="1200">
+              <a:defRPr sz="1050">
                 <a:solidFill>
                   <a:srgbClr val="94A3B8"/>
                 </a:solidFill>
-              </a:defRPr>
-            </a:pPr>
-            <a:r>
-              <a:t>• Cash-generative from pilot phase without heavy working capital requirements.</a:t>
+                <a:latin typeface="Segoe UI"/>
+              </a:defRPr>
+            </a:pPr>
+            <a:r>
+              <a:t>• Italy has 120,000 corporate accounting firms (Commercialisti) advising SMEs.</a:t>
+            </a:r>
+          </a:p>
+          <a:p>
+            <a:pPr>
+              <a:spcAft>
+                <a:spcPts val="500"/>
+              </a:spcAft>
+              <a:defRPr sz="1050">
+                <a:solidFill>
+                  <a:srgbClr val="94A3B8"/>
+                </a:solidFill>
+                <a:latin typeface="Segoe UI"/>
+              </a:defRPr>
+            </a:pPr>
+            <a:r>
+              <a:t>• Accountants manage SME credit applications but lack algorithmic underwriting tools.</a:t>
+            </a:r>
+          </a:p>
+          <a:p>
+            <a:pPr>
+              <a:spcAft>
+                <a:spcPts val="500"/>
+              </a:spcAft>
+              <a:defRPr sz="1050">
+                <a:solidFill>
+                  <a:srgbClr val="94A3B8"/>
+                </a:solidFill>
+                <a:latin typeface="Segoe UI"/>
+              </a:defRPr>
+            </a:pPr>
+            <a:r>
+              <a:t>• FinSight provides a white-label 'Credit Readiness Console'.</a:t>
+            </a:r>
+          </a:p>
+          <a:p>
+            <a:pPr>
+              <a:spcAft>
+                <a:spcPts val="500"/>
+              </a:spcAft>
+              <a:defRPr sz="1050">
+                <a:solidFill>
+                  <a:srgbClr val="94A3B8"/>
+                </a:solidFill>
+                <a:latin typeface="Segoe UI"/>
+              </a:defRPr>
+            </a:pPr>
+            <a:r>
+              <a:t>• 1 Accounting Partner = 25+ SME loan dossiers annually.</a:t>
+            </a:r>
+          </a:p>
+          <a:p>
+            <a:pPr>
+              <a:spcAft>
+                <a:spcPts val="500"/>
+              </a:spcAft>
+              <a:defRPr sz="1050">
+                <a:solidFill>
+                  <a:srgbClr val="94A3B8"/>
+                </a:solidFill>
+                <a:latin typeface="Segoe UI"/>
+              </a:defRPr>
+            </a:pPr>
+            <a:r>
+              <a:t>• Slashes blended CAC to &lt; €250.</a:t>
+            </a:r>
+          </a:p>
+        </p:txBody>
+      </p:sp>
+      <p:sp>
+        <p:nvSpPr>
+          <p:cNvPr id="11" name="Rounded Rectangle 10"/>
+          <p:cNvSpPr/>
+          <p:nvPr/>
+        </p:nvSpPr>
+        <p:spPr>
+          <a:xfrm>
+            <a:off x="8046720" y="1828800"/>
+            <a:ext cx="3383280" cy="4389120"/>
+          </a:xfrm>
+          <a:prstGeom prst="roundRect">
+            <a:avLst/>
+          </a:prstGeom>
+          <a:solidFill>
+            <a:srgbClr val="0D1320"/>
+          </a:solidFill>
+          <a:ln w="15240">
+            <a:solidFill>
+              <a:srgbClr val="1E293B"/>
+            </a:solidFill>
+          </a:ln>
+        </p:spPr>
+        <p:style>
+          <a:lnRef idx="1">
+            <a:schemeClr val="accent1"/>
+          </a:lnRef>
+          <a:fillRef idx="3">
+            <a:schemeClr val="accent1"/>
+          </a:fillRef>
+          <a:effectRef idx="2">
+            <a:schemeClr val="accent1"/>
+          </a:effectRef>
+          <a:fontRef idx="minor">
+            <a:schemeClr val="lt1"/>
+          </a:fontRef>
+        </p:style>
+        <p:txBody>
+          <a:bodyPr rtlCol="0" anchor="ctr"/>
+          <a:lstStyle/>
+          <a:p>
+            <a:pPr algn="ctr"/>
+          </a:p>
+        </p:txBody>
+      </p:sp>
+      <p:sp>
+        <p:nvSpPr>
+          <p:cNvPr id="12" name="Rectangle 11"/>
+          <p:cNvSpPr/>
+          <p:nvPr/>
+        </p:nvSpPr>
+        <p:spPr>
+          <a:xfrm>
+            <a:off x="8119872" y="1847088"/>
+            <a:ext cx="3236976" cy="32004"/>
+          </a:xfrm>
+          <a:prstGeom prst="rect">
+            <a:avLst/>
+          </a:prstGeom>
+          <a:solidFill>
+            <a:srgbClr val="A855F7"/>
+          </a:solidFill>
+          <a:ln>
+            <a:solidFill>
+              <a:srgbClr val="A855F7"/>
+            </a:solidFill>
+          </a:ln>
+        </p:spPr>
+        <p:style>
+          <a:lnRef idx="1">
+            <a:schemeClr val="accent1"/>
+          </a:lnRef>
+          <a:fillRef idx="3">
+            <a:schemeClr val="accent1"/>
+          </a:fillRef>
+          <a:effectRef idx="2">
+            <a:schemeClr val="accent1"/>
+          </a:effectRef>
+          <a:fontRef idx="minor">
+            <a:schemeClr val="lt1"/>
+          </a:fontRef>
+        </p:style>
+        <p:txBody>
+          <a:bodyPr rtlCol="0" anchor="ctr"/>
+          <a:lstStyle/>
+          <a:p>
+            <a:pPr algn="ctr"/>
+          </a:p>
+        </p:txBody>
+      </p:sp>
+      <p:sp>
+        <p:nvSpPr>
+          <p:cNvPr id="13" name="TextBox 12"/>
+          <p:cNvSpPr txBox="1"/>
+          <p:nvPr/>
+        </p:nvSpPr>
+        <p:spPr>
+          <a:xfrm>
+            <a:off x="8275320" y="1965960"/>
+            <a:ext cx="2926080" cy="4114800"/>
+          </a:xfrm>
+          <a:prstGeom prst="rect">
+            <a:avLst/>
+          </a:prstGeom>
+          <a:noFill/>
+        </p:spPr>
+        <p:txBody>
+          <a:bodyPr wrap="square" lIns="0" tIns="0">
+            <a:spAutoFit/>
+          </a:bodyPr>
+          <a:lstStyle/>
+          <a:p>
+            <a:pPr>
+              <a:defRPr sz="850" b="1">
+                <a:solidFill>
+                  <a:srgbClr val="A855F7"/>
+                </a:solidFill>
+                <a:latin typeface="Consolas"/>
+              </a:defRPr>
+            </a:pPr>
+            <a:r>
+              <a:t>UNIT ECONOMICS</a:t>
+            </a:r>
+          </a:p>
+          <a:p>
+            <a:pPr>
+              <a:defRPr sz="1700" b="1">
+                <a:solidFill>
+                  <a:srgbClr val="FFFFFF"/>
+                </a:solidFill>
+                <a:latin typeface="Segoe UI"/>
+              </a:defRPr>
+            </a:pPr>
+            <a:r>
+              <a:t>Capital Efficient Scale</a:t>
+            </a:r>
+          </a:p>
+          <a:p>
+            <a:pPr>
+              <a:spcAft>
+                <a:spcPts val="1000"/>
+              </a:spcAft>
+              <a:defRPr sz="2800" b="1">
+                <a:solidFill>
+                  <a:srgbClr val="A855F7"/>
+                </a:solidFill>
+                <a:latin typeface="Consolas"/>
+              </a:defRPr>
+            </a:pPr>
+            <a:r>
+              <a:t>20x+ LTV / CAC</a:t>
+            </a:r>
+          </a:p>
+          <a:p>
+            <a:pPr>
+              <a:spcAft>
+                <a:spcPts val="500"/>
+              </a:spcAft>
+              <a:defRPr sz="1050">
+                <a:solidFill>
+                  <a:srgbClr val="94A3B8"/>
+                </a:solidFill>
+                <a:latin typeface="Segoe UI"/>
+              </a:defRPr>
+            </a:pPr>
+            <a:r>
+              <a:t>• Target Facility Size: €500k - €1.5M</a:t>
+            </a:r>
+          </a:p>
+          <a:p>
+            <a:pPr>
+              <a:spcAft>
+                <a:spcPts val="500"/>
+              </a:spcAft>
+              <a:defRPr sz="1050">
+                <a:solidFill>
+                  <a:srgbClr val="94A3B8"/>
+                </a:solidFill>
+                <a:latin typeface="Segoe UI"/>
+              </a:defRPr>
+            </a:pPr>
+            <a:r>
+              <a:t>• Average Net Revenue per Deal: €5,000</a:t>
+            </a:r>
+          </a:p>
+          <a:p>
+            <a:pPr>
+              <a:spcAft>
+                <a:spcPts val="500"/>
+              </a:spcAft>
+              <a:defRPr sz="1050">
+                <a:solidFill>
+                  <a:srgbClr val="94A3B8"/>
+                </a:solidFill>
+                <a:latin typeface="Segoe UI"/>
+              </a:defRPr>
+            </a:pPr>
+            <a:r>
+              <a:t>• Customer Acquisition Cost (CAC): €250</a:t>
+            </a:r>
+          </a:p>
+          <a:p>
+            <a:pPr>
+              <a:spcAft>
+                <a:spcPts val="500"/>
+              </a:spcAft>
+              <a:defRPr sz="1050">
+                <a:solidFill>
+                  <a:srgbClr val="94A3B8"/>
+                </a:solidFill>
+                <a:latin typeface="Segoe UI"/>
+              </a:defRPr>
+            </a:pPr>
+            <a:r>
+              <a:t>• LTV / CAC Ratio: &gt; 20x</a:t>
+            </a:r>
+          </a:p>
+          <a:p>
+            <a:pPr>
+              <a:spcAft>
+                <a:spcPts val="500"/>
+              </a:spcAft>
+              <a:defRPr sz="1050">
+                <a:solidFill>
+                  <a:srgbClr val="94A3B8"/>
+                </a:solidFill>
+                <a:latin typeface="Segoe UI"/>
+              </a:defRPr>
+            </a:pPr>
+            <a:r>
+              <a:t>• Gross Margin: 92% (pure software &amp; compute)</a:t>
+            </a:r>
+          </a:p>
+          <a:p>
+            <a:pPr>
+              <a:spcAft>
+                <a:spcPts val="500"/>
+              </a:spcAft>
+              <a:defRPr sz="1050">
+                <a:solidFill>
+                  <a:srgbClr val="94A3B8"/>
+                </a:solidFill>
+                <a:latin typeface="Segoe UI"/>
+              </a:defRPr>
+            </a:pPr>
+            <a:r>
+              <a:t>• Highly cash-flow generative from pilot cohort with zero working capital lockup.</a:t>
+            </a:r>
+          </a:p>
+        </p:txBody>
+      </p:sp>
+      <p:sp>
+        <p:nvSpPr>
+          <p:cNvPr id="14" name="TextBox 13"/>
+          <p:cNvSpPr txBox="1"/>
+          <p:nvPr/>
+        </p:nvSpPr>
+        <p:spPr>
+          <a:xfrm>
+            <a:off x="731520" y="6446520"/>
+            <a:ext cx="10698480" cy="320040"/>
+          </a:xfrm>
+          <a:prstGeom prst="rect">
+            <a:avLst/>
+          </a:prstGeom>
+          <a:noFill/>
+        </p:spPr>
+        <p:txBody>
+          <a:bodyPr wrap="none" lIns="0" tIns="0">
+            <a:spAutoFit/>
+          </a:bodyPr>
+          <a:lstStyle/>
+          <a:p>
+            <a:pPr>
+              <a:defRPr sz="850" b="1">
+                <a:solidFill>
+                  <a:srgbClr val="64748B"/>
+                </a:solidFill>
+                <a:latin typeface="Consolas"/>
+              </a:defRPr>
+            </a:pPr>
+            <a:r>
+              <a:t>DUCKDB 1.0 IN-MEMORY OLAP  |  APPLICATION ID: ECOTEX-2026-IT  |  EBA/GL/2020/06 COMPLIANT  |  TUB ART. 128-SEXIES SEAL</a:t>
             </a:r>
           </a:p>
         </p:txBody>
@@ -6276,11 +7813,11 @@
             <a:avLst/>
           </a:prstGeom>
           <a:solidFill>
-            <a:srgbClr val="0B0F19"/>
+            <a:srgbClr val="06090E"/>
           </a:solidFill>
           <a:ln>
             <a:solidFill>
-              <a:srgbClr val="0B0F19"/>
+              <a:srgbClr val="06090E"/>
             </a:solidFill>
           </a:ln>
         </p:spPr>
@@ -6308,109 +7845,24 @@
       </p:sp>
       <p:sp>
         <p:nvSpPr>
-          <p:cNvPr id="3" name="TextBox 2"/>
-          <p:cNvSpPr txBox="1"/>
-          <p:nvPr/>
-        </p:nvSpPr>
-        <p:spPr>
-          <a:xfrm>
-            <a:off x="731520" y="411480"/>
-            <a:ext cx="10698480" cy="320040"/>
-          </a:xfrm>
-          <a:prstGeom prst="rect">
-            <a:avLst/>
-          </a:prstGeom>
-          <a:noFill/>
-        </p:spPr>
-        <p:txBody>
-          <a:bodyPr wrap="none">
-            <a:spAutoFit/>
-          </a:bodyPr>
-          <a:lstStyle/>
-          <a:p>
-            <a:pPr>
-              <a:defRPr sz="1100" b="1">
-                <a:solidFill>
-                  <a:srgbClr val="38BDF8"/>
-                </a:solidFill>
-                <a:latin typeface="Arial"/>
-              </a:defRPr>
-            </a:pPr>
-            <a:r>
-              <a:t>IMPLEMENTATION ROADMAP</a:t>
-            </a:r>
-          </a:p>
-        </p:txBody>
-      </p:sp>
-      <p:sp>
-        <p:nvSpPr>
-          <p:cNvPr id="4" name="TextBox 3"/>
-          <p:cNvSpPr txBox="1"/>
-          <p:nvPr/>
-        </p:nvSpPr>
-        <p:spPr>
-          <a:xfrm>
-            <a:off x="731520" y="777240"/>
-            <a:ext cx="10698480" cy="914400"/>
-          </a:xfrm>
-          <a:prstGeom prst="rect">
-            <a:avLst/>
-          </a:prstGeom>
-          <a:noFill/>
-        </p:spPr>
-        <p:txBody>
-          <a:bodyPr wrap="square">
-            <a:spAutoFit/>
-          </a:bodyPr>
-          <a:lstStyle/>
-          <a:p>
-            <a:pPr>
-              <a:defRPr sz="2800" b="1">
-                <a:solidFill>
-                  <a:srgbClr val="FFFFFF"/>
-                </a:solidFill>
-                <a:latin typeface="Arial"/>
-              </a:defRPr>
-            </a:pPr>
-            <a:r>
-              <a:t>Execution Plan: From Pilot to Enterprise SME Gateway</a:t>
-            </a:r>
-          </a:p>
-          <a:p>
-            <a:pPr>
-              <a:defRPr sz="1400">
-                <a:solidFill>
-                  <a:srgbClr val="94A3B8"/>
-                </a:solidFill>
-                <a:latin typeface="Arial"/>
-              </a:defRPr>
-            </a:pPr>
-            <a:r>
-              <a:t>A focused 3-step operational rollout driving rapid regional traction.</a:t>
-            </a:r>
-          </a:p>
-        </p:txBody>
-      </p:sp>
-      <p:sp>
-        <p:nvSpPr>
-          <p:cNvPr id="5" name="Rounded Rectangle 4"/>
+          <p:cNvPr id="3" name="Rounded Rectangle 2"/>
           <p:cNvSpPr/>
           <p:nvPr/>
         </p:nvSpPr>
         <p:spPr>
           <a:xfrm>
-            <a:off x="731520" y="2011680"/>
-            <a:ext cx="3383280" cy="4114800"/>
+            <a:off x="731520" y="347472"/>
+            <a:ext cx="3108960" cy="256032"/>
           </a:xfrm>
           <a:prstGeom prst="roundRect">
             <a:avLst/>
           </a:prstGeom>
           <a:solidFill>
-            <a:srgbClr val="111827"/>
+            <a:srgbClr val="0F172A"/>
           </a:solidFill>
-          <a:ln w="19050">
+          <a:ln w="12700">
             <a:solidFill>
-              <a:srgbClr val="10B981"/>
+              <a:srgbClr val="38BDF8"/>
             </a:solidFill>
           </a:ln>
         </p:spPr>
@@ -6429,23 +7881,33 @@
           </a:fontRef>
         </p:style>
         <p:txBody>
-          <a:bodyPr rtlCol="0" anchor="ctr"/>
-          <a:lstStyle/>
-          <a:p>
-            <a:pPr algn="ctr"/>
-          </a:p>
-        </p:txBody>
-      </p:sp>
-      <p:sp>
-        <p:nvSpPr>
-          <p:cNvPr id="6" name="TextBox 5"/>
+          <a:bodyPr rtlCol="0" anchor="ctr" wrap="none" tIns="18288"/>
+          <a:lstStyle/>
+          <a:p>
+            <a:pPr algn="ctr">
+              <a:defRPr sz="850" b="1">
+                <a:solidFill>
+                  <a:srgbClr val="38BDF8"/>
+                </a:solidFill>
+                <a:latin typeface="Consolas"/>
+              </a:defRPr>
+            </a:pPr>
+            <a:r>
+              <a:t>●  IMPLEMENTATION ROADMAP</a:t>
+            </a:r>
+          </a:p>
+        </p:txBody>
+      </p:sp>
+      <p:sp>
+        <p:nvSpPr>
+          <p:cNvPr id="4" name="TextBox 3"/>
           <p:cNvSpPr txBox="1"/>
           <p:nvPr/>
         </p:nvSpPr>
         <p:spPr>
           <a:xfrm>
-            <a:off x="914400" y="2148840"/>
-            <a:ext cx="3017520" cy="411480"/>
+            <a:off x="731520" y="658368"/>
+            <a:ext cx="10698480" cy="1051560"/>
           </a:xfrm>
           <a:prstGeom prst="rect">
             <a:avLst/>
@@ -6453,143 +7915,61 @@
           <a:noFill/>
         </p:spPr>
         <p:txBody>
-          <a:bodyPr wrap="none">
+          <a:bodyPr wrap="square" lIns="0" tIns="0" rIns="0" bIns="0">
             <a:spAutoFit/>
           </a:bodyPr>
           <a:lstStyle/>
           <a:p>
             <a:pPr>
-              <a:defRPr sz="1100" b="1">
-                <a:solidFill>
-                  <a:srgbClr val="38BDF8"/>
-                </a:solidFill>
-                <a:latin typeface="Arial"/>
-              </a:defRPr>
-            </a:pPr>
-            <a:r>
-              <a:t>STEP 1 / 30-DAY PILOT</a:t>
-            </a:r>
-          </a:p>
-        </p:txBody>
-      </p:sp>
-      <p:sp>
-        <p:nvSpPr>
-          <p:cNvPr id="7" name="TextBox 6"/>
-          <p:cNvSpPr txBox="1"/>
-          <p:nvPr/>
-        </p:nvSpPr>
-        <p:spPr>
-          <a:xfrm>
-            <a:off x="914400" y="2606040"/>
-            <a:ext cx="3017520" cy="3383280"/>
-          </a:xfrm>
-          <a:prstGeom prst="rect">
-            <a:avLst/>
-          </a:prstGeom>
-          <a:noFill/>
-        </p:spPr>
-        <p:txBody>
-          <a:bodyPr wrap="square">
-            <a:spAutoFit/>
-          </a:bodyPr>
-          <a:lstStyle/>
-          <a:p>
-            <a:pPr>
               <a:spcAft>
-                <a:spcPts val="1000"/>
+                <a:spcPts val="400"/>
               </a:spcAft>
-              <a:defRPr sz="1500" b="1">
+              <a:defRPr sz="2500" b="1">
                 <a:solidFill>
                   <a:srgbClr val="FFFFFF"/>
                 </a:solidFill>
-              </a:defRPr>
-            </a:pPr>
-            <a:r>
-              <a:t>Regional Industry Rollout</a:t>
-            </a:r>
-          </a:p>
-          <a:p>
-            <a:pPr>
-              <a:spcAft>
-                <a:spcPts val="500"/>
-              </a:spcAft>
+                <a:latin typeface="Segoe UI"/>
+              </a:defRPr>
+            </a:pPr>
+            <a:r>
+              <a:t>Execution Plan: From Lombardia Pilot to Pan-European Gateway</a:t>
+            </a:r>
+          </a:p>
+          <a:p>
+            <a:pPr>
               <a:defRPr sz="1200">
                 <a:solidFill>
                   <a:srgbClr val="94A3B8"/>
                 </a:solidFill>
-              </a:defRPr>
-            </a:pPr>
-            <a:r>
-              <a:t>• Deploy with 5 pilot manufacturing accounting firms in Lombardia.</a:t>
-            </a:r>
-          </a:p>
-          <a:p>
-            <a:pPr>
-              <a:spcAft>
-                <a:spcPts val="500"/>
-              </a:spcAft>
-              <a:defRPr sz="1200">
-                <a:solidFill>
-                  <a:srgbClr val="94A3B8"/>
-                </a:solidFill>
-              </a:defRPr>
-            </a:pPr>
-            <a:r>
-              <a:t>• Benchmark 50 live SME equipment loan dossiers.</a:t>
-            </a:r>
-          </a:p>
-          <a:p>
-            <a:pPr>
-              <a:spcAft>
-                <a:spcPts val="500"/>
-              </a:spcAft>
-              <a:defRPr sz="1200">
-                <a:solidFill>
-                  <a:srgbClr val="94A3B8"/>
-                </a:solidFill>
-              </a:defRPr>
-            </a:pPr>
-            <a:r>
-              <a:t>• Validate €25M in requested facility volume with partner regional banks.</a:t>
-            </a:r>
-          </a:p>
-          <a:p>
-            <a:pPr>
-              <a:spcAft>
-                <a:spcPts val="500"/>
-              </a:spcAft>
-              <a:defRPr sz="1200">
-                <a:solidFill>
-                  <a:srgbClr val="94A3B8"/>
-                </a:solidFill>
-              </a:defRPr>
-            </a:pPr>
-            <a:r>
-              <a:t>• Metric: 100% dossier approval rate.</a:t>
-            </a:r>
-          </a:p>
-        </p:txBody>
-      </p:sp>
-      <p:sp>
-        <p:nvSpPr>
-          <p:cNvPr id="8" name="Rounded Rectangle 7"/>
+                <a:latin typeface="Segoe UI"/>
+              </a:defRPr>
+            </a:pPr>
+            <a:r>
+              <a:t>A focused 3-step operational rollout driving rapid volume and regulatory defensibility.</a:t>
+            </a:r>
+          </a:p>
+        </p:txBody>
+      </p:sp>
+      <p:sp>
+        <p:nvSpPr>
+          <p:cNvPr id="5" name="Rounded Rectangle 4"/>
           <p:cNvSpPr/>
           <p:nvPr/>
         </p:nvSpPr>
         <p:spPr>
           <a:xfrm>
-            <a:off x="4389120" y="2011680"/>
-            <a:ext cx="3383280" cy="4114800"/>
+            <a:off x="731520" y="1828800"/>
+            <a:ext cx="3383280" cy="4389120"/>
           </a:xfrm>
           <a:prstGeom prst="roundRect">
             <a:avLst/>
           </a:prstGeom>
           <a:solidFill>
-            <a:srgbClr val="111827"/>
+            <a:srgbClr val="0D1320"/>
           </a:solidFill>
-          <a:ln w="19050">
+          <a:ln w="15240">
             <a:solidFill>
-              <a:srgbClr val="1F2937"/>
+              <a:srgbClr val="1E293B"/>
             </a:solidFill>
           </a:ln>
         </p:spPr>
@@ -6617,158 +7997,24 @@
       </p:sp>
       <p:sp>
         <p:nvSpPr>
-          <p:cNvPr id="9" name="TextBox 8"/>
-          <p:cNvSpPr txBox="1"/>
-          <p:nvPr/>
-        </p:nvSpPr>
-        <p:spPr>
-          <a:xfrm>
-            <a:off x="4572000" y="2148840"/>
-            <a:ext cx="3017520" cy="411480"/>
+          <p:cNvPr id="6" name="Rectangle 5"/>
+          <p:cNvSpPr/>
+          <p:nvPr/>
+        </p:nvSpPr>
+        <p:spPr>
+          <a:xfrm>
+            <a:off x="804672" y="1847088"/>
+            <a:ext cx="3236976" cy="32004"/>
           </a:xfrm>
           <a:prstGeom prst="rect">
             <a:avLst/>
           </a:prstGeom>
-          <a:noFill/>
-        </p:spPr>
-        <p:txBody>
-          <a:bodyPr wrap="none">
-            <a:spAutoFit/>
-          </a:bodyPr>
-          <a:lstStyle/>
-          <a:p>
-            <a:pPr>
-              <a:defRPr sz="1100" b="1">
-                <a:solidFill>
-                  <a:srgbClr val="38BDF8"/>
-                </a:solidFill>
-                <a:latin typeface="Arial"/>
-              </a:defRPr>
-            </a:pPr>
-            <a:r>
-              <a:t>STEP 2 / 90-DAY SCALE</a:t>
-            </a:r>
-          </a:p>
-        </p:txBody>
-      </p:sp>
-      <p:sp>
-        <p:nvSpPr>
-          <p:cNvPr id="10" name="TextBox 9"/>
-          <p:cNvSpPr txBox="1"/>
-          <p:nvPr/>
-        </p:nvSpPr>
-        <p:spPr>
-          <a:xfrm>
-            <a:off x="4572000" y="2606040"/>
-            <a:ext cx="3017520" cy="3383280"/>
-          </a:xfrm>
-          <a:prstGeom prst="rect">
-            <a:avLst/>
-          </a:prstGeom>
-          <a:noFill/>
-        </p:spPr>
-        <p:txBody>
-          <a:bodyPr wrap="square">
-            <a:spAutoFit/>
-          </a:bodyPr>
-          <a:lstStyle/>
-          <a:p>
-            <a:pPr>
-              <a:spcAft>
-                <a:spcPts val="1000"/>
-              </a:spcAft>
-              <a:defRPr sz="1500" b="1">
-                <a:solidFill>
-                  <a:srgbClr val="FFFFFF"/>
-                </a:solidFill>
-              </a:defRPr>
-            </a:pPr>
-            <a:r>
-              <a:t>Multi-Lender Marketplace</a:t>
-            </a:r>
-          </a:p>
-          <a:p>
-            <a:pPr>
-              <a:spcAft>
-                <a:spcPts val="500"/>
-              </a:spcAft>
-              <a:defRPr sz="1200">
-                <a:solidFill>
-                  <a:srgbClr val="94A3B8"/>
-                </a:solidFill>
-              </a:defRPr>
-            </a:pPr>
-            <a:r>
-              <a:t>• Expand distribution via regional industrial associations (Confindustria).</a:t>
-            </a:r>
-          </a:p>
-          <a:p>
-            <a:pPr>
-              <a:spcAft>
-                <a:spcPts val="500"/>
-              </a:spcAft>
-              <a:defRPr sz="1200">
-                <a:solidFill>
-                  <a:srgbClr val="94A3B8"/>
-                </a:solidFill>
-              </a:defRPr>
-            </a:pPr>
-            <a:r>
-              <a:t>• Onboard 15 digital credit funds &amp; commercial banks to compete for deals.</a:t>
-            </a:r>
-          </a:p>
-          <a:p>
-            <a:pPr>
-              <a:spcAft>
-                <a:spcPts val="500"/>
-              </a:spcAft>
-              <a:defRPr sz="1200">
-                <a:solidFill>
-                  <a:srgbClr val="94A3B8"/>
-                </a:solidFill>
-              </a:defRPr>
-            </a:pPr>
-            <a:r>
-              <a:t>• Launch automated regional green grant matching module.</a:t>
-            </a:r>
-          </a:p>
-          <a:p>
-            <a:pPr>
-              <a:spcAft>
-                <a:spcPts val="500"/>
-              </a:spcAft>
-              <a:defRPr sz="1200">
-                <a:solidFill>
-                  <a:srgbClr val="94A3B8"/>
-                </a:solidFill>
-              </a:defRPr>
-            </a:pPr>
-            <a:r>
-              <a:t>• Target: €100M originated facility volume.</a:t>
-            </a:r>
-          </a:p>
-        </p:txBody>
-      </p:sp>
-      <p:sp>
-        <p:nvSpPr>
-          <p:cNvPr id="11" name="Rounded Rectangle 10"/>
-          <p:cNvSpPr/>
-          <p:nvPr/>
-        </p:nvSpPr>
-        <p:spPr>
-          <a:xfrm>
-            <a:off x="8046720" y="2011680"/>
-            <a:ext cx="3383280" cy="4114800"/>
-          </a:xfrm>
-          <a:prstGeom prst="roundRect">
-            <a:avLst/>
-          </a:prstGeom>
           <a:solidFill>
-            <a:srgbClr val="111827"/>
+            <a:srgbClr val="10B981"/>
           </a:solidFill>
-          <a:ln w="19050">
+          <a:ln>
             <a:solidFill>
-              <a:srgbClr val="1F2937"/>
+              <a:srgbClr val="10B981"/>
             </a:solidFill>
           </a:ln>
         </p:spPr>
@@ -6796,14 +8042,14 @@
       </p:sp>
       <p:sp>
         <p:nvSpPr>
-          <p:cNvPr id="12" name="TextBox 11"/>
+          <p:cNvPr id="7" name="TextBox 6"/>
           <p:cNvSpPr txBox="1"/>
           <p:nvPr/>
         </p:nvSpPr>
         <p:spPr>
           <a:xfrm>
-            <a:off x="8229600" y="2148840"/>
-            <a:ext cx="3017520" cy="411480"/>
+            <a:off x="960120" y="1965960"/>
+            <a:ext cx="2926080" cy="4114800"/>
           </a:xfrm>
           <a:prstGeom prst="rect">
             <a:avLst/>
@@ -6811,59 +8057,50 @@
           <a:noFill/>
         </p:spPr>
         <p:txBody>
-          <a:bodyPr wrap="none">
+          <a:bodyPr wrap="square" lIns="0" tIns="0">
             <a:spAutoFit/>
           </a:bodyPr>
           <a:lstStyle/>
           <a:p>
             <a:pPr>
-              <a:defRPr sz="1100" b="1">
-                <a:solidFill>
-                  <a:srgbClr val="38BDF8"/>
-                </a:solidFill>
-                <a:latin typeface="Arial"/>
-              </a:defRPr>
-            </a:pPr>
-            <a:r>
-              <a:t>STEP 3 / 12-MONTH OS</a:t>
-            </a:r>
-          </a:p>
-        </p:txBody>
-      </p:sp>
-      <p:sp>
-        <p:nvSpPr>
-          <p:cNvPr id="13" name="TextBox 12"/>
-          <p:cNvSpPr txBox="1"/>
-          <p:nvPr/>
-        </p:nvSpPr>
-        <p:spPr>
-          <a:xfrm>
-            <a:off x="8229600" y="2606040"/>
-            <a:ext cx="3017520" cy="3383280"/>
-          </a:xfrm>
-          <a:prstGeom prst="rect">
-            <a:avLst/>
-          </a:prstGeom>
-          <a:noFill/>
-        </p:spPr>
-        <p:txBody>
-          <a:bodyPr wrap="square">
-            <a:spAutoFit/>
-          </a:bodyPr>
-          <a:lstStyle/>
+              <a:defRPr sz="850" b="1">
+                <a:solidFill>
+                  <a:srgbClr val="10B981"/>
+                </a:solidFill>
+                <a:latin typeface="Consolas"/>
+              </a:defRPr>
+            </a:pPr>
+            <a:r>
+              <a:t>PHASE 1 // DAYS 1 - 30</a:t>
+            </a:r>
+          </a:p>
+          <a:p>
+            <a:pPr>
+              <a:defRPr sz="1700" b="1">
+                <a:solidFill>
+                  <a:srgbClr val="FFFFFF"/>
+                </a:solidFill>
+                <a:latin typeface="Segoe UI"/>
+              </a:defRPr>
+            </a:pPr>
+            <a:r>
+              <a:t>Lombardia Manufacturing Pilot</a:t>
+            </a:r>
+          </a:p>
           <a:p>
             <a:pPr>
               <a:spcAft>
                 <a:spcPts val="1000"/>
               </a:spcAft>
-              <a:defRPr sz="1500" b="1">
-                <a:solidFill>
-                  <a:srgbClr val="FFFFFF"/>
-                </a:solidFill>
-              </a:defRPr>
-            </a:pPr>
-            <a:r>
-              <a:t>The Corporate Capital Gateway</a:t>
+              <a:defRPr sz="2800" b="1">
+                <a:solidFill>
+                  <a:srgbClr val="10B981"/>
+                </a:solidFill>
+                <a:latin typeface="Consolas"/>
+              </a:defRPr>
+            </a:pPr>
+            <a:r>
+              <a:t>€ 25M Volume</a:t>
             </a:r>
           </a:p>
           <a:p>
@@ -6871,14 +8108,15 @@
               <a:spcAft>
                 <a:spcPts val="500"/>
               </a:spcAft>
-              <a:defRPr sz="1200">
+              <a:defRPr sz="1050">
                 <a:solidFill>
                   <a:srgbClr val="94A3B8"/>
                 </a:solidFill>
-              </a:defRPr>
-            </a:pPr>
-            <a:r>
-              <a:t>• Expand from debt origination to continuous SME treasury intelligence.</a:t>
+                <a:latin typeface="Segoe UI"/>
+              </a:defRPr>
+            </a:pPr>
+            <a:r>
+              <a:t>• Deploy with 5 pilot manufacturing accounting firms in Milan and Brescia.</a:t>
             </a:r>
           </a:p>
           <a:p>
@@ -6886,14 +8124,15 @@
               <a:spcAft>
                 <a:spcPts val="500"/>
               </a:spcAft>
-              <a:defRPr sz="1200">
+              <a:defRPr sz="1050">
                 <a:solidFill>
                   <a:srgbClr val="94A3B8"/>
                 </a:solidFill>
-              </a:defRPr>
-            </a:pPr>
-            <a:r>
-              <a:t>• Automated covenant monitoring and working capital optimization.</a:t>
+                <a:latin typeface="Segoe UI"/>
+              </a:defRPr>
+            </a:pPr>
+            <a:r>
+              <a:t>• Benchmark 50 live SME equipment loan dossiers.</a:t>
             </a:r>
           </a:p>
           <a:p>
@@ -6901,14 +8140,15 @@
               <a:spcAft>
                 <a:spcPts val="500"/>
               </a:spcAft>
-              <a:defRPr sz="1200">
+              <a:defRPr sz="1050">
                 <a:solidFill>
                   <a:srgbClr val="94A3B8"/>
                 </a:solidFill>
-              </a:defRPr>
-            </a:pPr>
-            <a:r>
-              <a:t>• The definitive financial operating system for European SME capital.</a:t>
+                <a:latin typeface="Segoe UI"/>
+              </a:defRPr>
+            </a:pPr>
+            <a:r>
+              <a:t>• Direct integration with 3 regional cooperative and commercial banks.</a:t>
             </a:r>
           </a:p>
           <a:p>
@@ -6916,14 +8156,489 @@
               <a:spcAft>
                 <a:spcPts val="500"/>
               </a:spcAft>
-              <a:defRPr sz="1200">
+              <a:defRPr sz="1050">
                 <a:solidFill>
                   <a:srgbClr val="94A3B8"/>
                 </a:solidFill>
-              </a:defRPr>
-            </a:pPr>
-            <a:r>
-              <a:t>• Pan-European expansion into DACH and France.</a:t>
+                <a:latin typeface="Segoe UI"/>
+              </a:defRPr>
+            </a:pPr>
+            <a:r>
+              <a:t>• Metric: 100% formal acceptance rate for FinSight-certified dossiers.</a:t>
+            </a:r>
+          </a:p>
+        </p:txBody>
+      </p:sp>
+      <p:sp>
+        <p:nvSpPr>
+          <p:cNvPr id="8" name="Rounded Rectangle 7"/>
+          <p:cNvSpPr/>
+          <p:nvPr/>
+        </p:nvSpPr>
+        <p:spPr>
+          <a:xfrm>
+            <a:off x="4389120" y="1828800"/>
+            <a:ext cx="3383280" cy="4389120"/>
+          </a:xfrm>
+          <a:prstGeom prst="roundRect">
+            <a:avLst/>
+          </a:prstGeom>
+          <a:solidFill>
+            <a:srgbClr val="0D1320"/>
+          </a:solidFill>
+          <a:ln w="15240">
+            <a:solidFill>
+              <a:srgbClr val="1E293B"/>
+            </a:solidFill>
+          </a:ln>
+        </p:spPr>
+        <p:style>
+          <a:lnRef idx="1">
+            <a:schemeClr val="accent1"/>
+          </a:lnRef>
+          <a:fillRef idx="3">
+            <a:schemeClr val="accent1"/>
+          </a:fillRef>
+          <a:effectRef idx="2">
+            <a:schemeClr val="accent1"/>
+          </a:effectRef>
+          <a:fontRef idx="minor">
+            <a:schemeClr val="lt1"/>
+          </a:fontRef>
+        </p:style>
+        <p:txBody>
+          <a:bodyPr rtlCol="0" anchor="ctr"/>
+          <a:lstStyle/>
+          <a:p>
+            <a:pPr algn="ctr"/>
+          </a:p>
+        </p:txBody>
+      </p:sp>
+      <p:sp>
+        <p:nvSpPr>
+          <p:cNvPr id="9" name="Rectangle 8"/>
+          <p:cNvSpPr/>
+          <p:nvPr/>
+        </p:nvSpPr>
+        <p:spPr>
+          <a:xfrm>
+            <a:off x="4462272" y="1847088"/>
+            <a:ext cx="3236976" cy="32004"/>
+          </a:xfrm>
+          <a:prstGeom prst="rect">
+            <a:avLst/>
+          </a:prstGeom>
+          <a:solidFill>
+            <a:srgbClr val="38BDF8"/>
+          </a:solidFill>
+          <a:ln>
+            <a:solidFill>
+              <a:srgbClr val="38BDF8"/>
+            </a:solidFill>
+          </a:ln>
+        </p:spPr>
+        <p:style>
+          <a:lnRef idx="1">
+            <a:schemeClr val="accent1"/>
+          </a:lnRef>
+          <a:fillRef idx="3">
+            <a:schemeClr val="accent1"/>
+          </a:fillRef>
+          <a:effectRef idx="2">
+            <a:schemeClr val="accent1"/>
+          </a:effectRef>
+          <a:fontRef idx="minor">
+            <a:schemeClr val="lt1"/>
+          </a:fontRef>
+        </p:style>
+        <p:txBody>
+          <a:bodyPr rtlCol="0" anchor="ctr"/>
+          <a:lstStyle/>
+          <a:p>
+            <a:pPr algn="ctr"/>
+          </a:p>
+        </p:txBody>
+      </p:sp>
+      <p:sp>
+        <p:nvSpPr>
+          <p:cNvPr id="10" name="TextBox 9"/>
+          <p:cNvSpPr txBox="1"/>
+          <p:nvPr/>
+        </p:nvSpPr>
+        <p:spPr>
+          <a:xfrm>
+            <a:off x="4617720" y="1965960"/>
+            <a:ext cx="2926080" cy="4114800"/>
+          </a:xfrm>
+          <a:prstGeom prst="rect">
+            <a:avLst/>
+          </a:prstGeom>
+          <a:noFill/>
+        </p:spPr>
+        <p:txBody>
+          <a:bodyPr wrap="square" lIns="0" tIns="0">
+            <a:spAutoFit/>
+          </a:bodyPr>
+          <a:lstStyle/>
+          <a:p>
+            <a:pPr>
+              <a:defRPr sz="850" b="1">
+                <a:solidFill>
+                  <a:srgbClr val="38BDF8"/>
+                </a:solidFill>
+                <a:latin typeface="Consolas"/>
+              </a:defRPr>
+            </a:pPr>
+            <a:r>
+              <a:t>PHASE 2 // DAYS 31 - 90</a:t>
+            </a:r>
+          </a:p>
+          <a:p>
+            <a:pPr>
+              <a:defRPr sz="1700" b="1">
+                <a:solidFill>
+                  <a:srgbClr val="FFFFFF"/>
+                </a:solidFill>
+                <a:latin typeface="Segoe UI"/>
+              </a:defRPr>
+            </a:pPr>
+            <a:r>
+              <a:t>Multi-Bank Marketplace</a:t>
+            </a:r>
+          </a:p>
+          <a:p>
+            <a:pPr>
+              <a:spcAft>
+                <a:spcPts val="1000"/>
+              </a:spcAft>
+              <a:defRPr sz="2800" b="1">
+                <a:solidFill>
+                  <a:srgbClr val="38BDF8"/>
+                </a:solidFill>
+                <a:latin typeface="Consolas"/>
+              </a:defRPr>
+            </a:pPr>
+            <a:r>
+              <a:t>€ 100M Volume</a:t>
+            </a:r>
+          </a:p>
+          <a:p>
+            <a:pPr>
+              <a:spcAft>
+                <a:spcPts val="500"/>
+              </a:spcAft>
+              <a:defRPr sz="1050">
+                <a:solidFill>
+                  <a:srgbClr val="94A3B8"/>
+                </a:solidFill>
+                <a:latin typeface="Segoe UI"/>
+              </a:defRPr>
+            </a:pPr>
+            <a:r>
+              <a:t>• Expand distribution via regional industrial associations (Confindustria).</a:t>
+            </a:r>
+          </a:p>
+          <a:p>
+            <a:pPr>
+              <a:spcAft>
+                <a:spcPts val="500"/>
+              </a:spcAft>
+              <a:defRPr sz="1050">
+                <a:solidFill>
+                  <a:srgbClr val="94A3B8"/>
+                </a:solidFill>
+                <a:latin typeface="Segoe UI"/>
+              </a:defRPr>
+            </a:pPr>
+            <a:r>
+              <a:t>• Onboard 15 commercial banks and digital private credit funds.</a:t>
+            </a:r>
+          </a:p>
+          <a:p>
+            <a:pPr>
+              <a:spcAft>
+                <a:spcPts val="500"/>
+              </a:spcAft>
+              <a:defRPr sz="1050">
+                <a:solidFill>
+                  <a:srgbClr val="94A3B8"/>
+                </a:solidFill>
+                <a:latin typeface="Segoe UI"/>
+              </a:defRPr>
+            </a:pPr>
+            <a:r>
+              <a:t>• Launch automated regional green grant matching engine.</a:t>
+            </a:r>
+          </a:p>
+          <a:p>
+            <a:pPr>
+              <a:spcAft>
+                <a:spcPts val="500"/>
+              </a:spcAft>
+              <a:defRPr sz="1050">
+                <a:solidFill>
+                  <a:srgbClr val="94A3B8"/>
+                </a:solidFill>
+                <a:latin typeface="Segoe UI"/>
+              </a:defRPr>
+            </a:pPr>
+            <a:r>
+              <a:t>• Deploy Bank Credit Underwriter portal for institutional portfolio monitoring.</a:t>
+            </a:r>
+          </a:p>
+        </p:txBody>
+      </p:sp>
+      <p:sp>
+        <p:nvSpPr>
+          <p:cNvPr id="11" name="Rounded Rectangle 10"/>
+          <p:cNvSpPr/>
+          <p:nvPr/>
+        </p:nvSpPr>
+        <p:spPr>
+          <a:xfrm>
+            <a:off x="8046720" y="1828800"/>
+            <a:ext cx="3383280" cy="4389120"/>
+          </a:xfrm>
+          <a:prstGeom prst="roundRect">
+            <a:avLst/>
+          </a:prstGeom>
+          <a:solidFill>
+            <a:srgbClr val="0D1320"/>
+          </a:solidFill>
+          <a:ln w="15240">
+            <a:solidFill>
+              <a:srgbClr val="1E293B"/>
+            </a:solidFill>
+          </a:ln>
+        </p:spPr>
+        <p:style>
+          <a:lnRef idx="1">
+            <a:schemeClr val="accent1"/>
+          </a:lnRef>
+          <a:fillRef idx="3">
+            <a:schemeClr val="accent1"/>
+          </a:fillRef>
+          <a:effectRef idx="2">
+            <a:schemeClr val="accent1"/>
+          </a:effectRef>
+          <a:fontRef idx="minor">
+            <a:schemeClr val="lt1"/>
+          </a:fontRef>
+        </p:style>
+        <p:txBody>
+          <a:bodyPr rtlCol="0" anchor="ctr"/>
+          <a:lstStyle/>
+          <a:p>
+            <a:pPr algn="ctr"/>
+          </a:p>
+        </p:txBody>
+      </p:sp>
+      <p:sp>
+        <p:nvSpPr>
+          <p:cNvPr id="12" name="Rectangle 11"/>
+          <p:cNvSpPr/>
+          <p:nvPr/>
+        </p:nvSpPr>
+        <p:spPr>
+          <a:xfrm>
+            <a:off x="8119872" y="1847088"/>
+            <a:ext cx="3236976" cy="32004"/>
+          </a:xfrm>
+          <a:prstGeom prst="rect">
+            <a:avLst/>
+          </a:prstGeom>
+          <a:solidFill>
+            <a:srgbClr val="6366F1"/>
+          </a:solidFill>
+          <a:ln>
+            <a:solidFill>
+              <a:srgbClr val="6366F1"/>
+            </a:solidFill>
+          </a:ln>
+        </p:spPr>
+        <p:style>
+          <a:lnRef idx="1">
+            <a:schemeClr val="accent1"/>
+          </a:lnRef>
+          <a:fillRef idx="3">
+            <a:schemeClr val="accent1"/>
+          </a:fillRef>
+          <a:effectRef idx="2">
+            <a:schemeClr val="accent1"/>
+          </a:effectRef>
+          <a:fontRef idx="minor">
+            <a:schemeClr val="lt1"/>
+          </a:fontRef>
+        </p:style>
+        <p:txBody>
+          <a:bodyPr rtlCol="0" anchor="ctr"/>
+          <a:lstStyle/>
+          <a:p>
+            <a:pPr algn="ctr"/>
+          </a:p>
+        </p:txBody>
+      </p:sp>
+      <p:sp>
+        <p:nvSpPr>
+          <p:cNvPr id="13" name="TextBox 12"/>
+          <p:cNvSpPr txBox="1"/>
+          <p:nvPr/>
+        </p:nvSpPr>
+        <p:spPr>
+          <a:xfrm>
+            <a:off x="8275320" y="1965960"/>
+            <a:ext cx="2926080" cy="4114800"/>
+          </a:xfrm>
+          <a:prstGeom prst="rect">
+            <a:avLst/>
+          </a:prstGeom>
+          <a:noFill/>
+        </p:spPr>
+        <p:txBody>
+          <a:bodyPr wrap="square" lIns="0" tIns="0">
+            <a:spAutoFit/>
+          </a:bodyPr>
+          <a:lstStyle/>
+          <a:p>
+            <a:pPr>
+              <a:defRPr sz="850" b="1">
+                <a:solidFill>
+                  <a:srgbClr val="6366F1"/>
+                </a:solidFill>
+                <a:latin typeface="Consolas"/>
+              </a:defRPr>
+            </a:pPr>
+            <a:r>
+              <a:t>PHASE 3 // MONTHS 4 - 12</a:t>
+            </a:r>
+          </a:p>
+          <a:p>
+            <a:pPr>
+              <a:defRPr sz="1700" b="1">
+                <a:solidFill>
+                  <a:srgbClr val="FFFFFF"/>
+                </a:solidFill>
+                <a:latin typeface="Segoe UI"/>
+              </a:defRPr>
+            </a:pPr>
+            <a:r>
+              <a:t>SME Treasury &amp; Capital OS</a:t>
+            </a:r>
+          </a:p>
+          <a:p>
+            <a:pPr>
+              <a:spcAft>
+                <a:spcPts val="1000"/>
+              </a:spcAft>
+              <a:defRPr sz="2800" b="1">
+                <a:solidFill>
+                  <a:srgbClr val="6366F1"/>
+                </a:solidFill>
+                <a:latin typeface="Consolas"/>
+              </a:defRPr>
+            </a:pPr>
+            <a:r>
+              <a:t>€ 500M+ Run-Rate</a:t>
+            </a:r>
+          </a:p>
+          <a:p>
+            <a:pPr>
+              <a:spcAft>
+                <a:spcPts val="500"/>
+              </a:spcAft>
+              <a:defRPr sz="1050">
+                <a:solidFill>
+                  <a:srgbClr val="94A3B8"/>
+                </a:solidFill>
+                <a:latin typeface="Segoe UI"/>
+              </a:defRPr>
+            </a:pPr>
+            <a:r>
+              <a:t>• Expand from loan origination to continuous SME treasury intelligence.</a:t>
+            </a:r>
+          </a:p>
+          <a:p>
+            <a:pPr>
+              <a:spcAft>
+                <a:spcPts val="500"/>
+              </a:spcAft>
+              <a:defRPr sz="1050">
+                <a:solidFill>
+                  <a:srgbClr val="94A3B8"/>
+                </a:solidFill>
+                <a:latin typeface="Segoe UI"/>
+              </a:defRPr>
+            </a:pPr>
+            <a:r>
+              <a:t>• Automated quarterly covenant health monitoring &amp; working capital optimization.</a:t>
+            </a:r>
+          </a:p>
+          <a:p>
+            <a:pPr>
+              <a:spcAft>
+                <a:spcPts val="500"/>
+              </a:spcAft>
+              <a:defRPr sz="1050">
+                <a:solidFill>
+                  <a:srgbClr val="94A3B8"/>
+                </a:solidFill>
+                <a:latin typeface="Segoe UI"/>
+              </a:defRPr>
+            </a:pPr>
+            <a:r>
+              <a:t>• The definitive capital readiness operating system for European SMEs.</a:t>
+            </a:r>
+          </a:p>
+          <a:p>
+            <a:pPr>
+              <a:spcAft>
+                <a:spcPts val="500"/>
+              </a:spcAft>
+              <a:defRPr sz="1050">
+                <a:solidFill>
+                  <a:srgbClr val="94A3B8"/>
+                </a:solidFill>
+                <a:latin typeface="Segoe UI"/>
+              </a:defRPr>
+            </a:pPr>
+            <a:r>
+              <a:t>• Pan-European expansion into DACH and France under EBA-harmonized rules.</a:t>
+            </a:r>
+          </a:p>
+        </p:txBody>
+      </p:sp>
+      <p:sp>
+        <p:nvSpPr>
+          <p:cNvPr id="14" name="TextBox 13"/>
+          <p:cNvSpPr txBox="1"/>
+          <p:nvPr/>
+        </p:nvSpPr>
+        <p:spPr>
+          <a:xfrm>
+            <a:off x="731520" y="6446520"/>
+            <a:ext cx="10698480" cy="320040"/>
+          </a:xfrm>
+          <a:prstGeom prst="rect">
+            <a:avLst/>
+          </a:prstGeom>
+          <a:noFill/>
+        </p:spPr>
+        <p:txBody>
+          <a:bodyPr wrap="none" lIns="0" tIns="0">
+            <a:spAutoFit/>
+          </a:bodyPr>
+          <a:lstStyle/>
+          <a:p>
+            <a:pPr>
+              <a:defRPr sz="850" b="1">
+                <a:solidFill>
+                  <a:srgbClr val="64748B"/>
+                </a:solidFill>
+                <a:latin typeface="Consolas"/>
+              </a:defRPr>
+            </a:pPr>
+            <a:r>
+              <a:t>DUCKDB 1.0 IN-MEMORY OLAP  |  APPLICATION ID: ECOTEX-2026-IT  |  EBA/GL/2020/06 COMPLIANT  |  TUB ART. 128-SEXIES SEAL</a:t>
             </a:r>
           </a:p>
         </p:txBody>

--- a/presentation/FinSight_AI_Pitch_Deck_Enterprise.pptx
+++ b/presentation/FinSight_AI_Pitch_Deck_Enterprise.pptx
@@ -3106,6 +3106,106 @@
       </p:grpSpPr>
       <p:sp>
         <p:nvSpPr>
+          <p:cNvPr id="15" name="Oval 3">
+            <a:extLst>
+              <a:ext uri="{FF2B5EF4-FFF2-40B4-BE49-F238E27FC236}">
+                <a16:creationId xmlns:a16="http://schemas.microsoft.com/office/drawing/2014/main" id="{D1F6FBB5-A2AE-DB58-C07B-4469EE231EAF}"/>
+              </a:ext>
+            </a:extLst>
+          </p:cNvPr>
+          <p:cNvSpPr/>
+          <p:nvPr/>
+        </p:nvSpPr>
+        <p:spPr>
+          <a:xfrm>
+            <a:off x="-1828800" y="4114800"/>
+            <a:ext cx="5029200" cy="4572000"/>
+          </a:xfrm>
+          <a:prstGeom prst="ellipse">
+            <a:avLst/>
+          </a:prstGeom>
+          <a:solidFill>
+            <a:srgbClr val="0A121E"/>
+          </a:solidFill>
+          <a:ln>
+            <a:noFill/>
+          </a:ln>
+        </p:spPr>
+        <p:style>
+          <a:lnRef idx="1">
+            <a:schemeClr val="accent1"/>
+          </a:lnRef>
+          <a:fillRef idx="3">
+            <a:schemeClr val="accent1"/>
+          </a:fillRef>
+          <a:effectRef idx="2">
+            <a:schemeClr val="accent1"/>
+          </a:effectRef>
+          <a:fontRef idx="minor">
+            <a:schemeClr val="lt1"/>
+          </a:fontRef>
+        </p:style>
+        <p:txBody>
+          <a:bodyPr rtlCol="0" anchor="ctr"/>
+          <a:lstStyle/>
+          <a:p>
+            <a:pPr algn="ctr"/>
+            <a:endParaRPr/>
+          </a:p>
+        </p:txBody>
+      </p:sp>
+      <p:sp>
+        <p:nvSpPr>
+          <p:cNvPr id="13" name="Oval 2">
+            <a:extLst>
+              <a:ext uri="{FF2B5EF4-FFF2-40B4-BE49-F238E27FC236}">
+                <a16:creationId xmlns:a16="http://schemas.microsoft.com/office/drawing/2014/main" id="{348A128A-76F3-235A-7F3B-90922DB548A3}"/>
+              </a:ext>
+            </a:extLst>
+          </p:cNvPr>
+          <p:cNvSpPr/>
+          <p:nvPr/>
+        </p:nvSpPr>
+        <p:spPr>
+          <a:xfrm>
+            <a:off x="8153400" y="-1879092"/>
+            <a:ext cx="5943600" cy="5486400"/>
+          </a:xfrm>
+          <a:prstGeom prst="ellipse">
+            <a:avLst/>
+          </a:prstGeom>
+          <a:solidFill>
+            <a:srgbClr val="0C1C30"/>
+          </a:solidFill>
+          <a:ln>
+            <a:noFill/>
+          </a:ln>
+        </p:spPr>
+        <p:style>
+          <a:lnRef idx="1">
+            <a:schemeClr val="accent1"/>
+          </a:lnRef>
+          <a:fillRef idx="3">
+            <a:schemeClr val="accent1"/>
+          </a:fillRef>
+          <a:effectRef idx="2">
+            <a:schemeClr val="accent1"/>
+          </a:effectRef>
+          <a:fontRef idx="minor">
+            <a:schemeClr val="lt1"/>
+          </a:fontRef>
+        </p:style>
+        <p:txBody>
+          <a:bodyPr rtlCol="0" anchor="ctr"/>
+          <a:lstStyle/>
+          <a:p>
+            <a:pPr algn="ctr"/>
+            <a:endParaRPr/>
+          </a:p>
+        </p:txBody>
+      </p:sp>
+      <p:sp>
+        <p:nvSpPr>
           <p:cNvPr id="2" name="TextBox 1"/>
           <p:cNvSpPr txBox="1"/>
           <p:nvPr/>
@@ -3524,6 +3624,108 @@
       </p:grpSpPr>
       <p:sp>
         <p:nvSpPr>
+          <p:cNvPr id="26" name="Oval 2">
+            <a:extLst>
+              <a:ext uri="{FF2B5EF4-FFF2-40B4-BE49-F238E27FC236}">
+                <a16:creationId xmlns:a16="http://schemas.microsoft.com/office/drawing/2014/main" id="{2E3941C2-3042-1671-0628-CAE4BC9E2863}"/>
+              </a:ext>
+            </a:extLst>
+          </p:cNvPr>
+          <p:cNvSpPr/>
+          <p:nvPr/>
+        </p:nvSpPr>
+        <p:spPr>
+          <a:xfrm>
+            <a:off x="7772400" y="-1371600"/>
+            <a:ext cx="5943600" cy="5486400"/>
+          </a:xfrm>
+          <a:prstGeom prst="ellipse">
+            <a:avLst/>
+          </a:prstGeom>
+          <a:solidFill>
+            <a:srgbClr val="6B3305">
+              <a:alpha val="69804"/>
+            </a:srgbClr>
+          </a:solidFill>
+          <a:ln>
+            <a:noFill/>
+          </a:ln>
+        </p:spPr>
+        <p:style>
+          <a:lnRef idx="1">
+            <a:schemeClr val="accent1"/>
+          </a:lnRef>
+          <a:fillRef idx="3">
+            <a:schemeClr val="accent1"/>
+          </a:fillRef>
+          <a:effectRef idx="2">
+            <a:schemeClr val="accent1"/>
+          </a:effectRef>
+          <a:fontRef idx="minor">
+            <a:schemeClr val="lt1"/>
+          </a:fontRef>
+        </p:style>
+        <p:txBody>
+          <a:bodyPr rtlCol="0" anchor="ctr"/>
+          <a:lstStyle/>
+          <a:p>
+            <a:pPr algn="ctr"/>
+            <a:endParaRPr dirty="0"/>
+          </a:p>
+        </p:txBody>
+      </p:sp>
+      <p:sp>
+        <p:nvSpPr>
+          <p:cNvPr id="28" name="Oval 3">
+            <a:extLst>
+              <a:ext uri="{FF2B5EF4-FFF2-40B4-BE49-F238E27FC236}">
+                <a16:creationId xmlns:a16="http://schemas.microsoft.com/office/drawing/2014/main" id="{830AAC6C-D474-7144-4A2C-AD2D023425AE}"/>
+              </a:ext>
+            </a:extLst>
+          </p:cNvPr>
+          <p:cNvSpPr/>
+          <p:nvPr/>
+        </p:nvSpPr>
+        <p:spPr>
+          <a:xfrm>
+            <a:off x="-1828800" y="4114800"/>
+            <a:ext cx="5029200" cy="4572000"/>
+          </a:xfrm>
+          <a:prstGeom prst="ellipse">
+            <a:avLst/>
+          </a:prstGeom>
+          <a:solidFill>
+            <a:srgbClr val="0A121E"/>
+          </a:solidFill>
+          <a:ln>
+            <a:noFill/>
+          </a:ln>
+        </p:spPr>
+        <p:style>
+          <a:lnRef idx="1">
+            <a:schemeClr val="accent1"/>
+          </a:lnRef>
+          <a:fillRef idx="3">
+            <a:schemeClr val="accent1"/>
+          </a:fillRef>
+          <a:effectRef idx="2">
+            <a:schemeClr val="accent1"/>
+          </a:effectRef>
+          <a:fontRef idx="minor">
+            <a:schemeClr val="lt1"/>
+          </a:fontRef>
+        </p:style>
+        <p:txBody>
+          <a:bodyPr rtlCol="0" anchor="ctr"/>
+          <a:lstStyle/>
+          <a:p>
+            <a:pPr algn="ctr"/>
+            <a:endParaRPr/>
+          </a:p>
+        </p:txBody>
+      </p:sp>
+      <p:sp>
+        <p:nvSpPr>
           <p:cNvPr id="2" name="TextBox 1"/>
           <p:cNvSpPr txBox="1"/>
           <p:nvPr/>
@@ -4588,6 +4790,58 @@
       </p:grpSpPr>
       <p:sp>
         <p:nvSpPr>
+          <p:cNvPr id="31" name="Oval 2">
+            <a:extLst>
+              <a:ext uri="{FF2B5EF4-FFF2-40B4-BE49-F238E27FC236}">
+                <a16:creationId xmlns:a16="http://schemas.microsoft.com/office/drawing/2014/main" id="{B0DF1433-223E-5605-7A86-4D942F2129F3}"/>
+              </a:ext>
+            </a:extLst>
+          </p:cNvPr>
+          <p:cNvSpPr/>
+          <p:nvPr/>
+        </p:nvSpPr>
+        <p:spPr>
+          <a:xfrm>
+            <a:off x="8153400" y="-1879092"/>
+            <a:ext cx="5943600" cy="5486400"/>
+          </a:xfrm>
+          <a:prstGeom prst="ellipse">
+            <a:avLst/>
+          </a:prstGeom>
+          <a:solidFill>
+            <a:srgbClr val="0070C0">
+              <a:alpha val="69804"/>
+            </a:srgbClr>
+          </a:solidFill>
+          <a:ln>
+            <a:noFill/>
+          </a:ln>
+        </p:spPr>
+        <p:style>
+          <a:lnRef idx="1">
+            <a:schemeClr val="accent1"/>
+          </a:lnRef>
+          <a:fillRef idx="3">
+            <a:schemeClr val="accent1"/>
+          </a:fillRef>
+          <a:effectRef idx="2">
+            <a:schemeClr val="accent1"/>
+          </a:effectRef>
+          <a:fontRef idx="minor">
+            <a:schemeClr val="lt1"/>
+          </a:fontRef>
+        </p:style>
+        <p:txBody>
+          <a:bodyPr rtlCol="0" anchor="ctr"/>
+          <a:lstStyle/>
+          <a:p>
+            <a:pPr algn="ctr"/>
+            <a:endParaRPr dirty="0"/>
+          </a:p>
+        </p:txBody>
+      </p:sp>
+      <p:sp>
+        <p:nvSpPr>
           <p:cNvPr id="2" name="TextBox 1"/>
           <p:cNvSpPr txBox="1"/>
           <p:nvPr/>
@@ -5784,6 +6038,58 @@
           <a:chExt cx="0" cy="0"/>
         </a:xfrm>
       </p:grpSpPr>
+      <p:sp>
+        <p:nvSpPr>
+          <p:cNvPr id="32" name="Oval 2">
+            <a:extLst>
+              <a:ext uri="{FF2B5EF4-FFF2-40B4-BE49-F238E27FC236}">
+                <a16:creationId xmlns:a16="http://schemas.microsoft.com/office/drawing/2014/main" id="{339B8C06-2C93-E1CB-7435-0B467610DDCE}"/>
+              </a:ext>
+            </a:extLst>
+          </p:cNvPr>
+          <p:cNvSpPr/>
+          <p:nvPr/>
+        </p:nvSpPr>
+        <p:spPr>
+          <a:xfrm>
+            <a:off x="8153400" y="-1879092"/>
+            <a:ext cx="5943600" cy="5486400"/>
+          </a:xfrm>
+          <a:prstGeom prst="ellipse">
+            <a:avLst/>
+          </a:prstGeom>
+          <a:solidFill>
+            <a:srgbClr val="00823B">
+              <a:alpha val="69804"/>
+            </a:srgbClr>
+          </a:solidFill>
+          <a:ln>
+            <a:noFill/>
+          </a:ln>
+        </p:spPr>
+        <p:style>
+          <a:lnRef idx="1">
+            <a:schemeClr val="accent1"/>
+          </a:lnRef>
+          <a:fillRef idx="3">
+            <a:schemeClr val="accent1"/>
+          </a:fillRef>
+          <a:effectRef idx="2">
+            <a:schemeClr val="accent1"/>
+          </a:effectRef>
+          <a:fontRef idx="minor">
+            <a:schemeClr val="lt1"/>
+          </a:fontRef>
+        </p:style>
+        <p:txBody>
+          <a:bodyPr rtlCol="0" anchor="ctr"/>
+          <a:lstStyle/>
+          <a:p>
+            <a:pPr algn="ctr"/>
+            <a:endParaRPr dirty="0"/>
+          </a:p>
+        </p:txBody>
+      </p:sp>
       <p:sp>
         <p:nvSpPr>
           <p:cNvPr id="2" name="TextBox 1"/>

--- a/presentation/FinSight_AI_Pitch_Deck_Enterprise.pptx
+++ b/presentation/FinSight_AI_Pitch_Deck_Enterprise.pptx
@@ -3320,8 +3320,14 @@
                 </a:solidFill>
                 <a:latin typeface="Arial"/>
               </a:rPr>
-              <a:t> AI: Pre-Underwriting</a:t>
-            </a:r>
+              <a:t> AI </a:t>
+            </a:r>
+            <a:endParaRPr lang="it-IT" sz="3800" b="1" i="0" dirty="0">
+              <a:solidFill>
+                <a:srgbClr val="FFFFFF"/>
+              </a:solidFill>
+              <a:latin typeface="Arial"/>
+            </a:endParaRPr>
           </a:p>
           <a:p>
             <a:pPr algn="ctr">
@@ -3333,14 +3339,38 @@
               </a:spcAft>
             </a:pPr>
             <a:r>
-              <a:rPr sz="3800" b="1" i="0" dirty="0">
+              <a:rPr sz="3200" b="1" i="0" dirty="0">
                 <a:solidFill>
                   <a:srgbClr val="FFFFFF"/>
                 </a:solidFill>
                 <a:latin typeface="Arial"/>
               </a:rPr>
-              <a:t>European SME Debt in 14 Seconds.</a:t>
-            </a:r>
+              <a:t>Pre-Underwriting</a:t>
+            </a:r>
+            <a:r>
+              <a:rPr lang="it-IT" sz="3200" b="1" i="0" dirty="0">
+                <a:solidFill>
+                  <a:srgbClr val="FFFFFF"/>
+                </a:solidFill>
+                <a:latin typeface="Arial"/>
+              </a:rPr>
+              <a:t> </a:t>
+            </a:r>
+            <a:r>
+              <a:rPr sz="3200" b="1" i="0" dirty="0">
+                <a:solidFill>
+                  <a:srgbClr val="FFFFFF"/>
+                </a:solidFill>
+                <a:latin typeface="Arial"/>
+              </a:rPr>
+              <a:t>European SME Debt in 14 Seconds</a:t>
+            </a:r>
+            <a:endParaRPr sz="6000" b="1" i="0" dirty="0">
+              <a:solidFill>
+                <a:srgbClr val="FFFFFF"/>
+              </a:solidFill>
+              <a:latin typeface="Arial"/>
+            </a:endParaRPr>
           </a:p>
         </p:txBody>
       </p:sp>
@@ -3589,6 +3619,35 @@
           </a:p>
         </p:txBody>
       </p:sp>
+      <p:pic>
+        <p:nvPicPr>
+          <p:cNvPr id="19" name="Immagine 18">
+            <a:extLst>
+              <a:ext uri="{FF2B5EF4-FFF2-40B4-BE49-F238E27FC236}">
+                <a16:creationId xmlns:a16="http://schemas.microsoft.com/office/drawing/2014/main" id="{97AF3B7C-15A1-643A-86E1-BFDD7E93C9C5}"/>
+              </a:ext>
+            </a:extLst>
+          </p:cNvPr>
+          <p:cNvPicPr>
+            <a:picLocks noChangeAspect="1"/>
+          </p:cNvPicPr>
+          <p:nvPr/>
+        </p:nvPicPr>
+        <p:blipFill>
+          <a:blip r:embed="rId2"/>
+          <a:srcRect l="22194" r="22194"/>
+          <a:stretch/>
+        </p:blipFill>
+        <p:spPr>
+          <a:xfrm>
+            <a:off x="5567595" y="637794"/>
+            <a:ext cx="1056809" cy="1035558"/>
+          </a:xfrm>
+          <a:prstGeom prst="rect">
+            <a:avLst/>
+          </a:prstGeom>
+        </p:spPr>
+      </p:pic>
     </p:spTree>
   </p:cSld>
   <p:clrMapOvr>
@@ -3624,10 +3683,10 @@
       </p:grpSpPr>
       <p:sp>
         <p:nvSpPr>
-          <p:cNvPr id="26" name="Oval 2">
+          <p:cNvPr id="32" name="Oval 2">
             <a:extLst>
               <a:ext uri="{FF2B5EF4-FFF2-40B4-BE49-F238E27FC236}">
-                <a16:creationId xmlns:a16="http://schemas.microsoft.com/office/drawing/2014/main" id="{2E3941C2-3042-1671-0628-CAE4BC9E2863}"/>
+                <a16:creationId xmlns:a16="http://schemas.microsoft.com/office/drawing/2014/main" id="{BA286858-979A-86A5-BEB8-A855BDD5EEFD}"/>
               </a:ext>
             </a:extLst>
           </p:cNvPr>
@@ -3636,7 +3695,7 @@
         </p:nvSpPr>
         <p:spPr>
           <a:xfrm>
-            <a:off x="7772400" y="-1371600"/>
+            <a:off x="8153400" y="-1879092"/>
             <a:ext cx="5943600" cy="5486400"/>
           </a:xfrm>
           <a:prstGeom prst="ellipse">
@@ -3857,7 +3916,7 @@
               </a:lnSpc>
             </a:pPr>
             <a:r>
-              <a:rPr sz="2900" b="1" i="0">
+              <a:rPr sz="2900" b="1" i="0" dirty="0">
                 <a:solidFill>
                   <a:srgbClr val="FFFFFF"/>
                 </a:solidFill>
@@ -4713,7 +4772,9 @@
             <a:r>
               <a:rPr lang="it-IT" sz="1100" b="0" i="0" dirty="0">
                 <a:solidFill>
-                  <a:schemeClr val="bg1"/>
+                  <a:schemeClr val="bg1">
+                    <a:lumMod val="65000"/>
+                  </a:schemeClr>
                 </a:solidFill>
                 <a:effectLst/>
                 <a:latin typeface="Arial" panose="020B0604020202020204" pitchFamily="34" charset="0"/>
@@ -4724,7 +4785,9 @@
             <a:br>
               <a:rPr lang="it-IT" sz="1100" b="0" i="0" dirty="0">
                 <a:solidFill>
-                  <a:schemeClr val="bg1"/>
+                  <a:schemeClr val="bg1">
+                    <a:lumMod val="65000"/>
+                  </a:schemeClr>
                 </a:solidFill>
                 <a:effectLst/>
                 <a:latin typeface="Arial" panose="020B0604020202020204" pitchFamily="34" charset="0"/>
@@ -4734,7 +4797,9 @@
             <a:r>
               <a:rPr lang="it-IT" sz="1100" b="0" i="0" dirty="0">
                 <a:solidFill>
-                  <a:schemeClr val="bg1"/>
+                  <a:schemeClr val="bg1">
+                    <a:lumMod val="65000"/>
+                  </a:schemeClr>
                 </a:solidFill>
                 <a:effectLst/>
                 <a:latin typeface="Arial" panose="020B0604020202020204" pitchFamily="34" charset="0"/>
@@ -4745,7 +4810,9 @@
             <a:r>
               <a:rPr lang="it-IT" sz="1100" dirty="0">
                 <a:solidFill>
-                  <a:schemeClr val="bg1"/>
+                  <a:schemeClr val="bg1">
+                    <a:lumMod val="65000"/>
+                  </a:schemeClr>
                 </a:solidFill>
                 <a:latin typeface="Arial" panose="020B0604020202020204" pitchFamily="34" charset="0"/>
                 <a:cs typeface="Arial" panose="020B0604020202020204" pitchFamily="34" charset="0"/>
@@ -4755,6 +4822,35 @@
           </a:p>
         </p:txBody>
       </p:sp>
+      <p:pic>
+        <p:nvPicPr>
+          <p:cNvPr id="30" name="Immagine 29">
+            <a:extLst>
+              <a:ext uri="{FF2B5EF4-FFF2-40B4-BE49-F238E27FC236}">
+                <a16:creationId xmlns:a16="http://schemas.microsoft.com/office/drawing/2014/main" id="{3448DF93-9B17-8C51-7736-230BB5009ADA}"/>
+              </a:ext>
+            </a:extLst>
+          </p:cNvPr>
+          <p:cNvPicPr>
+            <a:picLocks noChangeAspect="1"/>
+          </p:cNvPicPr>
+          <p:nvPr/>
+        </p:nvPicPr>
+        <p:blipFill>
+          <a:blip r:embed="rId2"/>
+          <a:srcRect l="22195" r="22195"/>
+          <a:stretch/>
+        </p:blipFill>
+        <p:spPr>
+          <a:xfrm>
+            <a:off x="416560" y="308584"/>
+            <a:ext cx="238760" cy="233959"/>
+          </a:xfrm>
+          <a:prstGeom prst="rect">
+            <a:avLst/>
+          </a:prstGeom>
+        </p:spPr>
+      </p:pic>
     </p:spTree>
   </p:cSld>
   <p:clrMapOvr>
@@ -4790,6 +4886,56 @@
       </p:grpSpPr>
       <p:sp>
         <p:nvSpPr>
+          <p:cNvPr id="33" name="Oval 3">
+            <a:extLst>
+              <a:ext uri="{FF2B5EF4-FFF2-40B4-BE49-F238E27FC236}">
+                <a16:creationId xmlns:a16="http://schemas.microsoft.com/office/drawing/2014/main" id="{1D1DD5C8-51F7-2B0D-8123-9193885873A4}"/>
+              </a:ext>
+            </a:extLst>
+          </p:cNvPr>
+          <p:cNvSpPr/>
+          <p:nvPr/>
+        </p:nvSpPr>
+        <p:spPr>
+          <a:xfrm>
+            <a:off x="-1828800" y="4114800"/>
+            <a:ext cx="5029200" cy="4572000"/>
+          </a:xfrm>
+          <a:prstGeom prst="ellipse">
+            <a:avLst/>
+          </a:prstGeom>
+          <a:solidFill>
+            <a:srgbClr val="0A121E"/>
+          </a:solidFill>
+          <a:ln>
+            <a:noFill/>
+          </a:ln>
+        </p:spPr>
+        <p:style>
+          <a:lnRef idx="1">
+            <a:schemeClr val="accent1"/>
+          </a:lnRef>
+          <a:fillRef idx="3">
+            <a:schemeClr val="accent1"/>
+          </a:fillRef>
+          <a:effectRef idx="2">
+            <a:schemeClr val="accent1"/>
+          </a:effectRef>
+          <a:fontRef idx="minor">
+            <a:schemeClr val="lt1"/>
+          </a:fontRef>
+        </p:style>
+        <p:txBody>
+          <a:bodyPr rtlCol="0" anchor="ctr"/>
+          <a:lstStyle/>
+          <a:p>
+            <a:pPr algn="ctr"/>
+            <a:endParaRPr/>
+          </a:p>
+        </p:txBody>
+      </p:sp>
+      <p:sp>
+        <p:nvSpPr>
           <p:cNvPr id="31" name="Oval 2">
             <a:extLst>
               <a:ext uri="{FF2B5EF4-FFF2-40B4-BE49-F238E27FC236}">
@@ -4809,7 +4955,7 @@
             <a:avLst/>
           </a:prstGeom>
           <a:solidFill>
-            <a:srgbClr val="0070C0">
+            <a:srgbClr val="002060">
               <a:alpha val="69804"/>
             </a:srgbClr>
           </a:solidFill>
@@ -4973,13 +5119,30 @@
               </a:lnSpc>
             </a:pPr>
             <a:r>
-              <a:rPr sz="2900" b="1" i="0">
+              <a:rPr sz="2900" b="1" i="0" dirty="0">
                 <a:solidFill>
                   <a:srgbClr val="FFFFFF"/>
                 </a:solidFill>
                 <a:latin typeface="Arial"/>
               </a:rPr>
-              <a:t>The 4-Stage Deterministic Engine: Zero Cloud Leaks, Zero LLM Math</a:t>
+              <a:t>The 4-Stage Deterministic Engine: </a:t>
+            </a:r>
+            <a:br>
+              <a:rPr lang="it-IT" sz="2900" b="1" i="0" dirty="0">
+                <a:solidFill>
+                  <a:srgbClr val="FFFFFF"/>
+                </a:solidFill>
+                <a:latin typeface="Arial"/>
+              </a:rPr>
+            </a:br>
+            <a:r>
+              <a:rPr sz="2900" b="1" i="0" dirty="0">
+                <a:solidFill>
+                  <a:srgbClr val="FFFFFF"/>
+                </a:solidFill>
+                <a:latin typeface="Arial"/>
+              </a:rPr>
+              <a:t>Zero Cloud Leaks, Zero LLM Math</a:t>
             </a:r>
           </a:p>
         </p:txBody>
@@ -6005,6 +6168,35 @@
           </a:p>
         </p:txBody>
       </p:sp>
+      <p:pic>
+        <p:nvPicPr>
+          <p:cNvPr id="32" name="Immagine 31">
+            <a:extLst>
+              <a:ext uri="{FF2B5EF4-FFF2-40B4-BE49-F238E27FC236}">
+                <a16:creationId xmlns:a16="http://schemas.microsoft.com/office/drawing/2014/main" id="{DC023FE9-557F-449A-255C-033D834B02A8}"/>
+              </a:ext>
+            </a:extLst>
+          </p:cNvPr>
+          <p:cNvPicPr>
+            <a:picLocks noChangeAspect="1"/>
+          </p:cNvPicPr>
+          <p:nvPr/>
+        </p:nvPicPr>
+        <p:blipFill>
+          <a:blip r:embed="rId2"/>
+          <a:srcRect l="22195" r="22195"/>
+          <a:stretch/>
+        </p:blipFill>
+        <p:spPr>
+          <a:xfrm>
+            <a:off x="416560" y="308584"/>
+            <a:ext cx="238760" cy="233959"/>
+          </a:xfrm>
+          <a:prstGeom prst="rect">
+            <a:avLst/>
+          </a:prstGeom>
+        </p:spPr>
+      </p:pic>
     </p:spTree>
   </p:cSld>
   <p:clrMapOvr>
@@ -6040,6 +6232,56 @@
       </p:grpSpPr>
       <p:sp>
         <p:nvSpPr>
+          <p:cNvPr id="35" name="Oval 3">
+            <a:extLst>
+              <a:ext uri="{FF2B5EF4-FFF2-40B4-BE49-F238E27FC236}">
+                <a16:creationId xmlns:a16="http://schemas.microsoft.com/office/drawing/2014/main" id="{F8E4B77C-B18E-D6B3-9C8E-09CE277CDD6C}"/>
+              </a:ext>
+            </a:extLst>
+          </p:cNvPr>
+          <p:cNvSpPr/>
+          <p:nvPr/>
+        </p:nvSpPr>
+        <p:spPr>
+          <a:xfrm>
+            <a:off x="-1828800" y="4114800"/>
+            <a:ext cx="5029200" cy="4572000"/>
+          </a:xfrm>
+          <a:prstGeom prst="ellipse">
+            <a:avLst/>
+          </a:prstGeom>
+          <a:solidFill>
+            <a:srgbClr val="0A121E"/>
+          </a:solidFill>
+          <a:ln>
+            <a:noFill/>
+          </a:ln>
+        </p:spPr>
+        <p:style>
+          <a:lnRef idx="1">
+            <a:schemeClr val="accent1"/>
+          </a:lnRef>
+          <a:fillRef idx="3">
+            <a:schemeClr val="accent1"/>
+          </a:fillRef>
+          <a:effectRef idx="2">
+            <a:schemeClr val="accent1"/>
+          </a:effectRef>
+          <a:fontRef idx="minor">
+            <a:schemeClr val="lt1"/>
+          </a:fontRef>
+        </p:style>
+        <p:txBody>
+          <a:bodyPr rtlCol="0" anchor="ctr"/>
+          <a:lstStyle/>
+          <a:p>
+            <a:pPr algn="ctr"/>
+            <a:endParaRPr/>
+          </a:p>
+        </p:txBody>
+      </p:sp>
+      <p:sp>
+        <p:nvSpPr>
           <p:cNvPr id="32" name="Oval 2">
             <a:extLst>
               <a:ext uri="{FF2B5EF4-FFF2-40B4-BE49-F238E27FC236}">
@@ -6059,7 +6301,7 @@
             <a:avLst/>
           </a:prstGeom>
           <a:solidFill>
-            <a:srgbClr val="00823B">
+            <a:srgbClr val="006C31">
               <a:alpha val="69804"/>
             </a:srgbClr>
           </a:solidFill>
@@ -6977,7 +7219,7 @@
               </a:lnSpc>
             </a:pPr>
             <a:r>
-              <a:rPr sz="1900" b="1" i="0">
+              <a:rPr sz="1900" b="1" i="0" dirty="0">
                 <a:solidFill>
                   <a:srgbClr val="FFFFFF"/>
                 </a:solidFill>
@@ -7209,8 +7451,8 @@
         </p:nvSpPr>
         <p:spPr>
           <a:xfrm>
-            <a:off x="2911824" y="6338457"/>
-            <a:ext cx="6949135" cy="261610"/>
+            <a:off x="2758440" y="6385432"/>
+            <a:ext cx="6949135" cy="430887"/>
           </a:xfrm>
           <a:prstGeom prst="rect">
             <a:avLst/>
@@ -7223,15 +7465,41 @@
           </a:bodyPr>
           <a:lstStyle/>
           <a:p>
+            <a:pPr algn="ctr"/>
             <a:r>
               <a:rPr lang="it-IT" sz="1100" dirty="0">
                 <a:solidFill>
-                  <a:schemeClr val="bg1"/>
+                  <a:schemeClr val="bg1">
+                    <a:lumMod val="65000"/>
+                  </a:schemeClr>
                 </a:solidFill>
                 <a:latin typeface="Arial" panose="020B0604020202020204" pitchFamily="34" charset="0"/>
                 <a:cs typeface="Arial" panose="020B0604020202020204" pitchFamily="34" charset="0"/>
               </a:rPr>
               <a:t>*https://www.eba.europa.eu/regulation-and-policy/credit-risk/guidelines-on-loan-origination-and-monitoring</a:t>
+            </a:r>
+            <a:br>
+              <a:rPr lang="it-IT" sz="1100" dirty="0">
+                <a:solidFill>
+                  <a:schemeClr val="bg1">
+                    <a:lumMod val="65000"/>
+                  </a:schemeClr>
+                </a:solidFill>
+                <a:latin typeface="Arial" panose="020B0604020202020204" pitchFamily="34" charset="0"/>
+                <a:cs typeface="Arial" panose="020B0604020202020204" pitchFamily="34" charset="0"/>
+              </a:rPr>
+            </a:br>
+            <a:r>
+              <a:rPr lang="it-IT" sz="1100" dirty="0">
+                <a:solidFill>
+                  <a:schemeClr val="bg1">
+                    <a:lumMod val="65000"/>
+                  </a:schemeClr>
+                </a:solidFill>
+                <a:latin typeface="Arial" panose="020B0604020202020204" pitchFamily="34" charset="0"/>
+                <a:cs typeface="Arial" panose="020B0604020202020204" pitchFamily="34" charset="0"/>
+              </a:rPr>
+              <a:t>**https://pallab9999-finsight-ai-appmain-gt4in1.streamlit.app/</a:t>
             </a:r>
           </a:p>
         </p:txBody>
@@ -7258,8 +7526,105 @@
         </p:blipFill>
         <p:spPr>
           <a:xfrm>
-            <a:off x="7653713" y="3489769"/>
-            <a:ext cx="2447636" cy="2447636"/>
+            <a:off x="7774712" y="3502451"/>
+            <a:ext cx="2170343" cy="2170343"/>
+          </a:xfrm>
+          <a:prstGeom prst="rect">
+            <a:avLst/>
+          </a:prstGeom>
+        </p:spPr>
+      </p:pic>
+      <p:sp>
+        <p:nvSpPr>
+          <p:cNvPr id="41" name="TextBox 23">
+            <a:extLst>
+              <a:ext uri="{FF2B5EF4-FFF2-40B4-BE49-F238E27FC236}">
+                <a16:creationId xmlns:a16="http://schemas.microsoft.com/office/drawing/2014/main" id="{83EF9F65-27CB-061B-B721-74453C20F45D}"/>
+              </a:ext>
+            </a:extLst>
+          </p:cNvPr>
+          <p:cNvSpPr txBox="1"/>
+          <p:nvPr/>
+        </p:nvSpPr>
+        <p:spPr>
+          <a:xfrm>
+            <a:off x="7774712" y="5759927"/>
+            <a:ext cx="2170343" cy="548640"/>
+          </a:xfrm>
+          <a:prstGeom prst="rect">
+            <a:avLst/>
+          </a:prstGeom>
+          <a:noFill/>
+        </p:spPr>
+        <p:txBody>
+          <a:bodyPr wrap="square" lIns="0" tIns="0" rIns="0" bIns="0" anchor="t">
+            <a:noAutofit/>
+          </a:bodyPr>
+          <a:lstStyle/>
+          <a:p>
+            <a:pPr algn="ctr">
+              <a:lnSpc>
+                <a:spcPct val="110000"/>
+              </a:lnSpc>
+            </a:pPr>
+            <a:r>
+              <a:rPr lang="it-IT" sz="1900" b="1" i="0" dirty="0">
+                <a:solidFill>
+                  <a:srgbClr val="FFFFFF"/>
+                </a:solidFill>
+                <a:latin typeface="Arial"/>
+              </a:rPr>
+              <a:t>SCAN TO TRY</a:t>
+            </a:r>
+            <a:br>
+              <a:rPr lang="it-IT" sz="1900" b="1" i="0" dirty="0">
+                <a:solidFill>
+                  <a:srgbClr val="FFFFFF"/>
+                </a:solidFill>
+                <a:latin typeface="Arial"/>
+              </a:rPr>
+            </a:br>
+            <a:r>
+              <a:rPr lang="it-IT" sz="1200" b="1" i="0" dirty="0">
+                <a:solidFill>
+                  <a:srgbClr val="FFFFFF"/>
+                </a:solidFill>
+                <a:latin typeface="Arial"/>
+              </a:rPr>
+              <a:t>OUR APP**</a:t>
+            </a:r>
+            <a:endParaRPr sz="1900" b="1" i="0" dirty="0">
+              <a:solidFill>
+                <a:srgbClr val="FFFFFF"/>
+              </a:solidFill>
+              <a:latin typeface="Arial"/>
+            </a:endParaRPr>
+          </a:p>
+        </p:txBody>
+      </p:sp>
+      <p:pic>
+        <p:nvPicPr>
+          <p:cNvPr id="34" name="Immagine 33">
+            <a:extLst>
+              <a:ext uri="{FF2B5EF4-FFF2-40B4-BE49-F238E27FC236}">
+                <a16:creationId xmlns:a16="http://schemas.microsoft.com/office/drawing/2014/main" id="{AF403AA9-D343-5B57-E5DF-F859E31BD8AD}"/>
+              </a:ext>
+            </a:extLst>
+          </p:cNvPr>
+          <p:cNvPicPr>
+            <a:picLocks noChangeAspect="1"/>
+          </p:cNvPicPr>
+          <p:nvPr/>
+        </p:nvPicPr>
+        <p:blipFill>
+          <a:blip r:embed="rId3"/>
+          <a:srcRect l="22195" r="22195"/>
+          <a:stretch/>
+        </p:blipFill>
+        <p:spPr>
+          <a:xfrm>
+            <a:off x="416560" y="308584"/>
+            <a:ext cx="238760" cy="233959"/>
           </a:xfrm>
           <a:prstGeom prst="rect">
             <a:avLst/>
@@ -7301,6 +7666,108 @@
       </p:grpSpPr>
       <p:sp>
         <p:nvSpPr>
+          <p:cNvPr id="25" name="Oval 3">
+            <a:extLst>
+              <a:ext uri="{FF2B5EF4-FFF2-40B4-BE49-F238E27FC236}">
+                <a16:creationId xmlns:a16="http://schemas.microsoft.com/office/drawing/2014/main" id="{4B01F7F8-C8AA-21C6-5CA7-3A359D010444}"/>
+              </a:ext>
+            </a:extLst>
+          </p:cNvPr>
+          <p:cNvSpPr/>
+          <p:nvPr/>
+        </p:nvSpPr>
+        <p:spPr>
+          <a:xfrm>
+            <a:off x="-1828800" y="4114800"/>
+            <a:ext cx="5029200" cy="4572000"/>
+          </a:xfrm>
+          <a:prstGeom prst="ellipse">
+            <a:avLst/>
+          </a:prstGeom>
+          <a:solidFill>
+            <a:srgbClr val="0A121E"/>
+          </a:solidFill>
+          <a:ln>
+            <a:noFill/>
+          </a:ln>
+        </p:spPr>
+        <p:style>
+          <a:lnRef idx="1">
+            <a:schemeClr val="accent1"/>
+          </a:lnRef>
+          <a:fillRef idx="3">
+            <a:schemeClr val="accent1"/>
+          </a:fillRef>
+          <a:effectRef idx="2">
+            <a:schemeClr val="accent1"/>
+          </a:effectRef>
+          <a:fontRef idx="minor">
+            <a:schemeClr val="lt1"/>
+          </a:fontRef>
+        </p:style>
+        <p:txBody>
+          <a:bodyPr rtlCol="0" anchor="ctr"/>
+          <a:lstStyle/>
+          <a:p>
+            <a:pPr algn="ctr"/>
+            <a:endParaRPr/>
+          </a:p>
+        </p:txBody>
+      </p:sp>
+      <p:sp>
+        <p:nvSpPr>
+          <p:cNvPr id="23" name="Oval 2">
+            <a:extLst>
+              <a:ext uri="{FF2B5EF4-FFF2-40B4-BE49-F238E27FC236}">
+                <a16:creationId xmlns:a16="http://schemas.microsoft.com/office/drawing/2014/main" id="{3A0049A5-3C82-05EC-87FE-268479D30E2F}"/>
+              </a:ext>
+            </a:extLst>
+          </p:cNvPr>
+          <p:cNvSpPr/>
+          <p:nvPr/>
+        </p:nvSpPr>
+        <p:spPr>
+          <a:xfrm>
+            <a:off x="8153400" y="-1879092"/>
+            <a:ext cx="5943600" cy="5486400"/>
+          </a:xfrm>
+          <a:prstGeom prst="ellipse">
+            <a:avLst/>
+          </a:prstGeom>
+          <a:solidFill>
+            <a:srgbClr val="006C31">
+              <a:alpha val="69804"/>
+            </a:srgbClr>
+          </a:solidFill>
+          <a:ln>
+            <a:noFill/>
+          </a:ln>
+        </p:spPr>
+        <p:style>
+          <a:lnRef idx="1">
+            <a:schemeClr val="accent1"/>
+          </a:lnRef>
+          <a:fillRef idx="3">
+            <a:schemeClr val="accent1"/>
+          </a:fillRef>
+          <a:effectRef idx="2">
+            <a:schemeClr val="accent1"/>
+          </a:effectRef>
+          <a:fontRef idx="minor">
+            <a:schemeClr val="lt1"/>
+          </a:fontRef>
+        </p:style>
+        <p:txBody>
+          <a:bodyPr rtlCol="0" anchor="ctr"/>
+          <a:lstStyle/>
+          <a:p>
+            <a:pPr algn="ctr"/>
+            <a:endParaRPr dirty="0"/>
+          </a:p>
+        </p:txBody>
+      </p:sp>
+      <p:sp>
+        <p:nvSpPr>
           <p:cNvPr id="2" name="TextBox 1"/>
           <p:cNvSpPr txBox="1"/>
           <p:nvPr/>
@@ -8077,7 +8544,9 @@
             <a:r>
               <a:rPr lang="it-IT" sz="1100" dirty="0">
                 <a:solidFill>
-                  <a:schemeClr val="bg1"/>
+                  <a:schemeClr val="bg1">
+                    <a:lumMod val="65000"/>
+                  </a:schemeClr>
                 </a:solidFill>
                 <a:latin typeface="Arial" panose="020B0604020202020204" pitchFamily="34" charset="0"/>
                 <a:cs typeface="Arial" panose="020B0604020202020204" pitchFamily="34" charset="0"/>
@@ -8087,6 +8556,35 @@
           </a:p>
         </p:txBody>
       </p:sp>
+      <p:pic>
+        <p:nvPicPr>
+          <p:cNvPr id="24" name="Immagine 23">
+            <a:extLst>
+              <a:ext uri="{FF2B5EF4-FFF2-40B4-BE49-F238E27FC236}">
+                <a16:creationId xmlns:a16="http://schemas.microsoft.com/office/drawing/2014/main" id="{5485CB58-4F9F-812E-87DB-B73EC8118CF1}"/>
+              </a:ext>
+            </a:extLst>
+          </p:cNvPr>
+          <p:cNvPicPr>
+            <a:picLocks noChangeAspect="1"/>
+          </p:cNvPicPr>
+          <p:nvPr/>
+        </p:nvPicPr>
+        <p:blipFill>
+          <a:blip r:embed="rId2"/>
+          <a:srcRect l="22195" r="22195"/>
+          <a:stretch/>
+        </p:blipFill>
+        <p:spPr>
+          <a:xfrm>
+            <a:off x="416560" y="308584"/>
+            <a:ext cx="238760" cy="233959"/>
+          </a:xfrm>
+          <a:prstGeom prst="rect">
+            <a:avLst/>
+          </a:prstGeom>
+        </p:spPr>
+      </p:pic>
     </p:spTree>
   </p:cSld>
   <p:clrMapOvr>
@@ -8122,6 +8620,108 @@
       </p:grpSpPr>
       <p:sp>
         <p:nvSpPr>
+          <p:cNvPr id="27" name="Oval 3">
+            <a:extLst>
+              <a:ext uri="{FF2B5EF4-FFF2-40B4-BE49-F238E27FC236}">
+                <a16:creationId xmlns:a16="http://schemas.microsoft.com/office/drawing/2014/main" id="{8C2BF82F-D273-D07C-56C9-6F1EFB5D53B5}"/>
+              </a:ext>
+            </a:extLst>
+          </p:cNvPr>
+          <p:cNvSpPr/>
+          <p:nvPr/>
+        </p:nvSpPr>
+        <p:spPr>
+          <a:xfrm>
+            <a:off x="-1828800" y="4114800"/>
+            <a:ext cx="5029200" cy="4572000"/>
+          </a:xfrm>
+          <a:prstGeom prst="ellipse">
+            <a:avLst/>
+          </a:prstGeom>
+          <a:solidFill>
+            <a:srgbClr val="0A121E"/>
+          </a:solidFill>
+          <a:ln>
+            <a:noFill/>
+          </a:ln>
+        </p:spPr>
+        <p:style>
+          <a:lnRef idx="1">
+            <a:schemeClr val="accent1"/>
+          </a:lnRef>
+          <a:fillRef idx="3">
+            <a:schemeClr val="accent1"/>
+          </a:fillRef>
+          <a:effectRef idx="2">
+            <a:schemeClr val="accent1"/>
+          </a:effectRef>
+          <a:fontRef idx="minor">
+            <a:schemeClr val="lt1"/>
+          </a:fontRef>
+        </p:style>
+        <p:txBody>
+          <a:bodyPr rtlCol="0" anchor="ctr"/>
+          <a:lstStyle/>
+          <a:p>
+            <a:pPr algn="ctr"/>
+            <a:endParaRPr/>
+          </a:p>
+        </p:txBody>
+      </p:sp>
+      <p:sp>
+        <p:nvSpPr>
+          <p:cNvPr id="25" name="Oval 2">
+            <a:extLst>
+              <a:ext uri="{FF2B5EF4-FFF2-40B4-BE49-F238E27FC236}">
+                <a16:creationId xmlns:a16="http://schemas.microsoft.com/office/drawing/2014/main" id="{80691DA5-F72C-0B15-4DBF-B531A999FAF9}"/>
+              </a:ext>
+            </a:extLst>
+          </p:cNvPr>
+          <p:cNvSpPr/>
+          <p:nvPr/>
+        </p:nvSpPr>
+        <p:spPr>
+          <a:xfrm>
+            <a:off x="8153400" y="-1879092"/>
+            <a:ext cx="5943600" cy="5486400"/>
+          </a:xfrm>
+          <a:prstGeom prst="ellipse">
+            <a:avLst/>
+          </a:prstGeom>
+          <a:solidFill>
+            <a:srgbClr val="002060">
+              <a:alpha val="69804"/>
+            </a:srgbClr>
+          </a:solidFill>
+          <a:ln>
+            <a:noFill/>
+          </a:ln>
+        </p:spPr>
+        <p:style>
+          <a:lnRef idx="1">
+            <a:schemeClr val="accent1"/>
+          </a:lnRef>
+          <a:fillRef idx="3">
+            <a:schemeClr val="accent1"/>
+          </a:fillRef>
+          <a:effectRef idx="2">
+            <a:schemeClr val="accent1"/>
+          </a:effectRef>
+          <a:fontRef idx="minor">
+            <a:schemeClr val="lt1"/>
+          </a:fontRef>
+        </p:style>
+        <p:txBody>
+          <a:bodyPr rtlCol="0" anchor="ctr"/>
+          <a:lstStyle/>
+          <a:p>
+            <a:pPr algn="ctr"/>
+            <a:endParaRPr dirty="0"/>
+          </a:p>
+        </p:txBody>
+      </p:sp>
+      <p:sp>
+        <p:nvSpPr>
           <p:cNvPr id="2" name="TextBox 1"/>
           <p:cNvSpPr txBox="1"/>
           <p:nvPr/>
@@ -8253,7 +8853,7 @@
               </a:lnSpc>
             </a:pPr>
             <a:r>
-              <a:rPr sz="2900" b="1" i="0">
+              <a:rPr sz="2900" b="1" i="0" dirty="0">
                 <a:solidFill>
                   <a:srgbClr val="FFFFFF"/>
                 </a:solidFill>
@@ -8935,6 +9535,35 @@
           </a:p>
         </p:txBody>
       </p:sp>
+      <p:pic>
+        <p:nvPicPr>
+          <p:cNvPr id="23" name="Immagine 22">
+            <a:extLst>
+              <a:ext uri="{FF2B5EF4-FFF2-40B4-BE49-F238E27FC236}">
+                <a16:creationId xmlns:a16="http://schemas.microsoft.com/office/drawing/2014/main" id="{2A65C84C-F1A3-89A4-D8E4-6D8EEA19798E}"/>
+              </a:ext>
+            </a:extLst>
+          </p:cNvPr>
+          <p:cNvPicPr>
+            <a:picLocks noChangeAspect="1"/>
+          </p:cNvPicPr>
+          <p:nvPr/>
+        </p:nvPicPr>
+        <p:blipFill>
+          <a:blip r:embed="rId2"/>
+          <a:srcRect l="22195" r="22195"/>
+          <a:stretch/>
+        </p:blipFill>
+        <p:spPr>
+          <a:xfrm>
+            <a:off x="416560" y="308584"/>
+            <a:ext cx="238760" cy="233959"/>
+          </a:xfrm>
+          <a:prstGeom prst="rect">
+            <a:avLst/>
+          </a:prstGeom>
+        </p:spPr>
+      </p:pic>
     </p:spTree>
   </p:cSld>
   <p:clrMapOvr>
@@ -8976,6 +9605,108 @@
       </p:grpSpPr>
       <p:sp>
         <p:nvSpPr>
+          <p:cNvPr id="22" name="Oval 2">
+            <a:extLst>
+              <a:ext uri="{FF2B5EF4-FFF2-40B4-BE49-F238E27FC236}">
+                <a16:creationId xmlns:a16="http://schemas.microsoft.com/office/drawing/2014/main" id="{6F1AB5F9-300F-279A-918B-81AB30BFE081}"/>
+              </a:ext>
+            </a:extLst>
+          </p:cNvPr>
+          <p:cNvSpPr/>
+          <p:nvPr/>
+        </p:nvSpPr>
+        <p:spPr>
+          <a:xfrm>
+            <a:off x="8153400" y="-1879092"/>
+            <a:ext cx="5943600" cy="5486400"/>
+          </a:xfrm>
+          <a:prstGeom prst="ellipse">
+            <a:avLst/>
+          </a:prstGeom>
+          <a:solidFill>
+            <a:srgbClr val="002060">
+              <a:alpha val="69804"/>
+            </a:srgbClr>
+          </a:solidFill>
+          <a:ln>
+            <a:noFill/>
+          </a:ln>
+        </p:spPr>
+        <p:style>
+          <a:lnRef idx="1">
+            <a:schemeClr val="accent1"/>
+          </a:lnRef>
+          <a:fillRef idx="3">
+            <a:schemeClr val="accent1"/>
+          </a:fillRef>
+          <a:effectRef idx="2">
+            <a:schemeClr val="accent1"/>
+          </a:effectRef>
+          <a:fontRef idx="minor">
+            <a:schemeClr val="lt1"/>
+          </a:fontRef>
+        </p:style>
+        <p:txBody>
+          <a:bodyPr rtlCol="0" anchor="ctr"/>
+          <a:lstStyle/>
+          <a:p>
+            <a:pPr algn="ctr"/>
+            <a:endParaRPr dirty="0"/>
+          </a:p>
+        </p:txBody>
+      </p:sp>
+      <p:sp>
+        <p:nvSpPr>
+          <p:cNvPr id="16" name="Oval 3">
+            <a:extLst>
+              <a:ext uri="{FF2B5EF4-FFF2-40B4-BE49-F238E27FC236}">
+                <a16:creationId xmlns:a16="http://schemas.microsoft.com/office/drawing/2014/main" id="{56BF2E54-9E0D-A052-1521-4608C386CA36}"/>
+              </a:ext>
+            </a:extLst>
+          </p:cNvPr>
+          <p:cNvSpPr/>
+          <p:nvPr/>
+        </p:nvSpPr>
+        <p:spPr>
+          <a:xfrm>
+            <a:off x="-1828800" y="4114800"/>
+            <a:ext cx="5029200" cy="4572000"/>
+          </a:xfrm>
+          <a:prstGeom prst="ellipse">
+            <a:avLst/>
+          </a:prstGeom>
+          <a:solidFill>
+            <a:srgbClr val="0A121E"/>
+          </a:solidFill>
+          <a:ln>
+            <a:noFill/>
+          </a:ln>
+        </p:spPr>
+        <p:style>
+          <a:lnRef idx="1">
+            <a:schemeClr val="accent1"/>
+          </a:lnRef>
+          <a:fillRef idx="3">
+            <a:schemeClr val="accent1"/>
+          </a:fillRef>
+          <a:effectRef idx="2">
+            <a:schemeClr val="accent1"/>
+          </a:effectRef>
+          <a:fontRef idx="minor">
+            <a:schemeClr val="lt1"/>
+          </a:fontRef>
+        </p:style>
+        <p:txBody>
+          <a:bodyPr rtlCol="0" anchor="ctr"/>
+          <a:lstStyle/>
+          <a:p>
+            <a:pPr algn="ctr"/>
+            <a:endParaRPr/>
+          </a:p>
+        </p:txBody>
+      </p:sp>
+      <p:sp>
+        <p:nvSpPr>
           <p:cNvPr id="2" name="TextBox 1">
             <a:extLst>
               <a:ext uri="{FF2B5EF4-FFF2-40B4-BE49-F238E27FC236}">
@@ -9903,6 +10634,35 @@
           <a:xfrm>
             <a:off x="1606092" y="3749039"/>
             <a:ext cx="1538865" cy="1811541"/>
+          </a:xfrm>
+          <a:prstGeom prst="rect">
+            <a:avLst/>
+          </a:prstGeom>
+        </p:spPr>
+      </p:pic>
+      <p:pic>
+        <p:nvPicPr>
+          <p:cNvPr id="21" name="Immagine 20">
+            <a:extLst>
+              <a:ext uri="{FF2B5EF4-FFF2-40B4-BE49-F238E27FC236}">
+                <a16:creationId xmlns:a16="http://schemas.microsoft.com/office/drawing/2014/main" id="{D156AF30-AE41-ACA6-873D-27B18A429105}"/>
+              </a:ext>
+            </a:extLst>
+          </p:cNvPr>
+          <p:cNvPicPr>
+            <a:picLocks noChangeAspect="1"/>
+          </p:cNvPicPr>
+          <p:nvPr/>
+        </p:nvPicPr>
+        <p:blipFill>
+          <a:blip r:embed="rId5"/>
+          <a:srcRect l="22195" r="22195"/>
+          <a:stretch/>
+        </p:blipFill>
+        <p:spPr>
+          <a:xfrm>
+            <a:off x="416560" y="308584"/>
+            <a:ext cx="238760" cy="233959"/>
           </a:xfrm>
           <a:prstGeom prst="rect">
             <a:avLst/>

--- a/presentation/FinSight_AI_Pitch_Deck_Enterprise.pptx
+++ b/presentation/FinSight_AI_Pitch_Deck_Enterprise.pptx
@@ -4,6 +4,9 @@
   <p:sldMasterIdLst>
     <p:sldMasterId id="2147483648" r:id="rId1"/>
   </p:sldMasterIdLst>
+  <p:notesMasterIdLst>
+    <p:notesMasterId r:id="rId9"/>
+  </p:notesMasterIdLst>
   <p:sldIdLst>
     <p:sldId id="256" r:id="rId2"/>
     <p:sldId id="257" r:id="rId3"/>
@@ -127,6 +130,439 @@
     </p:ext>
   </p:extLst>
 </p:presentation>
+</file>
+
+<file path=ppt/notesMasters/notesMaster1.xml><?xml version="1.0" encoding="utf-8"?>
+<p:notesMaster xmlns:a="http://schemas.openxmlformats.org/drawingml/2006/main" xmlns:r="http://schemas.openxmlformats.org/officeDocument/2006/relationships" xmlns:p="http://schemas.openxmlformats.org/presentationml/2006/main">
+  <p:cSld>
+    <p:bg>
+      <p:bgRef idx="1001">
+        <a:schemeClr val="bg1"/>
+      </p:bgRef>
+    </p:bg>
+    <p:spTree>
+      <p:nvGrpSpPr>
+        <p:cNvPr id="1" name=""/>
+        <p:cNvGrpSpPr/>
+        <p:nvPr/>
+      </p:nvGrpSpPr>
+      <p:grpSpPr>
+        <a:xfrm>
+          <a:off x="0" y="0"/>
+          <a:ext cx="0" cy="0"/>
+          <a:chOff x="0" y="0"/>
+          <a:chExt cx="0" cy="0"/>
+        </a:xfrm>
+      </p:grpSpPr>
+      <p:sp>
+        <p:nvSpPr>
+          <p:cNvPr id="2" name="Segnaposto intestazione 1"/>
+          <p:cNvSpPr>
+            <a:spLocks noGrp="1"/>
+          </p:cNvSpPr>
+          <p:nvPr>
+            <p:ph type="hdr" sz="quarter"/>
+          </p:nvPr>
+        </p:nvSpPr>
+        <p:spPr>
+          <a:xfrm>
+            <a:off x="0" y="0"/>
+            <a:ext cx="2971800" cy="458788"/>
+          </a:xfrm>
+          <a:prstGeom prst="rect">
+            <a:avLst/>
+          </a:prstGeom>
+        </p:spPr>
+        <p:txBody>
+          <a:bodyPr vert="horz" lIns="91440" tIns="45720" rIns="91440" bIns="45720" rtlCol="0"/>
+          <a:lstStyle>
+            <a:lvl1pPr algn="l">
+              <a:defRPr sz="1200"/>
+            </a:lvl1pPr>
+          </a:lstStyle>
+          <a:p>
+            <a:endParaRPr lang="it-IT"/>
+          </a:p>
+        </p:txBody>
+      </p:sp>
+      <p:sp>
+        <p:nvSpPr>
+          <p:cNvPr id="3" name="Segnaposto data 2"/>
+          <p:cNvSpPr>
+            <a:spLocks noGrp="1"/>
+          </p:cNvSpPr>
+          <p:nvPr>
+            <p:ph type="dt" idx="1"/>
+          </p:nvPr>
+        </p:nvSpPr>
+        <p:spPr>
+          <a:xfrm>
+            <a:off x="3884613" y="0"/>
+            <a:ext cx="2971800" cy="458788"/>
+          </a:xfrm>
+          <a:prstGeom prst="rect">
+            <a:avLst/>
+          </a:prstGeom>
+        </p:spPr>
+        <p:txBody>
+          <a:bodyPr vert="horz" lIns="91440" tIns="45720" rIns="91440" bIns="45720" rtlCol="0"/>
+          <a:lstStyle>
+            <a:lvl1pPr algn="r">
+              <a:defRPr sz="1200"/>
+            </a:lvl1pPr>
+          </a:lstStyle>
+          <a:p>
+            <a:fld id="{860C0FFF-1944-4B43-B9B8-02F4C74EE727}" type="datetimeFigureOut">
+              <a:rPr lang="it-IT" smtClean="0"/>
+              <a:t>08/09/2026</a:t>
+            </a:fld>
+            <a:endParaRPr lang="it-IT"/>
+          </a:p>
+        </p:txBody>
+      </p:sp>
+      <p:sp>
+        <p:nvSpPr>
+          <p:cNvPr id="4" name="Segnaposto immagine diapositiva 3"/>
+          <p:cNvSpPr>
+            <a:spLocks noGrp="1" noRot="1" noChangeAspect="1"/>
+          </p:cNvSpPr>
+          <p:nvPr>
+            <p:ph type="sldImg" idx="2"/>
+          </p:nvPr>
+        </p:nvSpPr>
+        <p:spPr>
+          <a:xfrm>
+            <a:off x="685800" y="1143000"/>
+            <a:ext cx="5486400" cy="3086100"/>
+          </a:xfrm>
+          <a:prstGeom prst="rect">
+            <a:avLst/>
+          </a:prstGeom>
+          <a:noFill/>
+          <a:ln w="12700">
+            <a:solidFill>
+              <a:prstClr val="black"/>
+            </a:solidFill>
+          </a:ln>
+        </p:spPr>
+        <p:txBody>
+          <a:bodyPr vert="horz" lIns="91440" tIns="45720" rIns="91440" bIns="45720" rtlCol="0" anchor="ctr"/>
+          <a:lstStyle/>
+          <a:p>
+            <a:endParaRPr lang="it-IT"/>
+          </a:p>
+        </p:txBody>
+      </p:sp>
+      <p:sp>
+        <p:nvSpPr>
+          <p:cNvPr id="5" name="Segnaposto note 4"/>
+          <p:cNvSpPr>
+            <a:spLocks noGrp="1"/>
+          </p:cNvSpPr>
+          <p:nvPr>
+            <p:ph type="body" sz="quarter" idx="3"/>
+          </p:nvPr>
+        </p:nvSpPr>
+        <p:spPr>
+          <a:xfrm>
+            <a:off x="685800" y="4400550"/>
+            <a:ext cx="5486400" cy="3600450"/>
+          </a:xfrm>
+          <a:prstGeom prst="rect">
+            <a:avLst/>
+          </a:prstGeom>
+        </p:spPr>
+        <p:txBody>
+          <a:bodyPr vert="horz" lIns="91440" tIns="45720" rIns="91440" bIns="45720" rtlCol="0"/>
+          <a:lstStyle/>
+          <a:p>
+            <a:pPr lvl="0"/>
+            <a:r>
+              <a:rPr lang="it-IT"/>
+              <a:t>Fare clic per modificare gli stili del testo dello schema</a:t>
+            </a:r>
+          </a:p>
+          <a:p>
+            <a:pPr lvl="1"/>
+            <a:r>
+              <a:rPr lang="it-IT"/>
+              <a:t>Secondo livello</a:t>
+            </a:r>
+          </a:p>
+          <a:p>
+            <a:pPr lvl="2"/>
+            <a:r>
+              <a:rPr lang="it-IT"/>
+              <a:t>Terzo livello</a:t>
+            </a:r>
+          </a:p>
+          <a:p>
+            <a:pPr lvl="3"/>
+            <a:r>
+              <a:rPr lang="it-IT"/>
+              <a:t>Quarto livello</a:t>
+            </a:r>
+          </a:p>
+          <a:p>
+            <a:pPr lvl="4"/>
+            <a:r>
+              <a:rPr lang="it-IT"/>
+              <a:t>Quinto livello</a:t>
+            </a:r>
+          </a:p>
+        </p:txBody>
+      </p:sp>
+      <p:sp>
+        <p:nvSpPr>
+          <p:cNvPr id="6" name="Segnaposto piè di pagina 5"/>
+          <p:cNvSpPr>
+            <a:spLocks noGrp="1"/>
+          </p:cNvSpPr>
+          <p:nvPr>
+            <p:ph type="ftr" sz="quarter" idx="4"/>
+          </p:nvPr>
+        </p:nvSpPr>
+        <p:spPr>
+          <a:xfrm>
+            <a:off x="0" y="8685213"/>
+            <a:ext cx="2971800" cy="458787"/>
+          </a:xfrm>
+          <a:prstGeom prst="rect">
+            <a:avLst/>
+          </a:prstGeom>
+        </p:spPr>
+        <p:txBody>
+          <a:bodyPr vert="horz" lIns="91440" tIns="45720" rIns="91440" bIns="45720" rtlCol="0" anchor="b"/>
+          <a:lstStyle>
+            <a:lvl1pPr algn="l">
+              <a:defRPr sz="1200"/>
+            </a:lvl1pPr>
+          </a:lstStyle>
+          <a:p>
+            <a:endParaRPr lang="it-IT"/>
+          </a:p>
+        </p:txBody>
+      </p:sp>
+      <p:sp>
+        <p:nvSpPr>
+          <p:cNvPr id="7" name="Segnaposto numero diapositiva 6"/>
+          <p:cNvSpPr>
+            <a:spLocks noGrp="1"/>
+          </p:cNvSpPr>
+          <p:nvPr>
+            <p:ph type="sldNum" sz="quarter" idx="5"/>
+          </p:nvPr>
+        </p:nvSpPr>
+        <p:spPr>
+          <a:xfrm>
+            <a:off x="3884613" y="8685213"/>
+            <a:ext cx="2971800" cy="458787"/>
+          </a:xfrm>
+          <a:prstGeom prst="rect">
+            <a:avLst/>
+          </a:prstGeom>
+        </p:spPr>
+        <p:txBody>
+          <a:bodyPr vert="horz" lIns="91440" tIns="45720" rIns="91440" bIns="45720" rtlCol="0" anchor="b"/>
+          <a:lstStyle>
+            <a:lvl1pPr algn="r">
+              <a:defRPr sz="1200"/>
+            </a:lvl1pPr>
+          </a:lstStyle>
+          <a:p>
+            <a:fld id="{86507877-923F-4DE3-AEA7-6D0108C456AE}" type="slidenum">
+              <a:rPr lang="it-IT" smtClean="0"/>
+              <a:t>‹N›</a:t>
+            </a:fld>
+            <a:endParaRPr lang="it-IT"/>
+          </a:p>
+        </p:txBody>
+      </p:sp>
+    </p:spTree>
+    <p:extLst>
+      <p:ext uri="{BB962C8B-B14F-4D97-AF65-F5344CB8AC3E}">
+        <p14:creationId xmlns:p14="http://schemas.microsoft.com/office/powerpoint/2010/main" val="2747321452"/>
+      </p:ext>
+    </p:extLst>
+  </p:cSld>
+  <p:clrMap bg1="lt1" tx1="dk1" bg2="lt2" tx2="dk2" accent1="accent1" accent2="accent2" accent3="accent3" accent4="accent4" accent5="accent5" accent6="accent6" hlink="hlink" folHlink="folHlink"/>
+  <p:notesStyle>
+    <a:lvl1pPr marL="0" algn="l" defTabSz="914400" rtl="0" eaLnBrk="1" latinLnBrk="0" hangingPunct="1">
+      <a:defRPr sz="1200" kern="1200">
+        <a:solidFill>
+          <a:schemeClr val="tx1"/>
+        </a:solidFill>
+        <a:latin typeface="+mn-lt"/>
+        <a:ea typeface="+mn-ea"/>
+        <a:cs typeface="+mn-cs"/>
+      </a:defRPr>
+    </a:lvl1pPr>
+    <a:lvl2pPr marL="457200" algn="l" defTabSz="914400" rtl="0" eaLnBrk="1" latinLnBrk="0" hangingPunct="1">
+      <a:defRPr sz="1200" kern="1200">
+        <a:solidFill>
+          <a:schemeClr val="tx1"/>
+        </a:solidFill>
+        <a:latin typeface="+mn-lt"/>
+        <a:ea typeface="+mn-ea"/>
+        <a:cs typeface="+mn-cs"/>
+      </a:defRPr>
+    </a:lvl2pPr>
+    <a:lvl3pPr marL="914400" algn="l" defTabSz="914400" rtl="0" eaLnBrk="1" latinLnBrk="0" hangingPunct="1">
+      <a:defRPr sz="1200" kern="1200">
+        <a:solidFill>
+          <a:schemeClr val="tx1"/>
+        </a:solidFill>
+        <a:latin typeface="+mn-lt"/>
+        <a:ea typeface="+mn-ea"/>
+        <a:cs typeface="+mn-cs"/>
+      </a:defRPr>
+    </a:lvl3pPr>
+    <a:lvl4pPr marL="1371600" algn="l" defTabSz="914400" rtl="0" eaLnBrk="1" latinLnBrk="0" hangingPunct="1">
+      <a:defRPr sz="1200" kern="1200">
+        <a:solidFill>
+          <a:schemeClr val="tx1"/>
+        </a:solidFill>
+        <a:latin typeface="+mn-lt"/>
+        <a:ea typeface="+mn-ea"/>
+        <a:cs typeface="+mn-cs"/>
+      </a:defRPr>
+    </a:lvl4pPr>
+    <a:lvl5pPr marL="1828800" algn="l" defTabSz="914400" rtl="0" eaLnBrk="1" latinLnBrk="0" hangingPunct="1">
+      <a:defRPr sz="1200" kern="1200">
+        <a:solidFill>
+          <a:schemeClr val="tx1"/>
+        </a:solidFill>
+        <a:latin typeface="+mn-lt"/>
+        <a:ea typeface="+mn-ea"/>
+        <a:cs typeface="+mn-cs"/>
+      </a:defRPr>
+    </a:lvl5pPr>
+    <a:lvl6pPr marL="2286000" algn="l" defTabSz="914400" rtl="0" eaLnBrk="1" latinLnBrk="0" hangingPunct="1">
+      <a:defRPr sz="1200" kern="1200">
+        <a:solidFill>
+          <a:schemeClr val="tx1"/>
+        </a:solidFill>
+        <a:latin typeface="+mn-lt"/>
+        <a:ea typeface="+mn-ea"/>
+        <a:cs typeface="+mn-cs"/>
+      </a:defRPr>
+    </a:lvl6pPr>
+    <a:lvl7pPr marL="2743200" algn="l" defTabSz="914400" rtl="0" eaLnBrk="1" latinLnBrk="0" hangingPunct="1">
+      <a:defRPr sz="1200" kern="1200">
+        <a:solidFill>
+          <a:schemeClr val="tx1"/>
+        </a:solidFill>
+        <a:latin typeface="+mn-lt"/>
+        <a:ea typeface="+mn-ea"/>
+        <a:cs typeface="+mn-cs"/>
+      </a:defRPr>
+    </a:lvl7pPr>
+    <a:lvl8pPr marL="3200400" algn="l" defTabSz="914400" rtl="0" eaLnBrk="1" latinLnBrk="0" hangingPunct="1">
+      <a:defRPr sz="1200" kern="1200">
+        <a:solidFill>
+          <a:schemeClr val="tx1"/>
+        </a:solidFill>
+        <a:latin typeface="+mn-lt"/>
+        <a:ea typeface="+mn-ea"/>
+        <a:cs typeface="+mn-cs"/>
+      </a:defRPr>
+    </a:lvl8pPr>
+    <a:lvl9pPr marL="3657600" algn="l" defTabSz="914400" rtl="0" eaLnBrk="1" latinLnBrk="0" hangingPunct="1">
+      <a:defRPr sz="1200" kern="1200">
+        <a:solidFill>
+          <a:schemeClr val="tx1"/>
+        </a:solidFill>
+        <a:latin typeface="+mn-lt"/>
+        <a:ea typeface="+mn-ea"/>
+        <a:cs typeface="+mn-cs"/>
+      </a:defRPr>
+    </a:lvl9pPr>
+  </p:notesStyle>
+</p:notesMaster>
+</file>
+
+<file path=ppt/notesSlides/notesSlide1.xml><?xml version="1.0" encoding="utf-8"?>
+<p:notes xmlns:a="http://schemas.openxmlformats.org/drawingml/2006/main" xmlns:r="http://schemas.openxmlformats.org/officeDocument/2006/relationships" xmlns:p="http://schemas.openxmlformats.org/presentationml/2006/main">
+  <p:cSld>
+    <p:spTree>
+      <p:nvGrpSpPr>
+        <p:cNvPr id="1" name=""/>
+        <p:cNvGrpSpPr/>
+        <p:nvPr/>
+      </p:nvGrpSpPr>
+      <p:grpSpPr>
+        <a:xfrm>
+          <a:off x="0" y="0"/>
+          <a:ext cx="0" cy="0"/>
+          <a:chOff x="0" y="0"/>
+          <a:chExt cx="0" cy="0"/>
+        </a:xfrm>
+      </p:grpSpPr>
+      <p:sp>
+        <p:nvSpPr>
+          <p:cNvPr id="2" name="Segnaposto immagine diapositiva 1"/>
+          <p:cNvSpPr>
+            <a:spLocks noGrp="1" noRot="1" noChangeAspect="1"/>
+          </p:cNvSpPr>
+          <p:nvPr>
+            <p:ph type="sldImg"/>
+          </p:nvPr>
+        </p:nvSpPr>
+        <p:spPr/>
+      </p:sp>
+      <p:sp>
+        <p:nvSpPr>
+          <p:cNvPr id="3" name="Segnaposto note 2"/>
+          <p:cNvSpPr>
+            <a:spLocks noGrp="1"/>
+          </p:cNvSpPr>
+          <p:nvPr>
+            <p:ph type="body" idx="1"/>
+          </p:nvPr>
+        </p:nvSpPr>
+        <p:spPr/>
+        <p:txBody>
+          <a:bodyPr/>
+          <a:lstStyle/>
+          <a:p>
+            <a:endParaRPr lang="it-IT" dirty="0"/>
+          </a:p>
+        </p:txBody>
+      </p:sp>
+      <p:sp>
+        <p:nvSpPr>
+          <p:cNvPr id="4" name="Segnaposto numero diapositiva 3"/>
+          <p:cNvSpPr>
+            <a:spLocks noGrp="1"/>
+          </p:cNvSpPr>
+          <p:nvPr>
+            <p:ph type="sldNum" sz="quarter" idx="5"/>
+          </p:nvPr>
+        </p:nvSpPr>
+        <p:spPr/>
+        <p:txBody>
+          <a:bodyPr/>
+          <a:lstStyle/>
+          <a:p>
+            <a:fld id="{86507877-923F-4DE3-AEA7-6D0108C456AE}" type="slidenum">
+              <a:rPr lang="it-IT" smtClean="0"/>
+              <a:t>4</a:t>
+            </a:fld>
+            <a:endParaRPr lang="it-IT"/>
+          </a:p>
+        </p:txBody>
+      </p:sp>
+    </p:spTree>
+    <p:extLst>
+      <p:ext uri="{BB962C8B-B14F-4D97-AF65-F5344CB8AC3E}">
+        <p14:creationId xmlns:p14="http://schemas.microsoft.com/office/powerpoint/2010/main" val="117548393"/>
+      </p:ext>
+    </p:extLst>
+  </p:cSld>
+  <p:clrMapOvr>
+    <a:masterClrMapping/>
+  </p:clrMapOvr>
+</p:notes>
 </file>
 
 <file path=ppt/slideLayouts/slideLayout1.xml><?xml version="1.0" encoding="utf-8"?>
@@ -4780,9 +5216,9 @@
                 <a:latin typeface="Arial" panose="020B0604020202020204" pitchFamily="34" charset="0"/>
                 <a:cs typeface="Arial" panose="020B0604020202020204" pitchFamily="34" charset="0"/>
               </a:rPr>
-              <a:t>*https://www.ecb.europa.eu/stats/ecb_surveys/safe/html/index.en.html</a:t>
-            </a:r>
-            <a:br>
+              <a:t>*</a:t>
+            </a:r>
+            <a:r>
               <a:rPr lang="it-IT" sz="1100" b="0" i="0" dirty="0">
                 <a:solidFill>
                   <a:schemeClr val="bg1">
@@ -4792,9 +5228,17 @@
                 <a:effectLst/>
                 <a:latin typeface="Arial" panose="020B0604020202020204" pitchFamily="34" charset="0"/>
                 <a:cs typeface="Arial" panose="020B0604020202020204" pitchFamily="34" charset="0"/>
-              </a:rPr>
-            </a:br>
-            <a:r>
+                <a:hlinkClick r:id="rId2">
+                  <a:extLst>
+                    <a:ext uri="{A12FA001-AC4F-418D-AE19-62706E023703}">
+                      <ahyp:hlinkClr xmlns:ahyp="http://schemas.microsoft.com/office/drawing/2018/hyperlinkcolor" val="tx"/>
+                    </a:ext>
+                  </a:extLst>
+                </a:hlinkClick>
+              </a:rPr>
+              <a:t>https://www.ecb.europa.eu/stats/ecb_surveys/safe/html/index.en.html</a:t>
+            </a:r>
+            <a:br>
               <a:rPr lang="it-IT" sz="1100" b="0" i="0" dirty="0">
                 <a:solidFill>
                   <a:schemeClr val="bg1">
@@ -4805,20 +5249,48 @@
                 <a:latin typeface="Arial" panose="020B0604020202020204" pitchFamily="34" charset="0"/>
                 <a:cs typeface="Arial" panose="020B0604020202020204" pitchFamily="34" charset="0"/>
               </a:rPr>
-              <a:t>**</a:t>
-            </a:r>
-            <a:r>
-              <a:rPr lang="it-IT" sz="1100" dirty="0">
+            </a:br>
+            <a:r>
+              <a:rPr lang="it-IT" sz="1100" b="0" i="0" dirty="0">
                 <a:solidFill>
                   <a:schemeClr val="bg1">
                     <a:lumMod val="65000"/>
                   </a:schemeClr>
                 </a:solidFill>
+                <a:effectLst/>
                 <a:latin typeface="Arial" panose="020B0604020202020204" pitchFamily="34" charset="0"/>
                 <a:cs typeface="Arial" panose="020B0604020202020204" pitchFamily="34" charset="0"/>
               </a:rPr>
+              <a:t>**</a:t>
+            </a:r>
+            <a:r>
+              <a:rPr lang="it-IT" sz="1100" dirty="0">
+                <a:solidFill>
+                  <a:schemeClr val="bg1">
+                    <a:lumMod val="65000"/>
+                  </a:schemeClr>
+                </a:solidFill>
+                <a:latin typeface="Arial" panose="020B0604020202020204" pitchFamily="34" charset="0"/>
+                <a:cs typeface="Arial" panose="020B0604020202020204" pitchFamily="34" charset="0"/>
+                <a:hlinkClick r:id="rId3">
+                  <a:extLst>
+                    <a:ext uri="{A12FA001-AC4F-418D-AE19-62706E023703}">
+                      <ahyp:hlinkClr xmlns:ahyp="http://schemas.microsoft.com/office/drawing/2018/hyperlinkcolor" val="tx"/>
+                    </a:ext>
+                  </a:extLst>
+                </a:hlinkClick>
+              </a:rPr>
               <a:t>https://eur-lex.europa.eu/legal-content/IT/TXT/?uri=CELEX:32022L2464</a:t>
             </a:r>
+            <a:endParaRPr lang="it-IT" sz="1100" dirty="0">
+              <a:solidFill>
+                <a:schemeClr val="bg1">
+                  <a:lumMod val="65000"/>
+                </a:schemeClr>
+              </a:solidFill>
+              <a:latin typeface="Arial" panose="020B0604020202020204" pitchFamily="34" charset="0"/>
+              <a:cs typeface="Arial" panose="020B0604020202020204" pitchFamily="34" charset="0"/>
+            </a:endParaRPr>
           </a:p>
         </p:txBody>
       </p:sp>
@@ -4837,7 +5309,7 @@
           <p:nvPr/>
         </p:nvPicPr>
         <p:blipFill>
-          <a:blip r:embed="rId2"/>
+          <a:blip r:embed="rId4"/>
           <a:srcRect l="22195" r="22195"/>
           <a:stretch/>
         </p:blipFill>
@@ -7476,9 +7948,9 @@
                 <a:latin typeface="Arial" panose="020B0604020202020204" pitchFamily="34" charset="0"/>
                 <a:cs typeface="Arial" panose="020B0604020202020204" pitchFamily="34" charset="0"/>
               </a:rPr>
-              <a:t>*https://www.eba.europa.eu/regulation-and-policy/credit-risk/guidelines-on-loan-origination-and-monitoring</a:t>
-            </a:r>
-            <a:br>
+              <a:t>*</a:t>
+            </a:r>
+            <a:r>
               <a:rPr lang="it-IT" sz="1100" dirty="0">
                 <a:solidFill>
                   <a:schemeClr val="bg1">
@@ -7487,10 +7959,18 @@
                 </a:solidFill>
                 <a:latin typeface="Arial" panose="020B0604020202020204" pitchFamily="34" charset="0"/>
                 <a:cs typeface="Arial" panose="020B0604020202020204" pitchFamily="34" charset="0"/>
-              </a:rPr>
-            </a:br>
-            <a:r>
-              <a:rPr lang="it-IT" sz="1100" dirty="0">
+                <a:hlinkClick r:id="rId3">
+                  <a:extLst>
+                    <a:ext uri="{A12FA001-AC4F-418D-AE19-62706E023703}">
+                      <ahyp:hlinkClr xmlns:ahyp="http://schemas.microsoft.com/office/drawing/2018/hyperlinkcolor" val="tx"/>
+                    </a:ext>
+                  </a:extLst>
+                </a:hlinkClick>
+              </a:rPr>
+              <a:t>https://www.eba.europa.eu/regulation-and-policy/credit-risk/</a:t>
+            </a:r>
+            <a:r>
+              <a:rPr lang="it-IT" sz="1100" u="sng" dirty="0">
                 <a:solidFill>
                   <a:schemeClr val="bg1">
                     <a:lumMod val="65000"/>
@@ -7498,9 +7978,67 @@
                 </a:solidFill>
                 <a:latin typeface="Arial" panose="020B0604020202020204" pitchFamily="34" charset="0"/>
                 <a:cs typeface="Arial" panose="020B0604020202020204" pitchFamily="34" charset="0"/>
-              </a:rPr>
-              <a:t>**https://pallab9999-finsight-ai-appmain-gt4in1.streamlit.app/</a:t>
-            </a:r>
+                <a:hlinkClick r:id="rId3">
+                  <a:extLst>
+                    <a:ext uri="{A12FA001-AC4F-418D-AE19-62706E023703}">
+                      <ahyp:hlinkClr xmlns:ahyp="http://schemas.microsoft.com/office/drawing/2018/hyperlinkcolor" val="tx"/>
+                    </a:ext>
+                  </a:extLst>
+                </a:hlinkClick>
+              </a:rPr>
+              <a:t>guidelines-on-loan-origination-and-monitoring</a:t>
+            </a:r>
+            <a:br>
+              <a:rPr lang="it-IT" sz="1100" dirty="0">
+                <a:solidFill>
+                  <a:schemeClr val="bg1">
+                    <a:lumMod val="65000"/>
+                  </a:schemeClr>
+                </a:solidFill>
+                <a:latin typeface="Arial" panose="020B0604020202020204" pitchFamily="34" charset="0"/>
+                <a:cs typeface="Arial" panose="020B0604020202020204" pitchFamily="34" charset="0"/>
+              </a:rPr>
+            </a:br>
+            <a:r>
+              <a:rPr lang="it-IT" sz="1100" dirty="0">
+                <a:solidFill>
+                  <a:schemeClr val="bg1">
+                    <a:lumMod val="65000"/>
+                  </a:schemeClr>
+                </a:solidFill>
+                <a:latin typeface="Arial" panose="020B0604020202020204" pitchFamily="34" charset="0"/>
+                <a:cs typeface="Arial" panose="020B0604020202020204" pitchFamily="34" charset="0"/>
+              </a:rPr>
+              <a:t>**</a:t>
+            </a:r>
+            <a:r>
+              <a:rPr lang="it-IT" sz="1100" dirty="0">
+                <a:solidFill>
+                  <a:schemeClr val="bg1">
+                    <a:lumMod val="65000"/>
+                  </a:schemeClr>
+                </a:solidFill>
+                <a:latin typeface="Arial" panose="020B0604020202020204" pitchFamily="34" charset="0"/>
+                <a:cs typeface="Arial" panose="020B0604020202020204" pitchFamily="34" charset="0"/>
+                <a:hlinkClick r:id="rId4">
+                  <a:extLst>
+                    <a:ext uri="{A12FA001-AC4F-418D-AE19-62706E023703}">
+                      <ahyp:hlinkClr xmlns:ahyp="http://schemas.microsoft.com/office/drawing/2018/hyperlinkcolor" val="tx"/>
+                    </a:ext>
+                  </a:extLst>
+                </a:hlinkClick>
+              </a:rPr>
+              <a:t>https://pallab9999-finsight-ai-appmain-gt4in1.streamlit.app/</a:t>
+            </a:r>
+            <a:endParaRPr lang="it-IT" sz="1100" dirty="0">
+              <a:solidFill>
+                <a:schemeClr val="bg1">
+                  <a:lumMod val="65000"/>
+                </a:schemeClr>
+              </a:solidFill>
+              <a:latin typeface="Arial" panose="020B0604020202020204" pitchFamily="34" charset="0"/>
+              <a:cs typeface="Arial" panose="020B0604020202020204" pitchFamily="34" charset="0"/>
+            </a:endParaRPr>
           </a:p>
         </p:txBody>
       </p:sp>
@@ -7519,7 +8057,7 @@
           <p:nvPr/>
         </p:nvPicPr>
         <p:blipFill>
-          <a:blip r:embed="rId2"/>
+          <a:blip r:embed="rId5"/>
           <a:stretch>
             <a:fillRect/>
           </a:stretch>
@@ -7617,7 +8155,7 @@
           <p:nvPr/>
         </p:nvPicPr>
         <p:blipFill>
-          <a:blip r:embed="rId3"/>
+          <a:blip r:embed="rId6"/>
           <a:srcRect l="22195" r="22195"/>
           <a:stretch/>
         </p:blipFill>
@@ -7899,13 +8437,13 @@
               </a:lnSpc>
             </a:pPr>
             <a:r>
-              <a:rPr sz="2900" b="1" i="0">
+              <a:rPr sz="2900" b="1" i="0" dirty="0">
                 <a:solidFill>
                   <a:srgbClr val="FFFFFF"/>
                 </a:solidFill>
                 <a:latin typeface="Arial"/>
               </a:rPr>
-              <a:t>Distribution Through Corporate Accountants: Zero Direct CAC</a:t>
+              <a:t>Distribution Through Corporate Accountants</a:t>
             </a:r>
           </a:p>
         </p:txBody>
@@ -8551,8 +9089,36 @@
                 <a:latin typeface="Arial" panose="020B0604020202020204" pitchFamily="34" charset="0"/>
                 <a:cs typeface="Arial" panose="020B0604020202020204" pitchFamily="34" charset="0"/>
               </a:rPr>
-              <a:t>*https://commercialisti.it/</a:t>
-            </a:r>
+              <a:t>*</a:t>
+            </a:r>
+            <a:r>
+              <a:rPr lang="it-IT" sz="1100" dirty="0">
+                <a:solidFill>
+                  <a:schemeClr val="bg1">
+                    <a:lumMod val="65000"/>
+                  </a:schemeClr>
+                </a:solidFill>
+                <a:latin typeface="Arial" panose="020B0604020202020204" pitchFamily="34" charset="0"/>
+                <a:cs typeface="Arial" panose="020B0604020202020204" pitchFamily="34" charset="0"/>
+                <a:hlinkClick r:id="rId2">
+                  <a:extLst>
+                    <a:ext uri="{A12FA001-AC4F-418D-AE19-62706E023703}">
+                      <ahyp:hlinkClr xmlns:ahyp="http://schemas.microsoft.com/office/drawing/2018/hyperlinkcolor" val="tx"/>
+                    </a:ext>
+                  </a:extLst>
+                </a:hlinkClick>
+              </a:rPr>
+              <a:t>https://commercialisti.it/</a:t>
+            </a:r>
+            <a:endParaRPr lang="it-IT" sz="1100" dirty="0">
+              <a:solidFill>
+                <a:schemeClr val="bg1">
+                  <a:lumMod val="65000"/>
+                </a:schemeClr>
+              </a:solidFill>
+              <a:latin typeface="Arial" panose="020B0604020202020204" pitchFamily="34" charset="0"/>
+              <a:cs typeface="Arial" panose="020B0604020202020204" pitchFamily="34" charset="0"/>
+            </a:endParaRPr>
           </a:p>
         </p:txBody>
       </p:sp>
@@ -8571,7 +9137,7 @@
           <p:nvPr/>
         </p:nvPicPr>
         <p:blipFill>
-          <a:blip r:embed="rId2"/>
+          <a:blip r:embed="rId3"/>
           <a:srcRect l="22195" r="22195"/>
           <a:stretch/>
         </p:blipFill>
@@ -9617,7 +10183,7 @@
         </p:nvSpPr>
         <p:spPr>
           <a:xfrm>
-            <a:off x="8153400" y="-1879092"/>
+            <a:off x="8127796" y="-1868441"/>
             <a:ext cx="5943600" cy="5486400"/>
           </a:xfrm>
           <a:prstGeom prst="ellipse">
@@ -9742,47 +10308,6 @@
                 <a:latin typeface="Arial"/>
               </a:rPr>
               <a:t>FINSIGHT AI</a:t>
-            </a:r>
-          </a:p>
-        </p:txBody>
-      </p:sp>
-      <p:sp>
-        <p:nvSpPr>
-          <p:cNvPr id="3" name="TextBox 2">
-            <a:extLst>
-              <a:ext uri="{FF2B5EF4-FFF2-40B4-BE49-F238E27FC236}">
-                <a16:creationId xmlns:a16="http://schemas.microsoft.com/office/drawing/2014/main" id="{64246E02-F862-2D4A-115E-5FE6E7E35856}"/>
-              </a:ext>
-            </a:extLst>
-          </p:cNvPr>
-          <p:cNvSpPr txBox="1"/>
-          <p:nvPr/>
-        </p:nvSpPr>
-        <p:spPr>
-          <a:xfrm>
-            <a:off x="9997135" y="384048"/>
-            <a:ext cx="1463040" cy="256032"/>
-          </a:xfrm>
-          <a:prstGeom prst="rect">
-            <a:avLst/>
-          </a:prstGeom>
-          <a:noFill/>
-        </p:spPr>
-        <p:txBody>
-          <a:bodyPr wrap="square" lIns="0" tIns="0" rIns="0" bIns="0" anchor="t">
-            <a:noAutofit/>
-          </a:bodyPr>
-          <a:lstStyle/>
-          <a:p>
-            <a:pPr algn="r"/>
-            <a:r>
-              <a:rPr sz="1000" b="0" i="0">
-                <a:solidFill>
-                  <a:srgbClr val="94A3B8"/>
-                </a:solidFill>
-                <a:latin typeface="Arial"/>
-              </a:rPr>
-              <a:t>06 / 6</a:t>
             </a:r>
           </a:p>
         </p:txBody>
@@ -10601,8 +11126,8 @@
         </p:blipFill>
         <p:spPr>
           <a:xfrm>
-            <a:off x="9114503" y="3749039"/>
-            <a:ext cx="1435510" cy="1731583"/>
+            <a:off x="9043516" y="3749039"/>
+            <a:ext cx="1506497" cy="1817211"/>
           </a:xfrm>
           <a:prstGeom prst="rect">
             <a:avLst/>
@@ -10663,6 +11188,35 @@
           <a:xfrm>
             <a:off x="416560" y="308584"/>
             <a:ext cx="238760" cy="233959"/>
+          </a:xfrm>
+          <a:prstGeom prst="rect">
+            <a:avLst/>
+          </a:prstGeom>
+        </p:spPr>
+      </p:pic>
+      <p:pic>
+        <p:nvPicPr>
+          <p:cNvPr id="28" name="Immagine 27">
+            <a:extLst>
+              <a:ext uri="{FF2B5EF4-FFF2-40B4-BE49-F238E27FC236}">
+                <a16:creationId xmlns:a16="http://schemas.microsoft.com/office/drawing/2014/main" id="{C7184460-EDDD-52E4-DA24-0C0A1C7FFF31}"/>
+              </a:ext>
+            </a:extLst>
+          </p:cNvPr>
+          <p:cNvPicPr>
+            <a:picLocks noChangeAspect="1"/>
+          </p:cNvPicPr>
+          <p:nvPr/>
+        </p:nvPicPr>
+        <p:blipFill>
+          <a:blip r:embed="rId5"/>
+          <a:srcRect l="22194" r="22194"/>
+          <a:stretch/>
+        </p:blipFill>
+        <p:spPr>
+          <a:xfrm>
+            <a:off x="9568942" y="188959"/>
+            <a:ext cx="1962142" cy="1922686"/>
           </a:xfrm>
           <a:prstGeom prst="rect">
             <a:avLst/>
@@ -11000,4 +11554,319 @@
   </a:objectDefaults>
   <a:extraClrSchemeLst/>
 </a:theme>
+</file>
+
+<file path=ppt/theme/theme2.xml><?xml version="1.0" encoding="utf-8"?>
+<a:theme xmlns:a="http://schemas.openxmlformats.org/drawingml/2006/main" name="Tema di Office">
+  <a:themeElements>
+    <a:clrScheme name="Office">
+      <a:dk1>
+        <a:sysClr val="windowText" lastClr="000000"/>
+      </a:dk1>
+      <a:lt1>
+        <a:sysClr val="window" lastClr="FFFFFF"/>
+      </a:lt1>
+      <a:dk2>
+        <a:srgbClr val="0E2841"/>
+      </a:dk2>
+      <a:lt2>
+        <a:srgbClr val="E8E8E8"/>
+      </a:lt2>
+      <a:accent1>
+        <a:srgbClr val="156082"/>
+      </a:accent1>
+      <a:accent2>
+        <a:srgbClr val="E97132"/>
+      </a:accent2>
+      <a:accent3>
+        <a:srgbClr val="196B24"/>
+      </a:accent3>
+      <a:accent4>
+        <a:srgbClr val="0F9ED5"/>
+      </a:accent4>
+      <a:accent5>
+        <a:srgbClr val="A02B93"/>
+      </a:accent5>
+      <a:accent6>
+        <a:srgbClr val="4EA72E"/>
+      </a:accent6>
+      <a:hlink>
+        <a:srgbClr val="467886"/>
+      </a:hlink>
+      <a:folHlink>
+        <a:srgbClr val="96607D"/>
+      </a:folHlink>
+    </a:clrScheme>
+    <a:fontScheme name="Office">
+      <a:majorFont>
+        <a:latin typeface="Aptos Display" panose="02110004020202020204"/>
+        <a:ea typeface=""/>
+        <a:cs typeface=""/>
+        <a:font script="Jpan" typeface="游ゴシック Light"/>
+        <a:font script="Hang" typeface="맑은 고딕"/>
+        <a:font script="Hans" typeface="等线 Light"/>
+        <a:font script="Hant" typeface="新細明體"/>
+        <a:font script="Arab" typeface="Times New Roman"/>
+        <a:font script="Hebr" typeface="Times New Roman"/>
+        <a:font script="Thai" typeface="Angsana New"/>
+        <a:font script="Ethi" typeface="Nyala"/>
+        <a:font script="Beng" typeface="Vrinda"/>
+        <a:font script="Gujr" typeface="Shruti"/>
+        <a:font script="Khmr" typeface="MoolBoran"/>
+        <a:font script="Knda" typeface="Tunga"/>
+        <a:font script="Guru" typeface="Raavi"/>
+        <a:font script="Cans" typeface="Euphemia"/>
+        <a:font script="Cher" typeface="Plantagenet Cherokee"/>
+        <a:font script="Yiii" typeface="Microsoft Yi Baiti"/>
+        <a:font script="Tibt" typeface="Microsoft Himalaya"/>
+        <a:font script="Thaa" typeface="MV Boli"/>
+        <a:font script="Deva" typeface="Mangal"/>
+        <a:font script="Telu" typeface="Gautami"/>
+        <a:font script="Taml" typeface="Latha"/>
+        <a:font script="Syrc" typeface="Estrangelo Edessa"/>
+        <a:font script="Orya" typeface="Kalinga"/>
+        <a:font script="Mlym" typeface="Kartika"/>
+        <a:font script="Laoo" typeface="DokChampa"/>
+        <a:font script="Sinh" typeface="Iskoola Pota"/>
+        <a:font script="Mong" typeface="Mongolian Baiti"/>
+        <a:font script="Viet" typeface="Times New Roman"/>
+        <a:font script="Uigh" typeface="Microsoft Uighur"/>
+        <a:font script="Geor" typeface="Sylfaen"/>
+        <a:font script="Armn" typeface="Arial"/>
+        <a:font script="Bugi" typeface="Leelawadee UI"/>
+        <a:font script="Bopo" typeface="Microsoft JhengHei"/>
+        <a:font script="Java" typeface="Javanese Text"/>
+        <a:font script="Lisu" typeface="Segoe UI"/>
+        <a:font script="Mymr" typeface="Myanmar Text"/>
+        <a:font script="Nkoo" typeface="Ebrima"/>
+        <a:font script="Olck" typeface="Nirmala UI"/>
+        <a:font script="Osma" typeface="Ebrima"/>
+        <a:font script="Phag" typeface="Phagspa"/>
+        <a:font script="Syrn" typeface="Estrangelo Edessa"/>
+        <a:font script="Syrj" typeface="Estrangelo Edessa"/>
+        <a:font script="Syre" typeface="Estrangelo Edessa"/>
+        <a:font script="Sora" typeface="Nirmala UI"/>
+        <a:font script="Tale" typeface="Microsoft Tai Le"/>
+        <a:font script="Talu" typeface="Microsoft New Tai Lue"/>
+        <a:font script="Tfng" typeface="Ebrima"/>
+      </a:majorFont>
+      <a:minorFont>
+        <a:latin typeface="Aptos" panose="02110004020202020204"/>
+        <a:ea typeface=""/>
+        <a:cs typeface=""/>
+        <a:font script="Jpan" typeface="游ゴシック"/>
+        <a:font script="Hang" typeface="맑은 고딕"/>
+        <a:font script="Hans" typeface="等线"/>
+        <a:font script="Hant" typeface="新細明體"/>
+        <a:font script="Arab" typeface="Arial"/>
+        <a:font script="Hebr" typeface="Arial"/>
+        <a:font script="Thai" typeface="Cordia New"/>
+        <a:font script="Ethi" typeface="Nyala"/>
+        <a:font script="Beng" typeface="Vrinda"/>
+        <a:font script="Gujr" typeface="Shruti"/>
+        <a:font script="Khmr" typeface="DaunPenh"/>
+        <a:font script="Knda" typeface="Tunga"/>
+        <a:font script="Guru" typeface="Raavi"/>
+        <a:font script="Cans" typeface="Euphemia"/>
+        <a:font script="Cher" typeface="Plantagenet Cherokee"/>
+        <a:font script="Yiii" typeface="Microsoft Yi Baiti"/>
+        <a:font script="Tibt" typeface="Microsoft Himalaya"/>
+        <a:font script="Thaa" typeface="MV Boli"/>
+        <a:font script="Deva" typeface="Mangal"/>
+        <a:font script="Telu" typeface="Gautami"/>
+        <a:font script="Taml" typeface="Latha"/>
+        <a:font script="Syrc" typeface="Estrangelo Edessa"/>
+        <a:font script="Orya" typeface="Kalinga"/>
+        <a:font script="Mlym" typeface="Kartika"/>
+        <a:font script="Laoo" typeface="DokChampa"/>
+        <a:font script="Sinh" typeface="Iskoola Pota"/>
+        <a:font script="Mong" typeface="Mongolian Baiti"/>
+        <a:font script="Viet" typeface="Arial"/>
+        <a:font script="Uigh" typeface="Microsoft Uighur"/>
+        <a:font script="Geor" typeface="Sylfaen"/>
+        <a:font script="Armn" typeface="Arial"/>
+        <a:font script="Bugi" typeface="Leelawadee UI"/>
+        <a:font script="Bopo" typeface="Microsoft JhengHei"/>
+        <a:font script="Java" typeface="Javanese Text"/>
+        <a:font script="Lisu" typeface="Segoe UI"/>
+        <a:font script="Mymr" typeface="Myanmar Text"/>
+        <a:font script="Nkoo" typeface="Ebrima"/>
+        <a:font script="Olck" typeface="Nirmala UI"/>
+        <a:font script="Osma" typeface="Ebrima"/>
+        <a:font script="Phag" typeface="Phagspa"/>
+        <a:font script="Syrn" typeface="Estrangelo Edessa"/>
+        <a:font script="Syrj" typeface="Estrangelo Edessa"/>
+        <a:font script="Syre" typeface="Estrangelo Edessa"/>
+        <a:font script="Sora" typeface="Nirmala UI"/>
+        <a:font script="Tale" typeface="Microsoft Tai Le"/>
+        <a:font script="Talu" typeface="Microsoft New Tai Lue"/>
+        <a:font script="Tfng" typeface="Ebrima"/>
+      </a:minorFont>
+    </a:fontScheme>
+    <a:fmtScheme name="Office">
+      <a:fillStyleLst>
+        <a:solidFill>
+          <a:schemeClr val="phClr"/>
+        </a:solidFill>
+        <a:gradFill rotWithShape="1">
+          <a:gsLst>
+            <a:gs pos="0">
+              <a:schemeClr val="phClr">
+                <a:lumMod val="110000"/>
+                <a:satMod val="105000"/>
+                <a:tint val="67000"/>
+              </a:schemeClr>
+            </a:gs>
+            <a:gs pos="50000">
+              <a:schemeClr val="phClr">
+                <a:lumMod val="105000"/>
+                <a:satMod val="103000"/>
+                <a:tint val="73000"/>
+              </a:schemeClr>
+            </a:gs>
+            <a:gs pos="100000">
+              <a:schemeClr val="phClr">
+                <a:lumMod val="105000"/>
+                <a:satMod val="109000"/>
+                <a:tint val="81000"/>
+              </a:schemeClr>
+            </a:gs>
+          </a:gsLst>
+          <a:lin ang="5400000" scaled="0"/>
+        </a:gradFill>
+        <a:gradFill rotWithShape="1">
+          <a:gsLst>
+            <a:gs pos="0">
+              <a:schemeClr val="phClr">
+                <a:satMod val="103000"/>
+                <a:lumMod val="102000"/>
+                <a:tint val="94000"/>
+              </a:schemeClr>
+            </a:gs>
+            <a:gs pos="50000">
+              <a:schemeClr val="phClr">
+                <a:satMod val="110000"/>
+                <a:lumMod val="100000"/>
+                <a:shade val="100000"/>
+              </a:schemeClr>
+            </a:gs>
+            <a:gs pos="100000">
+              <a:schemeClr val="phClr">
+                <a:lumMod val="99000"/>
+                <a:satMod val="120000"/>
+                <a:shade val="78000"/>
+              </a:schemeClr>
+            </a:gs>
+          </a:gsLst>
+          <a:lin ang="5400000" scaled="0"/>
+        </a:gradFill>
+      </a:fillStyleLst>
+      <a:lnStyleLst>
+        <a:ln w="12700" cap="flat" cmpd="sng" algn="ctr">
+          <a:solidFill>
+            <a:schemeClr val="phClr"/>
+          </a:solidFill>
+          <a:prstDash val="solid"/>
+          <a:miter lim="800000"/>
+        </a:ln>
+        <a:ln w="19050" cap="flat" cmpd="sng" algn="ctr">
+          <a:solidFill>
+            <a:schemeClr val="phClr"/>
+          </a:solidFill>
+          <a:prstDash val="solid"/>
+          <a:miter lim="800000"/>
+        </a:ln>
+        <a:ln w="25400" cap="flat" cmpd="sng" algn="ctr">
+          <a:solidFill>
+            <a:schemeClr val="phClr"/>
+          </a:solidFill>
+          <a:prstDash val="solid"/>
+          <a:miter lim="800000"/>
+        </a:ln>
+      </a:lnStyleLst>
+      <a:effectStyleLst>
+        <a:effectStyle>
+          <a:effectLst/>
+        </a:effectStyle>
+        <a:effectStyle>
+          <a:effectLst/>
+        </a:effectStyle>
+        <a:effectStyle>
+          <a:effectLst>
+            <a:outerShdw blurRad="57150" dist="19050" dir="5400000" algn="ctr" rotWithShape="0">
+              <a:srgbClr val="000000">
+                <a:alpha val="63000"/>
+              </a:srgbClr>
+            </a:outerShdw>
+          </a:effectLst>
+        </a:effectStyle>
+      </a:effectStyleLst>
+      <a:bgFillStyleLst>
+        <a:solidFill>
+          <a:schemeClr val="phClr"/>
+        </a:solidFill>
+        <a:solidFill>
+          <a:schemeClr val="phClr">
+            <a:tint val="95000"/>
+            <a:satMod val="170000"/>
+          </a:schemeClr>
+        </a:solidFill>
+        <a:gradFill rotWithShape="1">
+          <a:gsLst>
+            <a:gs pos="0">
+              <a:schemeClr val="phClr">
+                <a:tint val="93000"/>
+                <a:satMod val="150000"/>
+                <a:shade val="98000"/>
+                <a:lumMod val="102000"/>
+              </a:schemeClr>
+            </a:gs>
+            <a:gs pos="50000">
+              <a:schemeClr val="phClr">
+                <a:tint val="98000"/>
+                <a:satMod val="130000"/>
+                <a:shade val="90000"/>
+                <a:lumMod val="103000"/>
+              </a:schemeClr>
+            </a:gs>
+            <a:gs pos="100000">
+              <a:schemeClr val="phClr">
+                <a:shade val="63000"/>
+                <a:satMod val="120000"/>
+              </a:schemeClr>
+            </a:gs>
+          </a:gsLst>
+          <a:lin ang="5400000" scaled="0"/>
+        </a:gradFill>
+      </a:bgFillStyleLst>
+    </a:fmtScheme>
+  </a:themeElements>
+  <a:objectDefaults>
+    <a:lnDef>
+      <a:spPr/>
+      <a:bodyPr/>
+      <a:lstStyle/>
+      <a:style>
+        <a:lnRef idx="2">
+          <a:schemeClr val="accent1"/>
+        </a:lnRef>
+        <a:fillRef idx="0">
+          <a:schemeClr val="accent1"/>
+        </a:fillRef>
+        <a:effectRef idx="1">
+          <a:schemeClr val="accent1"/>
+        </a:effectRef>
+        <a:fontRef idx="minor">
+          <a:schemeClr val="tx1"/>
+        </a:fontRef>
+      </a:style>
+    </a:lnDef>
+  </a:objectDefaults>
+  <a:extraClrSchemeLst/>
+  <a:extLst>
+    <a:ext uri="{05A4C25C-085E-4340-85A3-A5531E510DB2}">
+      <thm15:themeFamily xmlns:thm15="http://schemas.microsoft.com/office/thememl/2012/main" name="Office Theme" id="{2E142A2C-CD16-42D6-873A-C26D2A0506FA}" vid="{1BDDFF52-6CD6-40A5-AB3C-68EB2F1E4D0A}"/>
+    </a:ext>
+  </a:extLst>
+</a:theme>
 </file>
--- a/presentation/FinSight_AI_Pitch_Deck_Enterprise.pptx
+++ b/presentation/FinSight_AI_Pitch_Deck_Enterprise.pptx
@@ -4089,6 +4089,18 @@
   <p:clrMapOvr>
     <a:masterClrMapping/>
   </p:clrMapOvr>
+  <mc:AlternateContent xmlns:mc="http://schemas.openxmlformats.org/markup-compatibility/2006">
+    <mc:Choice xmlns:p14="http://schemas.microsoft.com/office/powerpoint/2010/main" Requires="p14">
+      <p:transition spd="slow" p14:dur="1600">
+        <p14:prism isContent="1" isInverted="1"/>
+      </p:transition>
+    </mc:Choice>
+    <mc:Fallback>
+      <p:transition spd="slow">
+        <p:fade/>
+      </p:transition>
+    </mc:Fallback>
+  </mc:AlternateContent>
 </p:sld>
 </file>
 
@@ -5328,6 +5340,18 @@
   <p:clrMapOvr>
     <a:masterClrMapping/>
   </p:clrMapOvr>
+  <mc:AlternateContent xmlns:mc="http://schemas.openxmlformats.org/markup-compatibility/2006">
+    <mc:Choice xmlns:p14="http://schemas.microsoft.com/office/powerpoint/2010/main" Requires="p14">
+      <p:transition spd="slow" p14:dur="1600">
+        <p14:prism isContent="1" isInverted="1"/>
+      </p:transition>
+    </mc:Choice>
+    <mc:Fallback>
+      <p:transition spd="slow">
+        <p:fade/>
+      </p:transition>
+    </mc:Fallback>
+  </mc:AlternateContent>
 </p:sld>
 </file>
 
@@ -6674,6 +6698,18 @@
   <p:clrMapOvr>
     <a:masterClrMapping/>
   </p:clrMapOvr>
+  <mc:AlternateContent xmlns:mc="http://schemas.openxmlformats.org/markup-compatibility/2006">
+    <mc:Choice xmlns:p14="http://schemas.microsoft.com/office/powerpoint/2010/main" Requires="p14">
+      <p:transition spd="slow" p14:dur="1600">
+        <p14:prism isContent="1" isInverted="1"/>
+      </p:transition>
+    </mc:Choice>
+    <mc:Fallback>
+      <p:transition spd="slow">
+        <p:fade/>
+      </p:transition>
+    </mc:Fallback>
+  </mc:AlternateContent>
 </p:sld>
 </file>
 
@@ -8174,6 +8210,18 @@
   <p:clrMapOvr>
     <a:masterClrMapping/>
   </p:clrMapOvr>
+  <mc:AlternateContent xmlns:mc="http://schemas.openxmlformats.org/markup-compatibility/2006">
+    <mc:Choice xmlns:p14="http://schemas.microsoft.com/office/powerpoint/2010/main" Requires="p14">
+      <p:transition spd="slow" p14:dur="1600">
+        <p14:prism isContent="1" isInverted="1"/>
+      </p:transition>
+    </mc:Choice>
+    <mc:Fallback>
+      <p:transition spd="slow">
+        <p:fade/>
+      </p:transition>
+    </mc:Fallback>
+  </mc:AlternateContent>
 </p:sld>
 </file>
 
@@ -9156,6 +9204,18 @@
   <p:clrMapOvr>
     <a:masterClrMapping/>
   </p:clrMapOvr>
+  <mc:AlternateContent xmlns:mc="http://schemas.openxmlformats.org/markup-compatibility/2006">
+    <mc:Choice xmlns:p14="http://schemas.microsoft.com/office/powerpoint/2010/main" Requires="p14">
+      <p:transition spd="slow" p14:dur="1600">
+        <p14:prism isContent="1" isInverted="1"/>
+      </p:transition>
+    </mc:Choice>
+    <mc:Fallback>
+      <p:transition spd="slow">
+        <p:fade/>
+      </p:transition>
+    </mc:Fallback>
+  </mc:AlternateContent>
 </p:sld>
 </file>
 
@@ -10135,6 +10195,18 @@
   <p:clrMapOvr>
     <a:masterClrMapping/>
   </p:clrMapOvr>
+  <mc:AlternateContent xmlns:mc="http://schemas.openxmlformats.org/markup-compatibility/2006">
+    <mc:Choice xmlns:p14="http://schemas.microsoft.com/office/powerpoint/2010/main" Requires="p14">
+      <p:transition spd="slow" p14:dur="1600">
+        <p14:prism isContent="1" isInverted="1"/>
+      </p:transition>
+    </mc:Choice>
+    <mc:Fallback>
+      <p:transition spd="slow">
+        <p:fade/>
+      </p:transition>
+    </mc:Fallback>
+  </mc:AlternateContent>
 </p:sld>
 </file>
 
@@ -11233,6 +11305,18 @@
   <p:clrMapOvr>
     <a:masterClrMapping/>
   </p:clrMapOvr>
+  <mc:AlternateContent xmlns:mc="http://schemas.openxmlformats.org/markup-compatibility/2006">
+    <mc:Choice xmlns:p14="http://schemas.microsoft.com/office/powerpoint/2010/main" Requires="p14">
+      <p:transition spd="slow" p14:dur="1600">
+        <p14:prism isContent="1" isInverted="1"/>
+      </p:transition>
+    </mc:Choice>
+    <mc:Fallback>
+      <p:transition spd="slow">
+        <p:fade/>
+      </p:transition>
+    </mc:Fallback>
+  </mc:AlternateContent>
 </p:sld>
 </file>
 
